--- a/design-system/samples/Mivada_Company_Overview.pptx
+++ b/design-system/samples/Mivada_Company_Overview.pptx
@@ -15,6 +15,7 @@
     <p:sldId id="263" r:id="rId14"/>
     <p:sldId id="264" r:id="rId15"/>
     <p:sldId id="265" r:id="rId16"/>
+    <p:sldId id="266" r:id="rId17"/>
   </p:sldIdLst>
   <p:sldSz cx="12191695" cy="6858000" type="screen4x3"/>
   <p:notesSz cx="6858000" cy="9144000"/>
@@ -3195,6 +3196,1111 @@
     <p:bg>
       <p:bgPr>
         <a:solidFill>
+          <a:srgbClr val="FAFAFA"/>
+        </a:solidFill>
+        <a:effectLst/>
+      </p:bgPr>
+    </p:bg>
+    <p:spTree>
+      <p:nvGrpSpPr>
+        <p:cNvPr id="1" name=""/>
+        <p:cNvGrpSpPr/>
+        <p:nvPr/>
+      </p:nvGrpSpPr>
+      <p:grpSpPr/>
+      <p:pic>
+        <p:nvPicPr>
+          <p:cNvPr id="2" name="Picture 1" descr="Mivada_Icon_Melon_RGB_L.png"/>
+          <p:cNvPicPr>
+            <a:picLocks noChangeAspect="1"/>
+          </p:cNvPicPr>
+          <p:nvPr/>
+        </p:nvPicPr>
+        <p:blipFill>
+          <a:blip r:embed="rId2"/>
+          <a:stretch>
+            <a:fillRect/>
+          </a:stretch>
+        </p:blipFill>
+        <p:spPr>
+          <a:xfrm>
+            <a:off x="877824" y="457200"/>
+            <a:ext cx="402032" cy="237744"/>
+          </a:xfrm>
+          <a:prstGeom prst="rect">
+            <a:avLst/>
+          </a:prstGeom>
+        </p:spPr>
+      </p:pic>
+      <p:sp>
+        <p:nvSpPr>
+          <p:cNvPr id="3" name="TextBox 2"/>
+          <p:cNvSpPr txBox="1"/>
+          <p:nvPr/>
+        </p:nvSpPr>
+        <p:spPr>
+          <a:xfrm>
+            <a:off x="8259775" y="420624"/>
+            <a:ext cx="3200400" cy="320040"/>
+          </a:xfrm>
+          <a:prstGeom prst="rect">
+            <a:avLst/>
+          </a:prstGeom>
+          <a:noFill/>
+        </p:spPr>
+        <p:txBody>
+          <a:bodyPr wrap="square" anchor="t" lIns="0" rIns="0" tIns="0" bIns="0"/>
+          <a:lstStyle/>
+          <a:p>
+            <a:pPr algn="r">
+              <a:lnSpc>
+                <a:spcPct val="100000"/>
+              </a:lnSpc>
+              <a:spcBef>
+                <a:spcPts val="0"/>
+              </a:spcBef>
+              <a:spcAft>
+                <a:spcPts val="0"/>
+              </a:spcAft>
+            </a:pPr>
+            <a:r>
+              <a:rPr sz="1100" b="1" i="0" lang="en-AU" spc="154" cap="all">
+                <a:solidFill>
+                  <a:srgbClr val="EA493F"/>
+                </a:solidFill>
+                <a:latin typeface="Inter"/>
+              </a:rPr>
+              <a:t>08 · CAPABILITY</a:t>
+            </a:r>
+          </a:p>
+        </p:txBody>
+      </p:sp>
+      <p:sp>
+        <p:nvSpPr>
+          <p:cNvPr id="4" name="TextBox 3"/>
+          <p:cNvSpPr txBox="1"/>
+          <p:nvPr/>
+        </p:nvSpPr>
+        <p:spPr>
+          <a:xfrm>
+            <a:off x="841248" y="914400"/>
+            <a:ext cx="10436047" cy="1097280"/>
+          </a:xfrm>
+          <a:prstGeom prst="rect">
+            <a:avLst/>
+          </a:prstGeom>
+          <a:noFill/>
+        </p:spPr>
+        <p:txBody>
+          <a:bodyPr wrap="square" anchor="t" lIns="0" rIns="0" tIns="0" bIns="0"/>
+          <a:lstStyle/>
+          <a:p>
+            <a:pPr algn="l">
+              <a:lnSpc>
+                <a:spcPct val="100000"/>
+              </a:lnSpc>
+              <a:spcBef>
+                <a:spcPts val="0"/>
+              </a:spcBef>
+              <a:spcAft>
+                <a:spcPts val="0"/>
+              </a:spcAft>
+            </a:pPr>
+            <a:r>
+              <a:rPr sz="3400" b="1" i="0" lang="en-AU" spc="-74">
+                <a:solidFill>
+                  <a:srgbClr val="111111"/>
+                </a:solidFill>
+                <a:latin typeface="Inter"/>
+              </a:rPr>
+              <a:t>Proven in </a:t>
+            </a:r>
+            <a:r>
+              <a:rPr sz="3400" b="1" i="0" lang="en-AU" spc="-74">
+                <a:solidFill>
+                  <a:srgbClr val="EA493F"/>
+                </a:solidFill>
+                <a:latin typeface="Inter"/>
+              </a:rPr>
+              <a:t>Workday.</a:t>
+            </a:r>
+          </a:p>
+        </p:txBody>
+      </p:sp>
+      <p:sp>
+        <p:nvSpPr>
+          <p:cNvPr id="5" name="TextBox 4"/>
+          <p:cNvSpPr txBox="1"/>
+          <p:nvPr/>
+        </p:nvSpPr>
+        <p:spPr>
+          <a:xfrm>
+            <a:off x="877824" y="1993392"/>
+            <a:ext cx="9875520" cy="822960"/>
+          </a:xfrm>
+          <a:prstGeom prst="rect">
+            <a:avLst/>
+          </a:prstGeom>
+          <a:noFill/>
+        </p:spPr>
+        <p:txBody>
+          <a:bodyPr wrap="square" anchor="t" lIns="0" rIns="0" tIns="0" bIns="0"/>
+          <a:lstStyle/>
+          <a:p>
+            <a:pPr algn="l">
+              <a:lnSpc>
+                <a:spcPct val="130000"/>
+              </a:lnSpc>
+              <a:spcBef>
+                <a:spcPts val="0"/>
+              </a:spcBef>
+              <a:spcAft>
+                <a:spcPts val="0"/>
+              </a:spcAft>
+            </a:pPr>
+            <a:r>
+              <a:rPr sz="1400" b="0" i="0" lang="en-AU" spc="0">
+                <a:solidFill>
+                  <a:srgbClr val="323232"/>
+                </a:solidFill>
+                <a:latin typeface="Inter"/>
+              </a:rPr>
+              <a:t>A decade of Workday delivery — consultants average 3+ years on the platform.</a:t>
+            </a:r>
+          </a:p>
+        </p:txBody>
+      </p:sp>
+      <p:cxnSp>
+        <p:nvCxnSpPr>
+          <p:cNvPr id="6" name="Connector 5"/>
+          <p:cNvCxnSpPr/>
+          <p:nvPr/>
+        </p:nvCxnSpPr>
+        <p:spPr>
+          <a:xfrm>
+            <a:off x="877824" y="3081527"/>
+            <a:ext cx="10436047" cy="0"/>
+          </a:xfrm>
+          <a:prstGeom prst="bentConnector3">
+            <a:avLst/>
+          </a:prstGeom>
+          <a:ln w="12700">
+            <a:solidFill>
+              <a:srgbClr val="E4E4E0"/>
+            </a:solidFill>
+          </a:ln>
+          <a:effectLst/>
+        </p:spPr>
+        <p:style>
+          <a:lnRef idx="2">
+            <a:schemeClr val="accent1"/>
+          </a:lnRef>
+          <a:fillRef idx="0">
+            <a:schemeClr val="accent1"/>
+          </a:fillRef>
+          <a:effectRef idx="1">
+            <a:schemeClr val="accent1"/>
+          </a:effectRef>
+          <a:fontRef idx="minor">
+            <a:schemeClr val="tx1"/>
+          </a:fontRef>
+        </p:style>
+      </p:cxnSp>
+      <p:sp>
+        <p:nvSpPr>
+          <p:cNvPr id="7" name="TextBox 6"/>
+          <p:cNvSpPr txBox="1"/>
+          <p:nvPr/>
+        </p:nvSpPr>
+        <p:spPr>
+          <a:xfrm>
+            <a:off x="877824" y="3246120"/>
+            <a:ext cx="2444419" cy="1051560"/>
+          </a:xfrm>
+          <a:prstGeom prst="rect">
+            <a:avLst/>
+          </a:prstGeom>
+          <a:noFill/>
+        </p:spPr>
+        <p:txBody>
+          <a:bodyPr wrap="square" anchor="b" lIns="0" rIns="0" tIns="0" bIns="0"/>
+          <a:lstStyle/>
+          <a:p>
+            <a:pPr algn="l">
+              <a:lnSpc>
+                <a:spcPct val="92000"/>
+              </a:lnSpc>
+              <a:spcBef>
+                <a:spcPts val="0"/>
+              </a:spcBef>
+              <a:spcAft>
+                <a:spcPts val="0"/>
+              </a:spcAft>
+            </a:pPr>
+            <a:r>
+              <a:rPr sz="5800" b="1" i="0" lang="en-AU" spc="-203">
+                <a:solidFill>
+                  <a:srgbClr val="111111"/>
+                </a:solidFill>
+                <a:latin typeface="Inter"/>
+              </a:rPr>
+              <a:t>3</a:t>
+            </a:r>
+            <a:r>
+              <a:rPr sz="5800" b="1" i="0" lang="en-AU" spc="-203">
+                <a:solidFill>
+                  <a:srgbClr val="EA493F"/>
+                </a:solidFill>
+                <a:latin typeface="Inter"/>
+              </a:rPr>
+              <a:t>+</a:t>
+            </a:r>
+          </a:p>
+        </p:txBody>
+      </p:sp>
+      <p:sp>
+        <p:nvSpPr>
+          <p:cNvPr id="8" name="TextBox 7"/>
+          <p:cNvSpPr txBox="1"/>
+          <p:nvPr/>
+        </p:nvSpPr>
+        <p:spPr>
+          <a:xfrm>
+            <a:off x="877824" y="4379976"/>
+            <a:ext cx="2380411" cy="640080"/>
+          </a:xfrm>
+          <a:prstGeom prst="rect">
+            <a:avLst/>
+          </a:prstGeom>
+          <a:noFill/>
+        </p:spPr>
+        <p:txBody>
+          <a:bodyPr wrap="square" anchor="t" lIns="0" rIns="0" tIns="0" bIns="0"/>
+          <a:lstStyle/>
+          <a:p>
+            <a:pPr algn="l">
+              <a:lnSpc>
+                <a:spcPct val="115000"/>
+              </a:lnSpc>
+              <a:spcBef>
+                <a:spcPts val="0"/>
+              </a:spcBef>
+              <a:spcAft>
+                <a:spcPts val="0"/>
+              </a:spcAft>
+            </a:pPr>
+            <a:r>
+              <a:rPr sz="1050" b="1" i="0" lang="en-AU" spc="126" cap="all">
+                <a:solidFill>
+                  <a:srgbClr val="AEAEAE"/>
+                </a:solidFill>
+                <a:latin typeface="Inter"/>
+              </a:rPr>
+              <a:t>CERTIFICATIONS / CONSULTANT</a:t>
+            </a:r>
+          </a:p>
+        </p:txBody>
+      </p:sp>
+      <p:cxnSp>
+        <p:nvCxnSpPr>
+          <p:cNvPr id="9" name="Connector 8"/>
+          <p:cNvCxnSpPr/>
+          <p:nvPr/>
+        </p:nvCxnSpPr>
+        <p:spPr>
+          <a:xfrm>
+            <a:off x="3486835" y="3291839"/>
+            <a:ext cx="0" cy="1554481"/>
+          </a:xfrm>
+          <a:prstGeom prst="bentConnector3">
+            <a:avLst/>
+          </a:prstGeom>
+          <a:ln w="12700">
+            <a:solidFill>
+              <a:srgbClr val="E4E4E0"/>
+            </a:solidFill>
+          </a:ln>
+          <a:effectLst/>
+        </p:spPr>
+        <p:style>
+          <a:lnRef idx="2">
+            <a:schemeClr val="accent1"/>
+          </a:lnRef>
+          <a:fillRef idx="0">
+            <a:schemeClr val="accent1"/>
+          </a:fillRef>
+          <a:effectRef idx="1">
+            <a:schemeClr val="accent1"/>
+          </a:effectRef>
+          <a:fontRef idx="minor">
+            <a:schemeClr val="tx1"/>
+          </a:fontRef>
+        </p:style>
+      </p:cxnSp>
+      <p:sp>
+        <p:nvSpPr>
+          <p:cNvPr id="10" name="TextBox 9"/>
+          <p:cNvSpPr txBox="1"/>
+          <p:nvPr/>
+        </p:nvSpPr>
+        <p:spPr>
+          <a:xfrm>
+            <a:off x="3797731" y="3246120"/>
+            <a:ext cx="2133523" cy="1051560"/>
+          </a:xfrm>
+          <a:prstGeom prst="rect">
+            <a:avLst/>
+          </a:prstGeom>
+          <a:noFill/>
+        </p:spPr>
+        <p:txBody>
+          <a:bodyPr wrap="square" anchor="b" lIns="0" rIns="0" tIns="0" bIns="0"/>
+          <a:lstStyle/>
+          <a:p>
+            <a:pPr algn="l">
+              <a:lnSpc>
+                <a:spcPct val="92000"/>
+              </a:lnSpc>
+              <a:spcBef>
+                <a:spcPts val="0"/>
+              </a:spcBef>
+              <a:spcAft>
+                <a:spcPts val="0"/>
+              </a:spcAft>
+            </a:pPr>
+            <a:r>
+              <a:rPr sz="5800" b="1" i="0" lang="en-AU" spc="-203">
+                <a:solidFill>
+                  <a:srgbClr val="111111"/>
+                </a:solidFill>
+                <a:latin typeface="Inter"/>
+              </a:rPr>
+              <a:t>2000</a:t>
+            </a:r>
+            <a:r>
+              <a:rPr sz="5800" b="1" i="0" lang="en-AU" spc="-203">
+                <a:solidFill>
+                  <a:srgbClr val="EA493F"/>
+                </a:solidFill>
+                <a:latin typeface="Inter"/>
+              </a:rPr>
+              <a:t>+</a:t>
+            </a:r>
+          </a:p>
+        </p:txBody>
+      </p:sp>
+      <p:sp>
+        <p:nvSpPr>
+          <p:cNvPr id="11" name="TextBox 10"/>
+          <p:cNvSpPr txBox="1"/>
+          <p:nvPr/>
+        </p:nvSpPr>
+        <p:spPr>
+          <a:xfrm>
+            <a:off x="3797731" y="4379976"/>
+            <a:ext cx="2069515" cy="640080"/>
+          </a:xfrm>
+          <a:prstGeom prst="rect">
+            <a:avLst/>
+          </a:prstGeom>
+          <a:noFill/>
+        </p:spPr>
+        <p:txBody>
+          <a:bodyPr wrap="square" anchor="t" lIns="0" rIns="0" tIns="0" bIns="0"/>
+          <a:lstStyle/>
+          <a:p>
+            <a:pPr algn="l">
+              <a:lnSpc>
+                <a:spcPct val="115000"/>
+              </a:lnSpc>
+              <a:spcBef>
+                <a:spcPts val="0"/>
+              </a:spcBef>
+              <a:spcAft>
+                <a:spcPts val="0"/>
+              </a:spcAft>
+            </a:pPr>
+            <a:r>
+              <a:rPr sz="1050" b="1" i="0" lang="en-AU" spc="126" cap="all">
+                <a:solidFill>
+                  <a:srgbClr val="AEAEAE"/>
+                </a:solidFill>
+                <a:latin typeface="Inter"/>
+              </a:rPr>
+              <a:t>WORKDAY INTEGRATIONS</a:t>
+            </a:r>
+          </a:p>
+        </p:txBody>
+      </p:sp>
+      <p:cxnSp>
+        <p:nvCxnSpPr>
+          <p:cNvPr id="12" name="Connector 11"/>
+          <p:cNvCxnSpPr/>
+          <p:nvPr/>
+        </p:nvCxnSpPr>
+        <p:spPr>
+          <a:xfrm>
+            <a:off x="6095847" y="3291839"/>
+            <a:ext cx="0" cy="1554481"/>
+          </a:xfrm>
+          <a:prstGeom prst="bentConnector3">
+            <a:avLst/>
+          </a:prstGeom>
+          <a:ln w="12700">
+            <a:solidFill>
+              <a:srgbClr val="E4E4E0"/>
+            </a:solidFill>
+          </a:ln>
+          <a:effectLst/>
+        </p:spPr>
+        <p:style>
+          <a:lnRef idx="2">
+            <a:schemeClr val="accent1"/>
+          </a:lnRef>
+          <a:fillRef idx="0">
+            <a:schemeClr val="accent1"/>
+          </a:fillRef>
+          <a:effectRef idx="1">
+            <a:schemeClr val="accent1"/>
+          </a:effectRef>
+          <a:fontRef idx="minor">
+            <a:schemeClr val="tx1"/>
+          </a:fontRef>
+        </p:style>
+      </p:cxnSp>
+      <p:sp>
+        <p:nvSpPr>
+          <p:cNvPr id="13" name="TextBox 12"/>
+          <p:cNvSpPr txBox="1"/>
+          <p:nvPr/>
+        </p:nvSpPr>
+        <p:spPr>
+          <a:xfrm>
+            <a:off x="6406743" y="3246120"/>
+            <a:ext cx="2133523" cy="1051560"/>
+          </a:xfrm>
+          <a:prstGeom prst="rect">
+            <a:avLst/>
+          </a:prstGeom>
+          <a:noFill/>
+        </p:spPr>
+        <p:txBody>
+          <a:bodyPr wrap="square" anchor="b" lIns="0" rIns="0" tIns="0" bIns="0"/>
+          <a:lstStyle/>
+          <a:p>
+            <a:pPr algn="l">
+              <a:lnSpc>
+                <a:spcPct val="92000"/>
+              </a:lnSpc>
+              <a:spcBef>
+                <a:spcPts val="0"/>
+              </a:spcBef>
+              <a:spcAft>
+                <a:spcPts val="0"/>
+              </a:spcAft>
+            </a:pPr>
+            <a:r>
+              <a:rPr sz="5800" b="1" i="0" lang="en-AU" spc="-203">
+                <a:solidFill>
+                  <a:srgbClr val="111111"/>
+                </a:solidFill>
+                <a:latin typeface="Inter"/>
+              </a:rPr>
+              <a:t>3000</a:t>
+            </a:r>
+            <a:r>
+              <a:rPr sz="5800" b="1" i="0" lang="en-AU" spc="-203">
+                <a:solidFill>
+                  <a:srgbClr val="EA493F"/>
+                </a:solidFill>
+                <a:latin typeface="Inter"/>
+              </a:rPr>
+              <a:t>+</a:t>
+            </a:r>
+          </a:p>
+        </p:txBody>
+      </p:sp>
+      <p:sp>
+        <p:nvSpPr>
+          <p:cNvPr id="14" name="TextBox 13"/>
+          <p:cNvSpPr txBox="1"/>
+          <p:nvPr/>
+        </p:nvSpPr>
+        <p:spPr>
+          <a:xfrm>
+            <a:off x="6406743" y="4379976"/>
+            <a:ext cx="2069515" cy="640080"/>
+          </a:xfrm>
+          <a:prstGeom prst="rect">
+            <a:avLst/>
+          </a:prstGeom>
+          <a:noFill/>
+        </p:spPr>
+        <p:txBody>
+          <a:bodyPr wrap="square" anchor="t" lIns="0" rIns="0" tIns="0" bIns="0"/>
+          <a:lstStyle/>
+          <a:p>
+            <a:pPr algn="l">
+              <a:lnSpc>
+                <a:spcPct val="115000"/>
+              </a:lnSpc>
+              <a:spcBef>
+                <a:spcPts val="0"/>
+              </a:spcBef>
+              <a:spcAft>
+                <a:spcPts val="0"/>
+              </a:spcAft>
+            </a:pPr>
+            <a:r>
+              <a:rPr sz="1050" b="1" i="0" lang="en-AU" spc="126" cap="all">
+                <a:solidFill>
+                  <a:srgbClr val="AEAEAE"/>
+                </a:solidFill>
+                <a:latin typeface="Inter"/>
+              </a:rPr>
+              <a:t>CUSTOM REPORTS</a:t>
+            </a:r>
+          </a:p>
+        </p:txBody>
+      </p:sp>
+      <p:cxnSp>
+        <p:nvCxnSpPr>
+          <p:cNvPr id="15" name="Connector 14"/>
+          <p:cNvCxnSpPr/>
+          <p:nvPr/>
+        </p:nvCxnSpPr>
+        <p:spPr>
+          <a:xfrm>
+            <a:off x="8704859" y="3291839"/>
+            <a:ext cx="0" cy="1554481"/>
+          </a:xfrm>
+          <a:prstGeom prst="bentConnector3">
+            <a:avLst/>
+          </a:prstGeom>
+          <a:ln w="12700">
+            <a:solidFill>
+              <a:srgbClr val="E4E4E0"/>
+            </a:solidFill>
+          </a:ln>
+          <a:effectLst/>
+        </p:spPr>
+        <p:style>
+          <a:lnRef idx="2">
+            <a:schemeClr val="accent1"/>
+          </a:lnRef>
+          <a:fillRef idx="0">
+            <a:schemeClr val="accent1"/>
+          </a:fillRef>
+          <a:effectRef idx="1">
+            <a:schemeClr val="accent1"/>
+          </a:effectRef>
+          <a:fontRef idx="minor">
+            <a:schemeClr val="tx1"/>
+          </a:fontRef>
+        </p:style>
+      </p:cxnSp>
+      <p:sp>
+        <p:nvSpPr>
+          <p:cNvPr id="16" name="TextBox 15"/>
+          <p:cNvSpPr txBox="1"/>
+          <p:nvPr/>
+        </p:nvSpPr>
+        <p:spPr>
+          <a:xfrm>
+            <a:off x="9015755" y="3246120"/>
+            <a:ext cx="2133523" cy="1051560"/>
+          </a:xfrm>
+          <a:prstGeom prst="rect">
+            <a:avLst/>
+          </a:prstGeom>
+          <a:noFill/>
+        </p:spPr>
+        <p:txBody>
+          <a:bodyPr wrap="square" anchor="b" lIns="0" rIns="0" tIns="0" bIns="0"/>
+          <a:lstStyle/>
+          <a:p>
+            <a:pPr algn="l">
+              <a:lnSpc>
+                <a:spcPct val="92000"/>
+              </a:lnSpc>
+              <a:spcBef>
+                <a:spcPts val="0"/>
+              </a:spcBef>
+              <a:spcAft>
+                <a:spcPts val="0"/>
+              </a:spcAft>
+            </a:pPr>
+            <a:r>
+              <a:rPr sz="5800" b="1" i="0" lang="en-AU" spc="-203">
+                <a:solidFill>
+                  <a:srgbClr val="111111"/>
+                </a:solidFill>
+                <a:latin typeface="Inter"/>
+              </a:rPr>
+              <a:t>30</a:t>
+            </a:r>
+            <a:r>
+              <a:rPr sz="5800" b="1" i="0" lang="en-AU" spc="-203">
+                <a:solidFill>
+                  <a:srgbClr val="EA493F"/>
+                </a:solidFill>
+                <a:latin typeface="Inter"/>
+              </a:rPr>
+              <a:t>+</a:t>
+            </a:r>
+          </a:p>
+        </p:txBody>
+      </p:sp>
+      <p:sp>
+        <p:nvSpPr>
+          <p:cNvPr id="17" name="TextBox 16"/>
+          <p:cNvSpPr txBox="1"/>
+          <p:nvPr/>
+        </p:nvSpPr>
+        <p:spPr>
+          <a:xfrm>
+            <a:off x="9015755" y="4379976"/>
+            <a:ext cx="2069515" cy="640080"/>
+          </a:xfrm>
+          <a:prstGeom prst="rect">
+            <a:avLst/>
+          </a:prstGeom>
+          <a:noFill/>
+        </p:spPr>
+        <p:txBody>
+          <a:bodyPr wrap="square" anchor="t" lIns="0" rIns="0" tIns="0" bIns="0"/>
+          <a:lstStyle/>
+          <a:p>
+            <a:pPr algn="l">
+              <a:lnSpc>
+                <a:spcPct val="115000"/>
+              </a:lnSpc>
+              <a:spcBef>
+                <a:spcPts val="0"/>
+              </a:spcBef>
+              <a:spcAft>
+                <a:spcPts val="0"/>
+              </a:spcAft>
+            </a:pPr>
+            <a:r>
+              <a:rPr sz="1050" b="1" i="0" lang="en-AU" spc="126" cap="all">
+                <a:solidFill>
+                  <a:srgbClr val="AEAEAE"/>
+                </a:solidFill>
+                <a:latin typeface="Inter"/>
+              </a:rPr>
+              <a:t>IMPLEMENTATIONS &amp; SUPPORT</a:t>
+            </a:r>
+          </a:p>
+        </p:txBody>
+      </p:sp>
+      <p:cxnSp>
+        <p:nvCxnSpPr>
+          <p:cNvPr id="18" name="Connector 17"/>
+          <p:cNvCxnSpPr/>
+          <p:nvPr/>
+        </p:nvCxnSpPr>
+        <p:spPr>
+          <a:xfrm>
+            <a:off x="877824" y="4910328"/>
+            <a:ext cx="10436047" cy="0"/>
+          </a:xfrm>
+          <a:prstGeom prst="bentConnector3">
+            <a:avLst/>
+          </a:prstGeom>
+          <a:ln w="12700">
+            <a:solidFill>
+              <a:srgbClr val="E4E4E0"/>
+            </a:solidFill>
+          </a:ln>
+          <a:effectLst/>
+        </p:spPr>
+        <p:style>
+          <a:lnRef idx="2">
+            <a:schemeClr val="accent1"/>
+          </a:lnRef>
+          <a:fillRef idx="0">
+            <a:schemeClr val="accent1"/>
+          </a:fillRef>
+          <a:effectRef idx="1">
+            <a:schemeClr val="accent1"/>
+          </a:effectRef>
+          <a:fontRef idx="minor">
+            <a:schemeClr val="tx1"/>
+          </a:fontRef>
+        </p:style>
+      </p:cxnSp>
+      <p:sp>
+        <p:nvSpPr>
+          <p:cNvPr id="19" name="TextBox 18"/>
+          <p:cNvSpPr txBox="1"/>
+          <p:nvPr/>
+        </p:nvSpPr>
+        <p:spPr>
+          <a:xfrm>
+            <a:off x="877824" y="5074920"/>
+            <a:ext cx="3314090" cy="1051560"/>
+          </a:xfrm>
+          <a:prstGeom prst="rect">
+            <a:avLst/>
+          </a:prstGeom>
+          <a:noFill/>
+        </p:spPr>
+        <p:txBody>
+          <a:bodyPr wrap="square" anchor="b" lIns="0" rIns="0" tIns="0" bIns="0"/>
+          <a:lstStyle/>
+          <a:p>
+            <a:pPr algn="l">
+              <a:lnSpc>
+                <a:spcPct val="92000"/>
+              </a:lnSpc>
+              <a:spcBef>
+                <a:spcPts val="0"/>
+              </a:spcBef>
+              <a:spcAft>
+                <a:spcPts val="0"/>
+              </a:spcAft>
+            </a:pPr>
+            <a:r>
+              <a:rPr sz="5800" b="1" i="0" lang="en-AU" spc="-203">
+                <a:solidFill>
+                  <a:srgbClr val="111111"/>
+                </a:solidFill>
+                <a:latin typeface="Inter"/>
+              </a:rPr>
+              <a:t>200</a:t>
+            </a:r>
+            <a:r>
+              <a:rPr sz="5800" b="1" i="0" lang="en-AU" spc="-203">
+                <a:solidFill>
+                  <a:srgbClr val="EA493F"/>
+                </a:solidFill>
+                <a:latin typeface="Inter"/>
+              </a:rPr>
+              <a:t>+</a:t>
+            </a:r>
+          </a:p>
+        </p:txBody>
+      </p:sp>
+      <p:sp>
+        <p:nvSpPr>
+          <p:cNvPr id="20" name="TextBox 19"/>
+          <p:cNvSpPr txBox="1"/>
+          <p:nvPr/>
+        </p:nvSpPr>
+        <p:spPr>
+          <a:xfrm>
+            <a:off x="877824" y="6208776"/>
+            <a:ext cx="3250082" cy="640080"/>
+          </a:xfrm>
+          <a:prstGeom prst="rect">
+            <a:avLst/>
+          </a:prstGeom>
+          <a:noFill/>
+        </p:spPr>
+        <p:txBody>
+          <a:bodyPr wrap="square" anchor="t" lIns="0" rIns="0" tIns="0" bIns="0"/>
+          <a:lstStyle/>
+          <a:p>
+            <a:pPr algn="l">
+              <a:lnSpc>
+                <a:spcPct val="115000"/>
+              </a:lnSpc>
+              <a:spcBef>
+                <a:spcPts val="0"/>
+              </a:spcBef>
+              <a:spcAft>
+                <a:spcPts val="0"/>
+              </a:spcAft>
+            </a:pPr>
+            <a:r>
+              <a:rPr sz="1050" b="1" i="0" lang="en-AU" spc="126" cap="all">
+                <a:solidFill>
+                  <a:srgbClr val="AEAEAE"/>
+                </a:solidFill>
+                <a:latin typeface="Inter"/>
+              </a:rPr>
+              <a:t>EMPLOYEES · AU, US &amp; INDIA</a:t>
+            </a:r>
+          </a:p>
+        </p:txBody>
+      </p:sp>
+      <p:cxnSp>
+        <p:nvCxnSpPr>
+          <p:cNvPr id="21" name="Connector 20"/>
+          <p:cNvCxnSpPr/>
+          <p:nvPr/>
+        </p:nvCxnSpPr>
+        <p:spPr>
+          <a:xfrm>
+            <a:off x="4356506" y="5120640"/>
+            <a:ext cx="0" cy="1554480"/>
+          </a:xfrm>
+          <a:prstGeom prst="bentConnector3">
+            <a:avLst/>
+          </a:prstGeom>
+          <a:ln w="12700">
+            <a:solidFill>
+              <a:srgbClr val="E4E4E0"/>
+            </a:solidFill>
+          </a:ln>
+          <a:effectLst/>
+        </p:spPr>
+        <p:style>
+          <a:lnRef idx="2">
+            <a:schemeClr val="accent1"/>
+          </a:lnRef>
+          <a:fillRef idx="0">
+            <a:schemeClr val="accent1"/>
+          </a:fillRef>
+          <a:effectRef idx="1">
+            <a:schemeClr val="accent1"/>
+          </a:effectRef>
+          <a:fontRef idx="minor">
+            <a:schemeClr val="tx1"/>
+          </a:fontRef>
+        </p:style>
+      </p:cxnSp>
+      <p:sp>
+        <p:nvSpPr>
+          <p:cNvPr id="22" name="TextBox 21"/>
+          <p:cNvSpPr txBox="1"/>
+          <p:nvPr/>
+        </p:nvSpPr>
+        <p:spPr>
+          <a:xfrm>
+            <a:off x="4667402" y="5074920"/>
+            <a:ext cx="3003194" cy="1051560"/>
+          </a:xfrm>
+          <a:prstGeom prst="rect">
+            <a:avLst/>
+          </a:prstGeom>
+          <a:noFill/>
+        </p:spPr>
+        <p:txBody>
+          <a:bodyPr wrap="square" anchor="b" lIns="0" rIns="0" tIns="0" bIns="0"/>
+          <a:lstStyle/>
+          <a:p>
+            <a:pPr algn="l">
+              <a:lnSpc>
+                <a:spcPct val="92000"/>
+              </a:lnSpc>
+              <a:spcBef>
+                <a:spcPts val="0"/>
+              </a:spcBef>
+              <a:spcAft>
+                <a:spcPts val="0"/>
+              </a:spcAft>
+            </a:pPr>
+            <a:r>
+              <a:rPr sz="5800" b="1" i="0" lang="en-AU" spc="-203">
+                <a:solidFill>
+                  <a:srgbClr val="111111"/>
+                </a:solidFill>
+                <a:latin typeface="Inter"/>
+              </a:rPr>
+              <a:t>100</a:t>
+            </a:r>
+            <a:r>
+              <a:rPr sz="5800" b="1" i="0" lang="en-AU" spc="-203">
+                <a:solidFill>
+                  <a:srgbClr val="EA493F"/>
+                </a:solidFill>
+                <a:latin typeface="Inter"/>
+              </a:rPr>
+              <a:t>+</a:t>
+            </a:r>
+          </a:p>
+        </p:txBody>
+      </p:sp>
+      <p:sp>
+        <p:nvSpPr>
+          <p:cNvPr id="23" name="TextBox 22"/>
+          <p:cNvSpPr txBox="1"/>
+          <p:nvPr/>
+        </p:nvSpPr>
+        <p:spPr>
+          <a:xfrm>
+            <a:off x="4667402" y="6208776"/>
+            <a:ext cx="2939186" cy="640080"/>
+          </a:xfrm>
+          <a:prstGeom prst="rect">
+            <a:avLst/>
+          </a:prstGeom>
+          <a:noFill/>
+        </p:spPr>
+        <p:txBody>
+          <a:bodyPr wrap="square" anchor="t" lIns="0" rIns="0" tIns="0" bIns="0"/>
+          <a:lstStyle/>
+          <a:p>
+            <a:pPr algn="l">
+              <a:lnSpc>
+                <a:spcPct val="115000"/>
+              </a:lnSpc>
+              <a:spcBef>
+                <a:spcPts val="0"/>
+              </a:spcBef>
+              <a:spcAft>
+                <a:spcPts val="0"/>
+              </a:spcAft>
+            </a:pPr>
+            <a:r>
+              <a:rPr sz="1050" b="1" i="0" lang="en-AU" spc="126" cap="all">
+                <a:solidFill>
+                  <a:srgbClr val="AEAEAE"/>
+                </a:solidFill>
+                <a:latin typeface="Inter"/>
+              </a:rPr>
+              <a:t>PEOPLE-SYSTEMS CLIENTS</a:t>
+            </a:r>
+          </a:p>
+        </p:txBody>
+      </p:sp>
+      <p:cxnSp>
+        <p:nvCxnSpPr>
+          <p:cNvPr id="24" name="Connector 23"/>
+          <p:cNvCxnSpPr/>
+          <p:nvPr/>
+        </p:nvCxnSpPr>
+        <p:spPr>
+          <a:xfrm>
+            <a:off x="7835188" y="5120640"/>
+            <a:ext cx="0" cy="1554480"/>
+          </a:xfrm>
+          <a:prstGeom prst="bentConnector3">
+            <a:avLst/>
+          </a:prstGeom>
+          <a:ln w="12700">
+            <a:solidFill>
+              <a:srgbClr val="E4E4E0"/>
+            </a:solidFill>
+          </a:ln>
+          <a:effectLst/>
+        </p:spPr>
+        <p:style>
+          <a:lnRef idx="2">
+            <a:schemeClr val="accent1"/>
+          </a:lnRef>
+          <a:fillRef idx="0">
+            <a:schemeClr val="accent1"/>
+          </a:fillRef>
+          <a:effectRef idx="1">
+            <a:schemeClr val="accent1"/>
+          </a:effectRef>
+          <a:fontRef idx="minor">
+            <a:schemeClr val="tx1"/>
+          </a:fontRef>
+        </p:style>
+      </p:cxnSp>
+      <p:sp>
+        <p:nvSpPr>
+          <p:cNvPr id="25" name="TextBox 24"/>
+          <p:cNvSpPr txBox="1"/>
+          <p:nvPr/>
+        </p:nvSpPr>
+        <p:spPr>
+          <a:xfrm>
+            <a:off x="8146084" y="5074920"/>
+            <a:ext cx="3003194" cy="1051560"/>
+          </a:xfrm>
+          <a:prstGeom prst="rect">
+            <a:avLst/>
+          </a:prstGeom>
+          <a:noFill/>
+        </p:spPr>
+        <p:txBody>
+          <a:bodyPr wrap="square" anchor="b" lIns="0" rIns="0" tIns="0" bIns="0"/>
+          <a:lstStyle/>
+          <a:p>
+            <a:pPr algn="l">
+              <a:lnSpc>
+                <a:spcPct val="92000"/>
+              </a:lnSpc>
+              <a:spcBef>
+                <a:spcPts val="0"/>
+              </a:spcBef>
+              <a:spcAft>
+                <a:spcPts val="0"/>
+              </a:spcAft>
+            </a:pPr>
+            <a:r>
+              <a:rPr sz="5800" b="1" i="0" lang="en-AU" spc="-203">
+                <a:solidFill>
+                  <a:srgbClr val="111111"/>
+                </a:solidFill>
+                <a:latin typeface="Inter"/>
+              </a:rPr>
+              <a:t>10</a:t>
+            </a:r>
+            <a:r>
+              <a:rPr sz="5800" b="1" i="0" lang="en-AU" spc="-203">
+                <a:solidFill>
+                  <a:srgbClr val="EA493F"/>
+                </a:solidFill>
+                <a:latin typeface="Inter"/>
+              </a:rPr>
+              <a:t>+</a:t>
+            </a:r>
+          </a:p>
+        </p:txBody>
+      </p:sp>
+      <p:sp>
+        <p:nvSpPr>
+          <p:cNvPr id="26" name="TextBox 25"/>
+          <p:cNvSpPr txBox="1"/>
+          <p:nvPr/>
+        </p:nvSpPr>
+        <p:spPr>
+          <a:xfrm>
+            <a:off x="8146084" y="6208776"/>
+            <a:ext cx="2939186" cy="640080"/>
+          </a:xfrm>
+          <a:prstGeom prst="rect">
+            <a:avLst/>
+          </a:prstGeom>
+          <a:noFill/>
+        </p:spPr>
+        <p:txBody>
+          <a:bodyPr wrap="square" anchor="t" lIns="0" rIns="0" tIns="0" bIns="0"/>
+          <a:lstStyle/>
+          <a:p>
+            <a:pPr algn="l">
+              <a:lnSpc>
+                <a:spcPct val="115000"/>
+              </a:lnSpc>
+              <a:spcBef>
+                <a:spcPts val="0"/>
+              </a:spcBef>
+              <a:spcAft>
+                <a:spcPts val="0"/>
+              </a:spcAft>
+            </a:pPr>
+            <a:r>
+              <a:rPr sz="1050" b="1" i="0" lang="en-AU" spc="126" cap="all">
+                <a:solidFill>
+                  <a:srgbClr val="AEAEAE"/>
+                </a:solidFill>
+                <a:latin typeface="Inter"/>
+              </a:rPr>
+              <a:t>YEARS DELIVERING WORKDAY</a:t>
+            </a:r>
+          </a:p>
+        </p:txBody>
+      </p:sp>
+    </p:spTree>
+  </p:cSld>
+  <p:clrMapOvr>
+    <a:masterClrMapping/>
+  </p:clrMapOvr>
+</p:sld>
+</file>
+
+<file path=ppt/slides/slide11.xml><?xml version="1.0" encoding="utf-8"?>
+<p:sld xmlns:a="http://schemas.openxmlformats.org/drawingml/2006/main" xmlns:p="http://schemas.openxmlformats.org/presentationml/2006/main" xmlns:r="http://schemas.openxmlformats.org/officeDocument/2006/relationships">
+  <p:cSld>
+    <p:bg>
+      <p:bgPr>
+        <a:solidFill>
           <a:srgbClr val="000000"/>
         </a:solidFill>
         <a:effectLst/>
@@ -3797,9 +4903,9 @@
               </a:spcAft>
             </a:pPr>
             <a:r>
-              <a:rPr sz="1050" b="1" i="0" lang="en-AU" spc="147" cap="all">
-                <a:solidFill>
-                  <a:srgbClr val="AEAEAE"/>
+              <a:rPr sz="1100" b="1" i="0" lang="en-AU" spc="154" cap="all">
+                <a:solidFill>
+                  <a:srgbClr val="EA493F"/>
                 </a:solidFill>
                 <a:latin typeface="Inter"/>
               </a:rPr>
@@ -3816,8 +4922,8 @@
         </p:nvSpPr>
         <p:spPr>
           <a:xfrm>
-            <a:off x="877824" y="841248"/>
-            <a:ext cx="7315200" cy="320040"/>
+            <a:off x="841248" y="932688"/>
+            <a:ext cx="7040880" cy="2468880"/>
           </a:xfrm>
           <a:prstGeom prst="rect">
             <a:avLst/>
@@ -3840,13 +4946,22 @@
               </a:spcAft>
             </a:pPr>
             <a:r>
-              <a:rPr sz="1200" b="1" i="0" lang="en-AU" spc="192" cap="all">
+              <a:rPr sz="4000" b="1" i="0" lang="en-AU" spc="-87">
+                <a:solidFill>
+                  <a:srgbClr val="111111"/>
+                </a:solidFill>
+                <a:latin typeface="Inter"/>
+              </a:rPr>
+              <a:t>An Australian technology </a:t>
+            </a:r>
+            <a:r>
+              <a:rPr sz="4000" b="1" i="0" lang="en-AU" spc="-87">
                 <a:solidFill>
                   <a:srgbClr val="EA493F"/>
                 </a:solidFill>
                 <a:latin typeface="Inter"/>
               </a:rPr>
-              <a:t>WHO WE ARE</a:t>
+              <a:t>consultancy.</a:t>
             </a:r>
           </a:p>
         </p:txBody>
@@ -3859,58 +4974,6 @@
         </p:nvSpPr>
         <p:spPr>
           <a:xfrm>
-            <a:off x="841248" y="1280160"/>
-            <a:ext cx="7040880" cy="2468880"/>
-          </a:xfrm>
-          <a:prstGeom prst="rect">
-            <a:avLst/>
-          </a:prstGeom>
-          <a:noFill/>
-        </p:spPr>
-        <p:txBody>
-          <a:bodyPr wrap="square" anchor="t" lIns="0" rIns="0" tIns="0" bIns="0"/>
-          <a:lstStyle/>
-          <a:p>
-            <a:pPr algn="l">
-              <a:lnSpc>
-                <a:spcPct val="100000"/>
-              </a:lnSpc>
-              <a:spcBef>
-                <a:spcPts val="0"/>
-              </a:spcBef>
-              <a:spcAft>
-                <a:spcPts val="0"/>
-              </a:spcAft>
-            </a:pPr>
-            <a:r>
-              <a:rPr sz="4000" b="1" i="0" lang="en-AU" spc="-87">
-                <a:solidFill>
-                  <a:srgbClr val="111111"/>
-                </a:solidFill>
-                <a:latin typeface="Inter"/>
-              </a:rPr>
-              <a:t>An Australian technology </a:t>
-            </a:r>
-            <a:r>
-              <a:rPr sz="4000" b="1" i="0" lang="en-AU" spc="-87">
-                <a:solidFill>
-                  <a:srgbClr val="EA493F"/>
-                </a:solidFill>
-                <a:latin typeface="Inter"/>
-              </a:rPr>
-              <a:t>consultancy.</a:t>
-            </a:r>
-          </a:p>
-        </p:txBody>
-      </p:sp>
-      <p:sp>
-        <p:nvSpPr>
-          <p:cNvPr id="6" name="TextBox 5"/>
-          <p:cNvSpPr txBox="1"/>
-          <p:nvPr/>
-        </p:nvSpPr>
-        <p:spPr>
-          <a:xfrm>
             <a:off x="8183879" y="1874519"/>
             <a:ext cx="3127248" cy="2194560"/>
           </a:xfrm>
@@ -3948,7 +5011,7 @@
       </p:sp>
       <p:cxnSp>
         <p:nvCxnSpPr>
-          <p:cNvPr id="7" name="Connector 6"/>
+          <p:cNvPr id="6" name="Connector 5"/>
           <p:cNvCxnSpPr/>
           <p:nvPr/>
         </p:nvCxnSpPr>
@@ -3984,55 +5047,55 @@
       </p:cxnSp>
       <p:sp>
         <p:nvSpPr>
+          <p:cNvPr id="7" name="TextBox 6"/>
+          <p:cNvSpPr txBox="1"/>
+          <p:nvPr/>
+        </p:nvSpPr>
+        <p:spPr>
+          <a:xfrm>
+            <a:off x="877824" y="4160520"/>
+            <a:ext cx="3314090" cy="1051560"/>
+          </a:xfrm>
+          <a:prstGeom prst="rect">
+            <a:avLst/>
+          </a:prstGeom>
+          <a:noFill/>
+        </p:spPr>
+        <p:txBody>
+          <a:bodyPr wrap="square" anchor="b" lIns="0" rIns="0" tIns="0" bIns="0"/>
+          <a:lstStyle/>
+          <a:p>
+            <a:pPr algn="l">
+              <a:lnSpc>
+                <a:spcPct val="92000"/>
+              </a:lnSpc>
+              <a:spcBef>
+                <a:spcPts val="0"/>
+              </a:spcBef>
+              <a:spcAft>
+                <a:spcPts val="0"/>
+              </a:spcAft>
+            </a:pPr>
+            <a:r>
+              <a:rPr sz="5800" b="1" i="0" lang="en-AU" spc="-203">
+                <a:solidFill>
+                  <a:srgbClr val="111111"/>
+                </a:solidFill>
+                <a:latin typeface="Inter"/>
+              </a:rPr>
+              <a:t>2014</a:t>
+            </a:r>
+          </a:p>
+        </p:txBody>
+      </p:sp>
+      <p:sp>
+        <p:nvSpPr>
           <p:cNvPr id="8" name="TextBox 7"/>
           <p:cNvSpPr txBox="1"/>
           <p:nvPr/>
         </p:nvSpPr>
         <p:spPr>
           <a:xfrm>
-            <a:off x="877824" y="4160520"/>
-            <a:ext cx="3314090" cy="1051560"/>
-          </a:xfrm>
-          <a:prstGeom prst="rect">
-            <a:avLst/>
-          </a:prstGeom>
-          <a:noFill/>
-        </p:spPr>
-        <p:txBody>
-          <a:bodyPr wrap="square" anchor="b" lIns="0" rIns="0" tIns="0" bIns="0"/>
-          <a:lstStyle/>
-          <a:p>
-            <a:pPr algn="l">
-              <a:lnSpc>
-                <a:spcPct val="92000"/>
-              </a:lnSpc>
-              <a:spcBef>
-                <a:spcPts val="0"/>
-              </a:spcBef>
-              <a:spcAft>
-                <a:spcPts val="0"/>
-              </a:spcAft>
-            </a:pPr>
-            <a:r>
-              <a:rPr sz="5800" b="1" i="0" lang="en-AU" spc="-203">
-                <a:solidFill>
-                  <a:srgbClr val="111111"/>
-                </a:solidFill>
-                <a:latin typeface="Inter"/>
-              </a:rPr>
-              <a:t>2014</a:t>
-            </a:r>
-          </a:p>
-        </p:txBody>
-      </p:sp>
-      <p:sp>
-        <p:nvSpPr>
-          <p:cNvPr id="9" name="TextBox 8"/>
-          <p:cNvSpPr txBox="1"/>
-          <p:nvPr/>
-        </p:nvSpPr>
-        <p:spPr>
-          <a:xfrm>
             <a:off x="877824" y="5294376"/>
             <a:ext cx="3250082" cy="640080"/>
           </a:xfrm>
@@ -4070,7 +5133,7 @@
       </p:sp>
       <p:cxnSp>
         <p:nvCxnSpPr>
-          <p:cNvPr id="10" name="Connector 9"/>
+          <p:cNvPr id="9" name="Connector 8"/>
           <p:cNvCxnSpPr/>
           <p:nvPr/>
         </p:nvCxnSpPr>
@@ -4106,64 +5169,64 @@
       </p:cxnSp>
       <p:sp>
         <p:nvSpPr>
+          <p:cNvPr id="10" name="TextBox 9"/>
+          <p:cNvSpPr txBox="1"/>
+          <p:nvPr/>
+        </p:nvSpPr>
+        <p:spPr>
+          <a:xfrm>
+            <a:off x="4667402" y="4160520"/>
+            <a:ext cx="3003194" cy="1051560"/>
+          </a:xfrm>
+          <a:prstGeom prst="rect">
+            <a:avLst/>
+          </a:prstGeom>
+          <a:noFill/>
+        </p:spPr>
+        <p:txBody>
+          <a:bodyPr wrap="square" anchor="b" lIns="0" rIns="0" tIns="0" bIns="0"/>
+          <a:lstStyle/>
+          <a:p>
+            <a:pPr algn="l">
+              <a:lnSpc>
+                <a:spcPct val="92000"/>
+              </a:lnSpc>
+              <a:spcBef>
+                <a:spcPts val="0"/>
+              </a:spcBef>
+              <a:spcAft>
+                <a:spcPts val="0"/>
+              </a:spcAft>
+            </a:pPr>
+            <a:r>
+              <a:rPr sz="5800" b="1" i="0" lang="en-AU" spc="-203">
+                <a:solidFill>
+                  <a:srgbClr val="111111"/>
+                </a:solidFill>
+                <a:latin typeface="Inter"/>
+              </a:rPr>
+              <a:t>200</a:t>
+            </a:r>
+            <a:r>
+              <a:rPr sz="5800" b="1" i="0" lang="en-AU" spc="-203">
+                <a:solidFill>
+                  <a:srgbClr val="EA493F"/>
+                </a:solidFill>
+                <a:latin typeface="Inter"/>
+              </a:rPr>
+              <a:t>+</a:t>
+            </a:r>
+          </a:p>
+        </p:txBody>
+      </p:sp>
+      <p:sp>
+        <p:nvSpPr>
           <p:cNvPr id="11" name="TextBox 10"/>
           <p:cNvSpPr txBox="1"/>
           <p:nvPr/>
         </p:nvSpPr>
         <p:spPr>
           <a:xfrm>
-            <a:off x="4667402" y="4160520"/>
-            <a:ext cx="3003194" cy="1051560"/>
-          </a:xfrm>
-          <a:prstGeom prst="rect">
-            <a:avLst/>
-          </a:prstGeom>
-          <a:noFill/>
-        </p:spPr>
-        <p:txBody>
-          <a:bodyPr wrap="square" anchor="b" lIns="0" rIns="0" tIns="0" bIns="0"/>
-          <a:lstStyle/>
-          <a:p>
-            <a:pPr algn="l">
-              <a:lnSpc>
-                <a:spcPct val="92000"/>
-              </a:lnSpc>
-              <a:spcBef>
-                <a:spcPts val="0"/>
-              </a:spcBef>
-              <a:spcAft>
-                <a:spcPts val="0"/>
-              </a:spcAft>
-            </a:pPr>
-            <a:r>
-              <a:rPr sz="5800" b="1" i="0" lang="en-AU" spc="-203">
-                <a:solidFill>
-                  <a:srgbClr val="111111"/>
-                </a:solidFill>
-                <a:latin typeface="Inter"/>
-              </a:rPr>
-              <a:t>200</a:t>
-            </a:r>
-            <a:r>
-              <a:rPr sz="5800" b="1" i="0" lang="en-AU" spc="-203">
-                <a:solidFill>
-                  <a:srgbClr val="EA493F"/>
-                </a:solidFill>
-                <a:latin typeface="Inter"/>
-              </a:rPr>
-              <a:t>+</a:t>
-            </a:r>
-          </a:p>
-        </p:txBody>
-      </p:sp>
-      <p:sp>
-        <p:nvSpPr>
-          <p:cNvPr id="12" name="TextBox 11"/>
-          <p:cNvSpPr txBox="1"/>
-          <p:nvPr/>
-        </p:nvSpPr>
-        <p:spPr>
-          <a:xfrm>
             <a:off x="4667402" y="5294376"/>
             <a:ext cx="2939186" cy="640080"/>
           </a:xfrm>
@@ -4201,7 +5264,7 @@
       </p:sp>
       <p:cxnSp>
         <p:nvCxnSpPr>
-          <p:cNvPr id="13" name="Connector 12"/>
+          <p:cNvPr id="12" name="Connector 11"/>
           <p:cNvCxnSpPr/>
           <p:nvPr/>
         </p:nvCxnSpPr>
@@ -4237,7 +5300,7 @@
       </p:cxnSp>
       <p:sp>
         <p:nvSpPr>
-          <p:cNvPr id="14" name="TextBox 13"/>
+          <p:cNvPr id="13" name="TextBox 12"/>
           <p:cNvSpPr txBox="1"/>
           <p:nvPr/>
         </p:nvSpPr>
@@ -4289,7 +5352,7 @@
       </p:sp>
       <p:sp>
         <p:nvSpPr>
-          <p:cNvPr id="15" name="TextBox 14"/>
+          <p:cNvPr id="14" name="TextBox 13"/>
           <p:cNvSpPr txBox="1"/>
           <p:nvPr/>
         </p:nvSpPr>
@@ -4339,6 +5402,1774 @@
 </file>
 
 <file path=ppt/slides/slide4.xml><?xml version="1.0" encoding="utf-8"?>
+<p:sld xmlns:a="http://schemas.openxmlformats.org/drawingml/2006/main" xmlns:p="http://schemas.openxmlformats.org/presentationml/2006/main" xmlns:r="http://schemas.openxmlformats.org/officeDocument/2006/relationships">
+  <p:cSld>
+    <p:bg>
+      <p:bgPr>
+        <a:solidFill>
+          <a:srgbClr val="FAFAFA"/>
+        </a:solidFill>
+        <a:effectLst/>
+      </p:bgPr>
+    </p:bg>
+    <p:spTree>
+      <p:nvGrpSpPr>
+        <p:cNvPr id="1" name=""/>
+        <p:cNvGrpSpPr/>
+        <p:nvPr/>
+      </p:nvGrpSpPr>
+      <p:grpSpPr/>
+      <p:pic>
+        <p:nvPicPr>
+          <p:cNvPr id="2" name="Picture 1" descr="Mivada_Icon_Melon_RGB_L.png"/>
+          <p:cNvPicPr>
+            <a:picLocks noChangeAspect="1"/>
+          </p:cNvPicPr>
+          <p:nvPr/>
+        </p:nvPicPr>
+        <p:blipFill>
+          <a:blip r:embed="rId2"/>
+          <a:stretch>
+            <a:fillRect/>
+          </a:stretch>
+        </p:blipFill>
+        <p:spPr>
+          <a:xfrm>
+            <a:off x="877824" y="457200"/>
+            <a:ext cx="402032" cy="237744"/>
+          </a:xfrm>
+          <a:prstGeom prst="rect">
+            <a:avLst/>
+          </a:prstGeom>
+        </p:spPr>
+      </p:pic>
+      <p:sp>
+        <p:nvSpPr>
+          <p:cNvPr id="3" name="TextBox 2"/>
+          <p:cNvSpPr txBox="1"/>
+          <p:nvPr/>
+        </p:nvSpPr>
+        <p:spPr>
+          <a:xfrm>
+            <a:off x="8259775" y="420624"/>
+            <a:ext cx="3200400" cy="320040"/>
+          </a:xfrm>
+          <a:prstGeom prst="rect">
+            <a:avLst/>
+          </a:prstGeom>
+          <a:noFill/>
+        </p:spPr>
+        <p:txBody>
+          <a:bodyPr wrap="square" anchor="t" lIns="0" rIns="0" tIns="0" bIns="0"/>
+          <a:lstStyle/>
+          <a:p>
+            <a:pPr algn="r">
+              <a:lnSpc>
+                <a:spcPct val="100000"/>
+              </a:lnSpc>
+              <a:spcBef>
+                <a:spcPts val="0"/>
+              </a:spcBef>
+              <a:spcAft>
+                <a:spcPts val="0"/>
+              </a:spcAft>
+            </a:pPr>
+            <a:r>
+              <a:rPr sz="1100" b="1" i="0" lang="en-AU" spc="154" cap="all">
+                <a:solidFill>
+                  <a:srgbClr val="EA493F"/>
+                </a:solidFill>
+                <a:latin typeface="Inter"/>
+              </a:rPr>
+              <a:t>TRUSTED BY</a:t>
+            </a:r>
+          </a:p>
+        </p:txBody>
+      </p:sp>
+      <p:sp>
+        <p:nvSpPr>
+          <p:cNvPr id="4" name="TextBox 3"/>
+          <p:cNvSpPr txBox="1"/>
+          <p:nvPr/>
+        </p:nvSpPr>
+        <p:spPr>
+          <a:xfrm>
+            <a:off x="841248" y="914400"/>
+            <a:ext cx="10436047" cy="1097280"/>
+          </a:xfrm>
+          <a:prstGeom prst="rect">
+            <a:avLst/>
+          </a:prstGeom>
+          <a:noFill/>
+        </p:spPr>
+        <p:txBody>
+          <a:bodyPr wrap="square" anchor="t" lIns="0" rIns="0" tIns="0" bIns="0"/>
+          <a:lstStyle/>
+          <a:p>
+            <a:pPr algn="l">
+              <a:lnSpc>
+                <a:spcPct val="100000"/>
+              </a:lnSpc>
+              <a:spcBef>
+                <a:spcPts val="0"/>
+              </a:spcBef>
+              <a:spcAft>
+                <a:spcPts val="0"/>
+              </a:spcAft>
+            </a:pPr>
+            <a:r>
+              <a:rPr sz="3400" b="1" i="0" lang="en-AU" spc="-74">
+                <a:solidFill>
+                  <a:srgbClr val="111111"/>
+                </a:solidFill>
+                <a:latin typeface="Inter"/>
+              </a:rPr>
+              <a:t>In good </a:t>
+            </a:r>
+            <a:r>
+              <a:rPr sz="3400" b="1" i="0" lang="en-AU" spc="-74">
+                <a:solidFill>
+                  <a:srgbClr val="EA493F"/>
+                </a:solidFill>
+                <a:latin typeface="Inter"/>
+              </a:rPr>
+              <a:t>company.</a:t>
+            </a:r>
+          </a:p>
+        </p:txBody>
+      </p:sp>
+      <p:sp>
+        <p:nvSpPr>
+          <p:cNvPr id="5" name="TextBox 4"/>
+          <p:cNvSpPr txBox="1"/>
+          <p:nvPr/>
+        </p:nvSpPr>
+        <p:spPr>
+          <a:xfrm>
+            <a:off x="877824" y="1993392"/>
+            <a:ext cx="9875520" cy="822960"/>
+          </a:xfrm>
+          <a:prstGeom prst="rect">
+            <a:avLst/>
+          </a:prstGeom>
+          <a:noFill/>
+        </p:spPr>
+        <p:txBody>
+          <a:bodyPr wrap="square" anchor="t" lIns="0" rIns="0" tIns="0" bIns="0"/>
+          <a:lstStyle/>
+          <a:p>
+            <a:pPr algn="l">
+              <a:lnSpc>
+                <a:spcPct val="130000"/>
+              </a:lnSpc>
+              <a:spcBef>
+                <a:spcPts val="0"/>
+              </a:spcBef>
+              <a:spcAft>
+                <a:spcPts val="0"/>
+              </a:spcAft>
+            </a:pPr>
+            <a:r>
+              <a:rPr sz="1400" b="0" i="0" lang="en-AU" spc="0">
+                <a:solidFill>
+                  <a:srgbClr val="323232"/>
+                </a:solidFill>
+                <a:latin typeface="Inter"/>
+              </a:rPr>
+              <a:t>A decade of work with some of Australia's most demanding operations.</a:t>
+            </a:r>
+          </a:p>
+        </p:txBody>
+      </p:sp>
+      <p:sp>
+        <p:nvSpPr>
+          <p:cNvPr id="6" name="TextBox 5"/>
+          <p:cNvSpPr txBox="1"/>
+          <p:nvPr/>
+        </p:nvSpPr>
+        <p:spPr>
+          <a:xfrm>
+            <a:off x="877824" y="2743200"/>
+            <a:ext cx="2426131" cy="457200"/>
+          </a:xfrm>
+          <a:prstGeom prst="rect">
+            <a:avLst/>
+          </a:prstGeom>
+          <a:noFill/>
+        </p:spPr>
+        <p:txBody>
+          <a:bodyPr wrap="square" anchor="t" lIns="0" rIns="0" tIns="0" bIns="0"/>
+          <a:lstStyle/>
+          <a:p>
+            <a:pPr algn="l">
+              <a:lnSpc>
+                <a:spcPct val="100000"/>
+              </a:lnSpc>
+              <a:spcBef>
+                <a:spcPts val="0"/>
+              </a:spcBef>
+              <a:spcAft>
+                <a:spcPts val="0"/>
+              </a:spcAft>
+            </a:pPr>
+            <a:r>
+              <a:rPr sz="1500" b="1" i="0" lang="en-AU" spc="-15">
+                <a:solidFill>
+                  <a:srgbClr val="111111"/>
+                </a:solidFill>
+                <a:latin typeface="Inter"/>
+              </a:rPr>
+              <a:t>Qantas</a:t>
+            </a:r>
+          </a:p>
+        </p:txBody>
+      </p:sp>
+      <p:cxnSp>
+        <p:nvCxnSpPr>
+          <p:cNvPr id="7" name="Connector 6"/>
+          <p:cNvCxnSpPr/>
+          <p:nvPr/>
+        </p:nvCxnSpPr>
+        <p:spPr>
+          <a:xfrm>
+            <a:off x="877824" y="3200400"/>
+            <a:ext cx="2288971" cy="0"/>
+          </a:xfrm>
+          <a:prstGeom prst="bentConnector3">
+            <a:avLst/>
+          </a:prstGeom>
+          <a:ln w="12700">
+            <a:solidFill>
+              <a:srgbClr val="E4E4E0"/>
+            </a:solidFill>
+          </a:ln>
+          <a:effectLst/>
+        </p:spPr>
+        <p:style>
+          <a:lnRef idx="2">
+            <a:schemeClr val="accent1"/>
+          </a:lnRef>
+          <a:fillRef idx="0">
+            <a:schemeClr val="accent1"/>
+          </a:fillRef>
+          <a:effectRef idx="1">
+            <a:schemeClr val="accent1"/>
+          </a:effectRef>
+          <a:fontRef idx="minor">
+            <a:schemeClr val="tx1"/>
+          </a:fontRef>
+        </p:style>
+      </p:cxnSp>
+      <p:sp>
+        <p:nvSpPr>
+          <p:cNvPr id="8" name="TextBox 7"/>
+          <p:cNvSpPr txBox="1"/>
+          <p:nvPr/>
+        </p:nvSpPr>
+        <p:spPr>
+          <a:xfrm>
+            <a:off x="3486835" y="2743200"/>
+            <a:ext cx="2426131" cy="457200"/>
+          </a:xfrm>
+          <a:prstGeom prst="rect">
+            <a:avLst/>
+          </a:prstGeom>
+          <a:noFill/>
+        </p:spPr>
+        <p:txBody>
+          <a:bodyPr wrap="square" anchor="t" lIns="0" rIns="0" tIns="0" bIns="0"/>
+          <a:lstStyle/>
+          <a:p>
+            <a:pPr algn="l">
+              <a:lnSpc>
+                <a:spcPct val="100000"/>
+              </a:lnSpc>
+              <a:spcBef>
+                <a:spcPts val="0"/>
+              </a:spcBef>
+              <a:spcAft>
+                <a:spcPts val="0"/>
+              </a:spcAft>
+            </a:pPr>
+            <a:r>
+              <a:rPr sz="1500" b="1" i="0" lang="en-AU" spc="-15">
+                <a:solidFill>
+                  <a:srgbClr val="111111"/>
+                </a:solidFill>
+                <a:latin typeface="Inter"/>
+              </a:rPr>
+              <a:t>Jetstar</a:t>
+            </a:r>
+          </a:p>
+        </p:txBody>
+      </p:sp>
+      <p:cxnSp>
+        <p:nvCxnSpPr>
+          <p:cNvPr id="9" name="Connector 8"/>
+          <p:cNvCxnSpPr/>
+          <p:nvPr/>
+        </p:nvCxnSpPr>
+        <p:spPr>
+          <a:xfrm>
+            <a:off x="3486835" y="3200400"/>
+            <a:ext cx="2288972" cy="0"/>
+          </a:xfrm>
+          <a:prstGeom prst="bentConnector3">
+            <a:avLst/>
+          </a:prstGeom>
+          <a:ln w="12700">
+            <a:solidFill>
+              <a:srgbClr val="E4E4E0"/>
+            </a:solidFill>
+          </a:ln>
+          <a:effectLst/>
+        </p:spPr>
+        <p:style>
+          <a:lnRef idx="2">
+            <a:schemeClr val="accent1"/>
+          </a:lnRef>
+          <a:fillRef idx="0">
+            <a:schemeClr val="accent1"/>
+          </a:fillRef>
+          <a:effectRef idx="1">
+            <a:schemeClr val="accent1"/>
+          </a:effectRef>
+          <a:fontRef idx="minor">
+            <a:schemeClr val="tx1"/>
+          </a:fontRef>
+        </p:style>
+      </p:cxnSp>
+      <p:sp>
+        <p:nvSpPr>
+          <p:cNvPr id="10" name="TextBox 9"/>
+          <p:cNvSpPr txBox="1"/>
+          <p:nvPr/>
+        </p:nvSpPr>
+        <p:spPr>
+          <a:xfrm>
+            <a:off x="6095847" y="2743200"/>
+            <a:ext cx="2426131" cy="457200"/>
+          </a:xfrm>
+          <a:prstGeom prst="rect">
+            <a:avLst/>
+          </a:prstGeom>
+          <a:noFill/>
+        </p:spPr>
+        <p:txBody>
+          <a:bodyPr wrap="square" anchor="t" lIns="0" rIns="0" tIns="0" bIns="0"/>
+          <a:lstStyle/>
+          <a:p>
+            <a:pPr algn="l">
+              <a:lnSpc>
+                <a:spcPct val="100000"/>
+              </a:lnSpc>
+              <a:spcBef>
+                <a:spcPts val="0"/>
+              </a:spcBef>
+              <a:spcAft>
+                <a:spcPts val="0"/>
+              </a:spcAft>
+            </a:pPr>
+            <a:r>
+              <a:rPr sz="1500" b="1" i="0" lang="en-AU" spc="-15">
+                <a:solidFill>
+                  <a:srgbClr val="111111"/>
+                </a:solidFill>
+                <a:latin typeface="Inter"/>
+              </a:rPr>
+              <a:t>Guzman y Gomez</a:t>
+            </a:r>
+          </a:p>
+        </p:txBody>
+      </p:sp>
+      <p:cxnSp>
+        <p:nvCxnSpPr>
+          <p:cNvPr id="11" name="Connector 10"/>
+          <p:cNvCxnSpPr/>
+          <p:nvPr/>
+        </p:nvCxnSpPr>
+        <p:spPr>
+          <a:xfrm>
+            <a:off x="6095847" y="3200400"/>
+            <a:ext cx="2288972" cy="0"/>
+          </a:xfrm>
+          <a:prstGeom prst="bentConnector3">
+            <a:avLst/>
+          </a:prstGeom>
+          <a:ln w="12700">
+            <a:solidFill>
+              <a:srgbClr val="E4E4E0"/>
+            </a:solidFill>
+          </a:ln>
+          <a:effectLst/>
+        </p:spPr>
+        <p:style>
+          <a:lnRef idx="2">
+            <a:schemeClr val="accent1"/>
+          </a:lnRef>
+          <a:fillRef idx="0">
+            <a:schemeClr val="accent1"/>
+          </a:fillRef>
+          <a:effectRef idx="1">
+            <a:schemeClr val="accent1"/>
+          </a:effectRef>
+          <a:fontRef idx="minor">
+            <a:schemeClr val="tx1"/>
+          </a:fontRef>
+        </p:style>
+      </p:cxnSp>
+      <p:sp>
+        <p:nvSpPr>
+          <p:cNvPr id="12" name="TextBox 11"/>
+          <p:cNvSpPr txBox="1"/>
+          <p:nvPr/>
+        </p:nvSpPr>
+        <p:spPr>
+          <a:xfrm>
+            <a:off x="8704859" y="2743200"/>
+            <a:ext cx="2426131" cy="457200"/>
+          </a:xfrm>
+          <a:prstGeom prst="rect">
+            <a:avLst/>
+          </a:prstGeom>
+          <a:noFill/>
+        </p:spPr>
+        <p:txBody>
+          <a:bodyPr wrap="square" anchor="t" lIns="0" rIns="0" tIns="0" bIns="0"/>
+          <a:lstStyle/>
+          <a:p>
+            <a:pPr algn="l">
+              <a:lnSpc>
+                <a:spcPct val="100000"/>
+              </a:lnSpc>
+              <a:spcBef>
+                <a:spcPts val="0"/>
+              </a:spcBef>
+              <a:spcAft>
+                <a:spcPts val="0"/>
+              </a:spcAft>
+            </a:pPr>
+            <a:r>
+              <a:rPr sz="1500" b="1" i="0" lang="en-AU" spc="-15">
+                <a:solidFill>
+                  <a:srgbClr val="111111"/>
+                </a:solidFill>
+                <a:latin typeface="Inter"/>
+              </a:rPr>
+              <a:t>Western Sydney Airport</a:t>
+            </a:r>
+          </a:p>
+        </p:txBody>
+      </p:sp>
+      <p:cxnSp>
+        <p:nvCxnSpPr>
+          <p:cNvPr id="13" name="Connector 12"/>
+          <p:cNvCxnSpPr/>
+          <p:nvPr/>
+        </p:nvCxnSpPr>
+        <p:spPr>
+          <a:xfrm>
+            <a:off x="8704859" y="3200400"/>
+            <a:ext cx="2288972" cy="0"/>
+          </a:xfrm>
+          <a:prstGeom prst="bentConnector3">
+            <a:avLst/>
+          </a:prstGeom>
+          <a:ln w="12700">
+            <a:solidFill>
+              <a:srgbClr val="E4E4E0"/>
+            </a:solidFill>
+          </a:ln>
+          <a:effectLst/>
+        </p:spPr>
+        <p:style>
+          <a:lnRef idx="2">
+            <a:schemeClr val="accent1"/>
+          </a:lnRef>
+          <a:fillRef idx="0">
+            <a:schemeClr val="accent1"/>
+          </a:fillRef>
+          <a:effectRef idx="1">
+            <a:schemeClr val="accent1"/>
+          </a:effectRef>
+          <a:fontRef idx="minor">
+            <a:schemeClr val="tx1"/>
+          </a:fontRef>
+        </p:style>
+      </p:cxnSp>
+      <p:sp>
+        <p:nvSpPr>
+          <p:cNvPr id="14" name="TextBox 13"/>
+          <p:cNvSpPr txBox="1"/>
+          <p:nvPr/>
+        </p:nvSpPr>
+        <p:spPr>
+          <a:xfrm>
+            <a:off x="877824" y="3310128"/>
+            <a:ext cx="2426131" cy="457200"/>
+          </a:xfrm>
+          <a:prstGeom prst="rect">
+            <a:avLst/>
+          </a:prstGeom>
+          <a:noFill/>
+        </p:spPr>
+        <p:txBody>
+          <a:bodyPr wrap="square" anchor="t" lIns="0" rIns="0" tIns="0" bIns="0"/>
+          <a:lstStyle/>
+          <a:p>
+            <a:pPr algn="l">
+              <a:lnSpc>
+                <a:spcPct val="100000"/>
+              </a:lnSpc>
+              <a:spcBef>
+                <a:spcPts val="0"/>
+              </a:spcBef>
+              <a:spcAft>
+                <a:spcPts val="0"/>
+              </a:spcAft>
+            </a:pPr>
+            <a:r>
+              <a:rPr sz="1500" b="1" i="0" lang="en-AU" spc="-15">
+                <a:solidFill>
+                  <a:srgbClr val="111111"/>
+                </a:solidFill>
+                <a:latin typeface="Inter"/>
+              </a:rPr>
+              <a:t>Canva</a:t>
+            </a:r>
+          </a:p>
+        </p:txBody>
+      </p:sp>
+      <p:cxnSp>
+        <p:nvCxnSpPr>
+          <p:cNvPr id="15" name="Connector 14"/>
+          <p:cNvCxnSpPr/>
+          <p:nvPr/>
+        </p:nvCxnSpPr>
+        <p:spPr>
+          <a:xfrm>
+            <a:off x="877824" y="3767328"/>
+            <a:ext cx="2288971" cy="0"/>
+          </a:xfrm>
+          <a:prstGeom prst="bentConnector3">
+            <a:avLst/>
+          </a:prstGeom>
+          <a:ln w="12700">
+            <a:solidFill>
+              <a:srgbClr val="E4E4E0"/>
+            </a:solidFill>
+          </a:ln>
+          <a:effectLst/>
+        </p:spPr>
+        <p:style>
+          <a:lnRef idx="2">
+            <a:schemeClr val="accent1"/>
+          </a:lnRef>
+          <a:fillRef idx="0">
+            <a:schemeClr val="accent1"/>
+          </a:fillRef>
+          <a:effectRef idx="1">
+            <a:schemeClr val="accent1"/>
+          </a:effectRef>
+          <a:fontRef idx="minor">
+            <a:schemeClr val="tx1"/>
+          </a:fontRef>
+        </p:style>
+      </p:cxnSp>
+      <p:sp>
+        <p:nvSpPr>
+          <p:cNvPr id="16" name="TextBox 15"/>
+          <p:cNvSpPr txBox="1"/>
+          <p:nvPr/>
+        </p:nvSpPr>
+        <p:spPr>
+          <a:xfrm>
+            <a:off x="3486835" y="3310128"/>
+            <a:ext cx="2426131" cy="457200"/>
+          </a:xfrm>
+          <a:prstGeom prst="rect">
+            <a:avLst/>
+          </a:prstGeom>
+          <a:noFill/>
+        </p:spPr>
+        <p:txBody>
+          <a:bodyPr wrap="square" anchor="t" lIns="0" rIns="0" tIns="0" bIns="0"/>
+          <a:lstStyle/>
+          <a:p>
+            <a:pPr algn="l">
+              <a:lnSpc>
+                <a:spcPct val="100000"/>
+              </a:lnSpc>
+              <a:spcBef>
+                <a:spcPts val="0"/>
+              </a:spcBef>
+              <a:spcAft>
+                <a:spcPts val="0"/>
+              </a:spcAft>
+            </a:pPr>
+            <a:r>
+              <a:rPr sz="1500" b="1" i="0" lang="en-AU" spc="-15">
+                <a:solidFill>
+                  <a:srgbClr val="111111"/>
+                </a:solidFill>
+                <a:latin typeface="Inter"/>
+              </a:rPr>
+              <a:t>NAB</a:t>
+            </a:r>
+          </a:p>
+        </p:txBody>
+      </p:sp>
+      <p:cxnSp>
+        <p:nvCxnSpPr>
+          <p:cNvPr id="17" name="Connector 16"/>
+          <p:cNvCxnSpPr/>
+          <p:nvPr/>
+        </p:nvCxnSpPr>
+        <p:spPr>
+          <a:xfrm>
+            <a:off x="3486835" y="3767328"/>
+            <a:ext cx="2288972" cy="0"/>
+          </a:xfrm>
+          <a:prstGeom prst="bentConnector3">
+            <a:avLst/>
+          </a:prstGeom>
+          <a:ln w="12700">
+            <a:solidFill>
+              <a:srgbClr val="E4E4E0"/>
+            </a:solidFill>
+          </a:ln>
+          <a:effectLst/>
+        </p:spPr>
+        <p:style>
+          <a:lnRef idx="2">
+            <a:schemeClr val="accent1"/>
+          </a:lnRef>
+          <a:fillRef idx="0">
+            <a:schemeClr val="accent1"/>
+          </a:fillRef>
+          <a:effectRef idx="1">
+            <a:schemeClr val="accent1"/>
+          </a:effectRef>
+          <a:fontRef idx="minor">
+            <a:schemeClr val="tx1"/>
+          </a:fontRef>
+        </p:style>
+      </p:cxnSp>
+      <p:sp>
+        <p:nvSpPr>
+          <p:cNvPr id="18" name="TextBox 17"/>
+          <p:cNvSpPr txBox="1"/>
+          <p:nvPr/>
+        </p:nvSpPr>
+        <p:spPr>
+          <a:xfrm>
+            <a:off x="6095847" y="3310128"/>
+            <a:ext cx="2426131" cy="457200"/>
+          </a:xfrm>
+          <a:prstGeom prst="rect">
+            <a:avLst/>
+          </a:prstGeom>
+          <a:noFill/>
+        </p:spPr>
+        <p:txBody>
+          <a:bodyPr wrap="square" anchor="t" lIns="0" rIns="0" tIns="0" bIns="0"/>
+          <a:lstStyle/>
+          <a:p>
+            <a:pPr algn="l">
+              <a:lnSpc>
+                <a:spcPct val="100000"/>
+              </a:lnSpc>
+              <a:spcBef>
+                <a:spcPts val="0"/>
+              </a:spcBef>
+              <a:spcAft>
+                <a:spcPts val="0"/>
+              </a:spcAft>
+            </a:pPr>
+            <a:r>
+              <a:rPr sz="1500" b="1" i="0" lang="en-AU" spc="-15">
+                <a:solidFill>
+                  <a:srgbClr val="111111"/>
+                </a:solidFill>
+                <a:latin typeface="Inter"/>
+              </a:rPr>
+              <a:t>Rio Tinto</a:t>
+            </a:r>
+          </a:p>
+        </p:txBody>
+      </p:sp>
+      <p:cxnSp>
+        <p:nvCxnSpPr>
+          <p:cNvPr id="19" name="Connector 18"/>
+          <p:cNvCxnSpPr/>
+          <p:nvPr/>
+        </p:nvCxnSpPr>
+        <p:spPr>
+          <a:xfrm>
+            <a:off x="6095847" y="3767328"/>
+            <a:ext cx="2288972" cy="0"/>
+          </a:xfrm>
+          <a:prstGeom prst="bentConnector3">
+            <a:avLst/>
+          </a:prstGeom>
+          <a:ln w="12700">
+            <a:solidFill>
+              <a:srgbClr val="E4E4E0"/>
+            </a:solidFill>
+          </a:ln>
+          <a:effectLst/>
+        </p:spPr>
+        <p:style>
+          <a:lnRef idx="2">
+            <a:schemeClr val="accent1"/>
+          </a:lnRef>
+          <a:fillRef idx="0">
+            <a:schemeClr val="accent1"/>
+          </a:fillRef>
+          <a:effectRef idx="1">
+            <a:schemeClr val="accent1"/>
+          </a:effectRef>
+          <a:fontRef idx="minor">
+            <a:schemeClr val="tx1"/>
+          </a:fontRef>
+        </p:style>
+      </p:cxnSp>
+      <p:sp>
+        <p:nvSpPr>
+          <p:cNvPr id="20" name="TextBox 19"/>
+          <p:cNvSpPr txBox="1"/>
+          <p:nvPr/>
+        </p:nvSpPr>
+        <p:spPr>
+          <a:xfrm>
+            <a:off x="8704859" y="3310128"/>
+            <a:ext cx="2426131" cy="457200"/>
+          </a:xfrm>
+          <a:prstGeom prst="rect">
+            <a:avLst/>
+          </a:prstGeom>
+          <a:noFill/>
+        </p:spPr>
+        <p:txBody>
+          <a:bodyPr wrap="square" anchor="t" lIns="0" rIns="0" tIns="0" bIns="0"/>
+          <a:lstStyle/>
+          <a:p>
+            <a:pPr algn="l">
+              <a:lnSpc>
+                <a:spcPct val="100000"/>
+              </a:lnSpc>
+              <a:spcBef>
+                <a:spcPts val="0"/>
+              </a:spcBef>
+              <a:spcAft>
+                <a:spcPts val="0"/>
+              </a:spcAft>
+            </a:pPr>
+            <a:r>
+              <a:rPr sz="1500" b="1" i="0" lang="en-AU" spc="-15">
+                <a:solidFill>
+                  <a:srgbClr val="111111"/>
+                </a:solidFill>
+                <a:latin typeface="Inter"/>
+              </a:rPr>
+              <a:t>ResMed</a:t>
+            </a:r>
+          </a:p>
+        </p:txBody>
+      </p:sp>
+      <p:cxnSp>
+        <p:nvCxnSpPr>
+          <p:cNvPr id="21" name="Connector 20"/>
+          <p:cNvCxnSpPr/>
+          <p:nvPr/>
+        </p:nvCxnSpPr>
+        <p:spPr>
+          <a:xfrm>
+            <a:off x="8704859" y="3767328"/>
+            <a:ext cx="2288972" cy="0"/>
+          </a:xfrm>
+          <a:prstGeom prst="bentConnector3">
+            <a:avLst/>
+          </a:prstGeom>
+          <a:ln w="12700">
+            <a:solidFill>
+              <a:srgbClr val="E4E4E0"/>
+            </a:solidFill>
+          </a:ln>
+          <a:effectLst/>
+        </p:spPr>
+        <p:style>
+          <a:lnRef idx="2">
+            <a:schemeClr val="accent1"/>
+          </a:lnRef>
+          <a:fillRef idx="0">
+            <a:schemeClr val="accent1"/>
+          </a:fillRef>
+          <a:effectRef idx="1">
+            <a:schemeClr val="accent1"/>
+          </a:effectRef>
+          <a:fontRef idx="minor">
+            <a:schemeClr val="tx1"/>
+          </a:fontRef>
+        </p:style>
+      </p:cxnSp>
+      <p:sp>
+        <p:nvSpPr>
+          <p:cNvPr id="22" name="TextBox 21"/>
+          <p:cNvSpPr txBox="1"/>
+          <p:nvPr/>
+        </p:nvSpPr>
+        <p:spPr>
+          <a:xfrm>
+            <a:off x="877824" y="3877056"/>
+            <a:ext cx="2426131" cy="457200"/>
+          </a:xfrm>
+          <a:prstGeom prst="rect">
+            <a:avLst/>
+          </a:prstGeom>
+          <a:noFill/>
+        </p:spPr>
+        <p:txBody>
+          <a:bodyPr wrap="square" anchor="t" lIns="0" rIns="0" tIns="0" bIns="0"/>
+          <a:lstStyle/>
+          <a:p>
+            <a:pPr algn="l">
+              <a:lnSpc>
+                <a:spcPct val="100000"/>
+              </a:lnSpc>
+              <a:spcBef>
+                <a:spcPts val="0"/>
+              </a:spcBef>
+              <a:spcAft>
+                <a:spcPts val="0"/>
+              </a:spcAft>
+            </a:pPr>
+            <a:r>
+              <a:rPr sz="1500" b="1" i="0" lang="en-AU" spc="-15">
+                <a:solidFill>
+                  <a:srgbClr val="111111"/>
+                </a:solidFill>
+                <a:latin typeface="Inter"/>
+              </a:rPr>
+              <a:t>HCF</a:t>
+            </a:r>
+          </a:p>
+        </p:txBody>
+      </p:sp>
+      <p:cxnSp>
+        <p:nvCxnSpPr>
+          <p:cNvPr id="23" name="Connector 22"/>
+          <p:cNvCxnSpPr/>
+          <p:nvPr/>
+        </p:nvCxnSpPr>
+        <p:spPr>
+          <a:xfrm>
+            <a:off x="877824" y="4334256"/>
+            <a:ext cx="2288971" cy="0"/>
+          </a:xfrm>
+          <a:prstGeom prst="bentConnector3">
+            <a:avLst/>
+          </a:prstGeom>
+          <a:ln w="12700">
+            <a:solidFill>
+              <a:srgbClr val="E4E4E0"/>
+            </a:solidFill>
+          </a:ln>
+          <a:effectLst/>
+        </p:spPr>
+        <p:style>
+          <a:lnRef idx="2">
+            <a:schemeClr val="accent1"/>
+          </a:lnRef>
+          <a:fillRef idx="0">
+            <a:schemeClr val="accent1"/>
+          </a:fillRef>
+          <a:effectRef idx="1">
+            <a:schemeClr val="accent1"/>
+          </a:effectRef>
+          <a:fontRef idx="minor">
+            <a:schemeClr val="tx1"/>
+          </a:fontRef>
+        </p:style>
+      </p:cxnSp>
+      <p:sp>
+        <p:nvSpPr>
+          <p:cNvPr id="24" name="TextBox 23"/>
+          <p:cNvSpPr txBox="1"/>
+          <p:nvPr/>
+        </p:nvSpPr>
+        <p:spPr>
+          <a:xfrm>
+            <a:off x="3486835" y="3877056"/>
+            <a:ext cx="2426131" cy="457200"/>
+          </a:xfrm>
+          <a:prstGeom prst="rect">
+            <a:avLst/>
+          </a:prstGeom>
+          <a:noFill/>
+        </p:spPr>
+        <p:txBody>
+          <a:bodyPr wrap="square" anchor="t" lIns="0" rIns="0" tIns="0" bIns="0"/>
+          <a:lstStyle/>
+          <a:p>
+            <a:pPr algn="l">
+              <a:lnSpc>
+                <a:spcPct val="100000"/>
+              </a:lnSpc>
+              <a:spcBef>
+                <a:spcPts val="0"/>
+              </a:spcBef>
+              <a:spcAft>
+                <a:spcPts val="0"/>
+              </a:spcAft>
+            </a:pPr>
+            <a:r>
+              <a:rPr sz="1500" b="1" i="0" lang="en-AU" spc="-15">
+                <a:solidFill>
+                  <a:srgbClr val="111111"/>
+                </a:solidFill>
+                <a:latin typeface="Inter"/>
+              </a:rPr>
+              <a:t>IAG</a:t>
+            </a:r>
+          </a:p>
+        </p:txBody>
+      </p:sp>
+      <p:cxnSp>
+        <p:nvCxnSpPr>
+          <p:cNvPr id="25" name="Connector 24"/>
+          <p:cNvCxnSpPr/>
+          <p:nvPr/>
+        </p:nvCxnSpPr>
+        <p:spPr>
+          <a:xfrm>
+            <a:off x="3486835" y="4334256"/>
+            <a:ext cx="2288972" cy="0"/>
+          </a:xfrm>
+          <a:prstGeom prst="bentConnector3">
+            <a:avLst/>
+          </a:prstGeom>
+          <a:ln w="12700">
+            <a:solidFill>
+              <a:srgbClr val="E4E4E0"/>
+            </a:solidFill>
+          </a:ln>
+          <a:effectLst/>
+        </p:spPr>
+        <p:style>
+          <a:lnRef idx="2">
+            <a:schemeClr val="accent1"/>
+          </a:lnRef>
+          <a:fillRef idx="0">
+            <a:schemeClr val="accent1"/>
+          </a:fillRef>
+          <a:effectRef idx="1">
+            <a:schemeClr val="accent1"/>
+          </a:effectRef>
+          <a:fontRef idx="minor">
+            <a:schemeClr val="tx1"/>
+          </a:fontRef>
+        </p:style>
+      </p:cxnSp>
+      <p:sp>
+        <p:nvSpPr>
+          <p:cNvPr id="26" name="TextBox 25"/>
+          <p:cNvSpPr txBox="1"/>
+          <p:nvPr/>
+        </p:nvSpPr>
+        <p:spPr>
+          <a:xfrm>
+            <a:off x="6095847" y="3877056"/>
+            <a:ext cx="2426131" cy="457200"/>
+          </a:xfrm>
+          <a:prstGeom prst="rect">
+            <a:avLst/>
+          </a:prstGeom>
+          <a:noFill/>
+        </p:spPr>
+        <p:txBody>
+          <a:bodyPr wrap="square" anchor="t" lIns="0" rIns="0" tIns="0" bIns="0"/>
+          <a:lstStyle/>
+          <a:p>
+            <a:pPr algn="l">
+              <a:lnSpc>
+                <a:spcPct val="100000"/>
+              </a:lnSpc>
+              <a:spcBef>
+                <a:spcPts val="0"/>
+              </a:spcBef>
+              <a:spcAft>
+                <a:spcPts val="0"/>
+              </a:spcAft>
+            </a:pPr>
+            <a:r>
+              <a:rPr sz="1500" b="1" i="0" lang="en-AU" spc="-15">
+                <a:solidFill>
+                  <a:srgbClr val="111111"/>
+                </a:solidFill>
+                <a:latin typeface="Inter"/>
+              </a:rPr>
+              <a:t>University of Sydney</a:t>
+            </a:r>
+          </a:p>
+        </p:txBody>
+      </p:sp>
+      <p:cxnSp>
+        <p:nvCxnSpPr>
+          <p:cNvPr id="27" name="Connector 26"/>
+          <p:cNvCxnSpPr/>
+          <p:nvPr/>
+        </p:nvCxnSpPr>
+        <p:spPr>
+          <a:xfrm>
+            <a:off x="6095847" y="4334256"/>
+            <a:ext cx="2288972" cy="0"/>
+          </a:xfrm>
+          <a:prstGeom prst="bentConnector3">
+            <a:avLst/>
+          </a:prstGeom>
+          <a:ln w="12700">
+            <a:solidFill>
+              <a:srgbClr val="E4E4E0"/>
+            </a:solidFill>
+          </a:ln>
+          <a:effectLst/>
+        </p:spPr>
+        <p:style>
+          <a:lnRef idx="2">
+            <a:schemeClr val="accent1"/>
+          </a:lnRef>
+          <a:fillRef idx="0">
+            <a:schemeClr val="accent1"/>
+          </a:fillRef>
+          <a:effectRef idx="1">
+            <a:schemeClr val="accent1"/>
+          </a:effectRef>
+          <a:fontRef idx="minor">
+            <a:schemeClr val="tx1"/>
+          </a:fontRef>
+        </p:style>
+      </p:cxnSp>
+      <p:sp>
+        <p:nvSpPr>
+          <p:cNvPr id="28" name="TextBox 27"/>
+          <p:cNvSpPr txBox="1"/>
+          <p:nvPr/>
+        </p:nvSpPr>
+        <p:spPr>
+          <a:xfrm>
+            <a:off x="8704859" y="3877056"/>
+            <a:ext cx="2426131" cy="457200"/>
+          </a:xfrm>
+          <a:prstGeom prst="rect">
+            <a:avLst/>
+          </a:prstGeom>
+          <a:noFill/>
+        </p:spPr>
+        <p:txBody>
+          <a:bodyPr wrap="square" anchor="t" lIns="0" rIns="0" tIns="0" bIns="0"/>
+          <a:lstStyle/>
+          <a:p>
+            <a:pPr algn="l">
+              <a:lnSpc>
+                <a:spcPct val="100000"/>
+              </a:lnSpc>
+              <a:spcBef>
+                <a:spcPts val="0"/>
+              </a:spcBef>
+              <a:spcAft>
+                <a:spcPts val="0"/>
+              </a:spcAft>
+            </a:pPr>
+            <a:r>
+              <a:rPr sz="1500" b="1" i="0" lang="en-AU" spc="-15">
+                <a:solidFill>
+                  <a:srgbClr val="111111"/>
+                </a:solidFill>
+                <a:latin typeface="Inter"/>
+              </a:rPr>
+              <a:t>Macquarie University</a:t>
+            </a:r>
+          </a:p>
+        </p:txBody>
+      </p:sp>
+      <p:cxnSp>
+        <p:nvCxnSpPr>
+          <p:cNvPr id="29" name="Connector 28"/>
+          <p:cNvCxnSpPr/>
+          <p:nvPr/>
+        </p:nvCxnSpPr>
+        <p:spPr>
+          <a:xfrm>
+            <a:off x="8704859" y="4334256"/>
+            <a:ext cx="2288972" cy="0"/>
+          </a:xfrm>
+          <a:prstGeom prst="bentConnector3">
+            <a:avLst/>
+          </a:prstGeom>
+          <a:ln w="12700">
+            <a:solidFill>
+              <a:srgbClr val="E4E4E0"/>
+            </a:solidFill>
+          </a:ln>
+          <a:effectLst/>
+        </p:spPr>
+        <p:style>
+          <a:lnRef idx="2">
+            <a:schemeClr val="accent1"/>
+          </a:lnRef>
+          <a:fillRef idx="0">
+            <a:schemeClr val="accent1"/>
+          </a:fillRef>
+          <a:effectRef idx="1">
+            <a:schemeClr val="accent1"/>
+          </a:effectRef>
+          <a:fontRef idx="minor">
+            <a:schemeClr val="tx1"/>
+          </a:fontRef>
+        </p:style>
+      </p:cxnSp>
+      <p:sp>
+        <p:nvSpPr>
+          <p:cNvPr id="30" name="TextBox 29"/>
+          <p:cNvSpPr txBox="1"/>
+          <p:nvPr/>
+        </p:nvSpPr>
+        <p:spPr>
+          <a:xfrm>
+            <a:off x="877824" y="4443983"/>
+            <a:ext cx="2426131" cy="457200"/>
+          </a:xfrm>
+          <a:prstGeom prst="rect">
+            <a:avLst/>
+          </a:prstGeom>
+          <a:noFill/>
+        </p:spPr>
+        <p:txBody>
+          <a:bodyPr wrap="square" anchor="t" lIns="0" rIns="0" tIns="0" bIns="0"/>
+          <a:lstStyle/>
+          <a:p>
+            <a:pPr algn="l">
+              <a:lnSpc>
+                <a:spcPct val="100000"/>
+              </a:lnSpc>
+              <a:spcBef>
+                <a:spcPts val="0"/>
+              </a:spcBef>
+              <a:spcAft>
+                <a:spcPts val="0"/>
+              </a:spcAft>
+            </a:pPr>
+            <a:r>
+              <a:rPr sz="1500" b="1" i="0" lang="en-AU" spc="-15">
+                <a:solidFill>
+                  <a:srgbClr val="111111"/>
+                </a:solidFill>
+                <a:latin typeface="Inter"/>
+              </a:rPr>
+              <a:t>Nine</a:t>
+            </a:r>
+          </a:p>
+        </p:txBody>
+      </p:sp>
+      <p:cxnSp>
+        <p:nvCxnSpPr>
+          <p:cNvPr id="31" name="Connector 30"/>
+          <p:cNvCxnSpPr/>
+          <p:nvPr/>
+        </p:nvCxnSpPr>
+        <p:spPr>
+          <a:xfrm>
+            <a:off x="877824" y="4901183"/>
+            <a:ext cx="2288971" cy="0"/>
+          </a:xfrm>
+          <a:prstGeom prst="bentConnector3">
+            <a:avLst/>
+          </a:prstGeom>
+          <a:ln w="12700">
+            <a:solidFill>
+              <a:srgbClr val="E4E4E0"/>
+            </a:solidFill>
+          </a:ln>
+          <a:effectLst/>
+        </p:spPr>
+        <p:style>
+          <a:lnRef idx="2">
+            <a:schemeClr val="accent1"/>
+          </a:lnRef>
+          <a:fillRef idx="0">
+            <a:schemeClr val="accent1"/>
+          </a:fillRef>
+          <a:effectRef idx="1">
+            <a:schemeClr val="accent1"/>
+          </a:effectRef>
+          <a:fontRef idx="minor">
+            <a:schemeClr val="tx1"/>
+          </a:fontRef>
+        </p:style>
+      </p:cxnSp>
+      <p:sp>
+        <p:nvSpPr>
+          <p:cNvPr id="32" name="TextBox 31"/>
+          <p:cNvSpPr txBox="1"/>
+          <p:nvPr/>
+        </p:nvSpPr>
+        <p:spPr>
+          <a:xfrm>
+            <a:off x="3486835" y="4443983"/>
+            <a:ext cx="2426131" cy="457200"/>
+          </a:xfrm>
+          <a:prstGeom prst="rect">
+            <a:avLst/>
+          </a:prstGeom>
+          <a:noFill/>
+        </p:spPr>
+        <p:txBody>
+          <a:bodyPr wrap="square" anchor="t" lIns="0" rIns="0" tIns="0" bIns="0"/>
+          <a:lstStyle/>
+          <a:p>
+            <a:pPr algn="l">
+              <a:lnSpc>
+                <a:spcPct val="100000"/>
+              </a:lnSpc>
+              <a:spcBef>
+                <a:spcPts val="0"/>
+              </a:spcBef>
+              <a:spcAft>
+                <a:spcPts val="0"/>
+              </a:spcAft>
+            </a:pPr>
+            <a:r>
+              <a:rPr sz="1500" b="1" i="0" lang="en-AU" spc="-15">
+                <a:solidFill>
+                  <a:srgbClr val="111111"/>
+                </a:solidFill>
+                <a:latin typeface="Inter"/>
+              </a:rPr>
+              <a:t>Seven West Media</a:t>
+            </a:r>
+          </a:p>
+        </p:txBody>
+      </p:sp>
+      <p:cxnSp>
+        <p:nvCxnSpPr>
+          <p:cNvPr id="33" name="Connector 32"/>
+          <p:cNvCxnSpPr/>
+          <p:nvPr/>
+        </p:nvCxnSpPr>
+        <p:spPr>
+          <a:xfrm>
+            <a:off x="3486835" y="4901183"/>
+            <a:ext cx="2288972" cy="0"/>
+          </a:xfrm>
+          <a:prstGeom prst="bentConnector3">
+            <a:avLst/>
+          </a:prstGeom>
+          <a:ln w="12700">
+            <a:solidFill>
+              <a:srgbClr val="E4E4E0"/>
+            </a:solidFill>
+          </a:ln>
+          <a:effectLst/>
+        </p:spPr>
+        <p:style>
+          <a:lnRef idx="2">
+            <a:schemeClr val="accent1"/>
+          </a:lnRef>
+          <a:fillRef idx="0">
+            <a:schemeClr val="accent1"/>
+          </a:fillRef>
+          <a:effectRef idx="1">
+            <a:schemeClr val="accent1"/>
+          </a:effectRef>
+          <a:fontRef idx="minor">
+            <a:schemeClr val="tx1"/>
+          </a:fontRef>
+        </p:style>
+      </p:cxnSp>
+      <p:sp>
+        <p:nvSpPr>
+          <p:cNvPr id="34" name="TextBox 33"/>
+          <p:cNvSpPr txBox="1"/>
+          <p:nvPr/>
+        </p:nvSpPr>
+        <p:spPr>
+          <a:xfrm>
+            <a:off x="6095847" y="4443983"/>
+            <a:ext cx="2426131" cy="457200"/>
+          </a:xfrm>
+          <a:prstGeom prst="rect">
+            <a:avLst/>
+          </a:prstGeom>
+          <a:noFill/>
+        </p:spPr>
+        <p:txBody>
+          <a:bodyPr wrap="square" anchor="t" lIns="0" rIns="0" tIns="0" bIns="0"/>
+          <a:lstStyle/>
+          <a:p>
+            <a:pPr algn="l">
+              <a:lnSpc>
+                <a:spcPct val="100000"/>
+              </a:lnSpc>
+              <a:spcBef>
+                <a:spcPts val="0"/>
+              </a:spcBef>
+              <a:spcAft>
+                <a:spcPts val="0"/>
+              </a:spcAft>
+            </a:pPr>
+            <a:r>
+              <a:rPr sz="1500" b="1" i="0" lang="en-AU" spc="-15">
+                <a:solidFill>
+                  <a:srgbClr val="111111"/>
+                </a:solidFill>
+                <a:latin typeface="Inter"/>
+              </a:rPr>
+              <a:t>Amart</a:t>
+            </a:r>
+          </a:p>
+        </p:txBody>
+      </p:sp>
+      <p:cxnSp>
+        <p:nvCxnSpPr>
+          <p:cNvPr id="35" name="Connector 34"/>
+          <p:cNvCxnSpPr/>
+          <p:nvPr/>
+        </p:nvCxnSpPr>
+        <p:spPr>
+          <a:xfrm>
+            <a:off x="6095847" y="4901183"/>
+            <a:ext cx="2288972" cy="0"/>
+          </a:xfrm>
+          <a:prstGeom prst="bentConnector3">
+            <a:avLst/>
+          </a:prstGeom>
+          <a:ln w="12700">
+            <a:solidFill>
+              <a:srgbClr val="E4E4E0"/>
+            </a:solidFill>
+          </a:ln>
+          <a:effectLst/>
+        </p:spPr>
+        <p:style>
+          <a:lnRef idx="2">
+            <a:schemeClr val="accent1"/>
+          </a:lnRef>
+          <a:fillRef idx="0">
+            <a:schemeClr val="accent1"/>
+          </a:fillRef>
+          <a:effectRef idx="1">
+            <a:schemeClr val="accent1"/>
+          </a:effectRef>
+          <a:fontRef idx="minor">
+            <a:schemeClr val="tx1"/>
+          </a:fontRef>
+        </p:style>
+      </p:cxnSp>
+      <p:sp>
+        <p:nvSpPr>
+          <p:cNvPr id="36" name="TextBox 35"/>
+          <p:cNvSpPr txBox="1"/>
+          <p:nvPr/>
+        </p:nvSpPr>
+        <p:spPr>
+          <a:xfrm>
+            <a:off x="8704859" y="4443983"/>
+            <a:ext cx="2426131" cy="457200"/>
+          </a:xfrm>
+          <a:prstGeom prst="rect">
+            <a:avLst/>
+          </a:prstGeom>
+          <a:noFill/>
+        </p:spPr>
+        <p:txBody>
+          <a:bodyPr wrap="square" anchor="t" lIns="0" rIns="0" tIns="0" bIns="0"/>
+          <a:lstStyle/>
+          <a:p>
+            <a:pPr algn="l">
+              <a:lnSpc>
+                <a:spcPct val="100000"/>
+              </a:lnSpc>
+              <a:spcBef>
+                <a:spcPts val="0"/>
+              </a:spcBef>
+              <a:spcAft>
+                <a:spcPts val="0"/>
+              </a:spcAft>
+            </a:pPr>
+            <a:r>
+              <a:rPr sz="1500" b="1" i="0" lang="en-AU" spc="-15">
+                <a:solidFill>
+                  <a:srgbClr val="111111"/>
+                </a:solidFill>
+                <a:latin typeface="Inter"/>
+              </a:rPr>
+              <a:t>dnata</a:t>
+            </a:r>
+          </a:p>
+        </p:txBody>
+      </p:sp>
+      <p:cxnSp>
+        <p:nvCxnSpPr>
+          <p:cNvPr id="37" name="Connector 36"/>
+          <p:cNvCxnSpPr/>
+          <p:nvPr/>
+        </p:nvCxnSpPr>
+        <p:spPr>
+          <a:xfrm>
+            <a:off x="8704859" y="4901183"/>
+            <a:ext cx="2288972" cy="0"/>
+          </a:xfrm>
+          <a:prstGeom prst="bentConnector3">
+            <a:avLst/>
+          </a:prstGeom>
+          <a:ln w="12700">
+            <a:solidFill>
+              <a:srgbClr val="E4E4E0"/>
+            </a:solidFill>
+          </a:ln>
+          <a:effectLst/>
+        </p:spPr>
+        <p:style>
+          <a:lnRef idx="2">
+            <a:schemeClr val="accent1"/>
+          </a:lnRef>
+          <a:fillRef idx="0">
+            <a:schemeClr val="accent1"/>
+          </a:fillRef>
+          <a:effectRef idx="1">
+            <a:schemeClr val="accent1"/>
+          </a:effectRef>
+          <a:fontRef idx="minor">
+            <a:schemeClr val="tx1"/>
+          </a:fontRef>
+        </p:style>
+      </p:cxnSp>
+      <p:sp>
+        <p:nvSpPr>
+          <p:cNvPr id="38" name="TextBox 37"/>
+          <p:cNvSpPr txBox="1"/>
+          <p:nvPr/>
+        </p:nvSpPr>
+        <p:spPr>
+          <a:xfrm>
+            <a:off x="877824" y="5010912"/>
+            <a:ext cx="2426131" cy="457200"/>
+          </a:xfrm>
+          <a:prstGeom prst="rect">
+            <a:avLst/>
+          </a:prstGeom>
+          <a:noFill/>
+        </p:spPr>
+        <p:txBody>
+          <a:bodyPr wrap="square" anchor="t" lIns="0" rIns="0" tIns="0" bIns="0"/>
+          <a:lstStyle/>
+          <a:p>
+            <a:pPr algn="l">
+              <a:lnSpc>
+                <a:spcPct val="100000"/>
+              </a:lnSpc>
+              <a:spcBef>
+                <a:spcPts val="0"/>
+              </a:spcBef>
+              <a:spcAft>
+                <a:spcPts val="0"/>
+              </a:spcAft>
+            </a:pPr>
+            <a:r>
+              <a:rPr sz="1500" b="1" i="0" lang="en-AU" spc="-15">
+                <a:solidFill>
+                  <a:srgbClr val="111111"/>
+                </a:solidFill>
+                <a:latin typeface="Inter"/>
+              </a:rPr>
+              <a:t>Queensland Airports</a:t>
+            </a:r>
+          </a:p>
+        </p:txBody>
+      </p:sp>
+      <p:cxnSp>
+        <p:nvCxnSpPr>
+          <p:cNvPr id="39" name="Connector 38"/>
+          <p:cNvCxnSpPr/>
+          <p:nvPr/>
+        </p:nvCxnSpPr>
+        <p:spPr>
+          <a:xfrm>
+            <a:off x="877824" y="5468112"/>
+            <a:ext cx="2288971" cy="0"/>
+          </a:xfrm>
+          <a:prstGeom prst="bentConnector3">
+            <a:avLst/>
+          </a:prstGeom>
+          <a:ln w="12700">
+            <a:solidFill>
+              <a:srgbClr val="E4E4E0"/>
+            </a:solidFill>
+          </a:ln>
+          <a:effectLst/>
+        </p:spPr>
+        <p:style>
+          <a:lnRef idx="2">
+            <a:schemeClr val="accent1"/>
+          </a:lnRef>
+          <a:fillRef idx="0">
+            <a:schemeClr val="accent1"/>
+          </a:fillRef>
+          <a:effectRef idx="1">
+            <a:schemeClr val="accent1"/>
+          </a:effectRef>
+          <a:fontRef idx="minor">
+            <a:schemeClr val="tx1"/>
+          </a:fontRef>
+        </p:style>
+      </p:cxnSp>
+      <p:sp>
+        <p:nvSpPr>
+          <p:cNvPr id="40" name="TextBox 39"/>
+          <p:cNvSpPr txBox="1"/>
+          <p:nvPr/>
+        </p:nvSpPr>
+        <p:spPr>
+          <a:xfrm>
+            <a:off x="3486835" y="5010912"/>
+            <a:ext cx="2426131" cy="457200"/>
+          </a:xfrm>
+          <a:prstGeom prst="rect">
+            <a:avLst/>
+          </a:prstGeom>
+          <a:noFill/>
+        </p:spPr>
+        <p:txBody>
+          <a:bodyPr wrap="square" anchor="t" lIns="0" rIns="0" tIns="0" bIns="0"/>
+          <a:lstStyle/>
+          <a:p>
+            <a:pPr algn="l">
+              <a:lnSpc>
+                <a:spcPct val="100000"/>
+              </a:lnSpc>
+              <a:spcBef>
+                <a:spcPts val="0"/>
+              </a:spcBef>
+              <a:spcAft>
+                <a:spcPts val="0"/>
+              </a:spcAft>
+            </a:pPr>
+            <a:r>
+              <a:rPr sz="1500" b="1" i="0" lang="en-AU" spc="-15">
+                <a:solidFill>
+                  <a:srgbClr val="111111"/>
+                </a:solidFill>
+                <a:latin typeface="Inter"/>
+              </a:rPr>
+              <a:t>Kennards</a:t>
+            </a:r>
+          </a:p>
+        </p:txBody>
+      </p:sp>
+      <p:cxnSp>
+        <p:nvCxnSpPr>
+          <p:cNvPr id="41" name="Connector 40"/>
+          <p:cNvCxnSpPr/>
+          <p:nvPr/>
+        </p:nvCxnSpPr>
+        <p:spPr>
+          <a:xfrm>
+            <a:off x="3486835" y="5468112"/>
+            <a:ext cx="2288972" cy="0"/>
+          </a:xfrm>
+          <a:prstGeom prst="bentConnector3">
+            <a:avLst/>
+          </a:prstGeom>
+          <a:ln w="12700">
+            <a:solidFill>
+              <a:srgbClr val="E4E4E0"/>
+            </a:solidFill>
+          </a:ln>
+          <a:effectLst/>
+        </p:spPr>
+        <p:style>
+          <a:lnRef idx="2">
+            <a:schemeClr val="accent1"/>
+          </a:lnRef>
+          <a:fillRef idx="0">
+            <a:schemeClr val="accent1"/>
+          </a:fillRef>
+          <a:effectRef idx="1">
+            <a:schemeClr val="accent1"/>
+          </a:effectRef>
+          <a:fontRef idx="minor">
+            <a:schemeClr val="tx1"/>
+          </a:fontRef>
+        </p:style>
+      </p:cxnSp>
+      <p:sp>
+        <p:nvSpPr>
+          <p:cNvPr id="42" name="TextBox 41"/>
+          <p:cNvSpPr txBox="1"/>
+          <p:nvPr/>
+        </p:nvSpPr>
+        <p:spPr>
+          <a:xfrm>
+            <a:off x="6095847" y="5010912"/>
+            <a:ext cx="2426131" cy="457200"/>
+          </a:xfrm>
+          <a:prstGeom prst="rect">
+            <a:avLst/>
+          </a:prstGeom>
+          <a:noFill/>
+        </p:spPr>
+        <p:txBody>
+          <a:bodyPr wrap="square" anchor="t" lIns="0" rIns="0" tIns="0" bIns="0"/>
+          <a:lstStyle/>
+          <a:p>
+            <a:pPr algn="l">
+              <a:lnSpc>
+                <a:spcPct val="100000"/>
+              </a:lnSpc>
+              <a:spcBef>
+                <a:spcPts val="0"/>
+              </a:spcBef>
+              <a:spcAft>
+                <a:spcPts val="0"/>
+              </a:spcAft>
+            </a:pPr>
+            <a:r>
+              <a:rPr sz="1500" b="1" i="0" lang="en-AU" spc="-15">
+                <a:solidFill>
+                  <a:srgbClr val="111111"/>
+                </a:solidFill>
+                <a:latin typeface="Inter"/>
+              </a:rPr>
+              <a:t>Anglicare</a:t>
+            </a:r>
+          </a:p>
+        </p:txBody>
+      </p:sp>
+      <p:cxnSp>
+        <p:nvCxnSpPr>
+          <p:cNvPr id="43" name="Connector 42"/>
+          <p:cNvCxnSpPr/>
+          <p:nvPr/>
+        </p:nvCxnSpPr>
+        <p:spPr>
+          <a:xfrm>
+            <a:off x="6095847" y="5468112"/>
+            <a:ext cx="2288972" cy="0"/>
+          </a:xfrm>
+          <a:prstGeom prst="bentConnector3">
+            <a:avLst/>
+          </a:prstGeom>
+          <a:ln w="12700">
+            <a:solidFill>
+              <a:srgbClr val="E4E4E0"/>
+            </a:solidFill>
+          </a:ln>
+          <a:effectLst/>
+        </p:spPr>
+        <p:style>
+          <a:lnRef idx="2">
+            <a:schemeClr val="accent1"/>
+          </a:lnRef>
+          <a:fillRef idx="0">
+            <a:schemeClr val="accent1"/>
+          </a:fillRef>
+          <a:effectRef idx="1">
+            <a:schemeClr val="accent1"/>
+          </a:effectRef>
+          <a:fontRef idx="minor">
+            <a:schemeClr val="tx1"/>
+          </a:fontRef>
+        </p:style>
+      </p:cxnSp>
+      <p:sp>
+        <p:nvSpPr>
+          <p:cNvPr id="44" name="TextBox 43"/>
+          <p:cNvSpPr txBox="1"/>
+          <p:nvPr/>
+        </p:nvSpPr>
+        <p:spPr>
+          <a:xfrm>
+            <a:off x="8704859" y="5010912"/>
+            <a:ext cx="2426131" cy="457200"/>
+          </a:xfrm>
+          <a:prstGeom prst="rect">
+            <a:avLst/>
+          </a:prstGeom>
+          <a:noFill/>
+        </p:spPr>
+        <p:txBody>
+          <a:bodyPr wrap="square" anchor="t" lIns="0" rIns="0" tIns="0" bIns="0"/>
+          <a:lstStyle/>
+          <a:p>
+            <a:pPr algn="l">
+              <a:lnSpc>
+                <a:spcPct val="100000"/>
+              </a:lnSpc>
+              <a:spcBef>
+                <a:spcPts val="0"/>
+              </a:spcBef>
+              <a:spcAft>
+                <a:spcPts val="0"/>
+              </a:spcAft>
+            </a:pPr>
+            <a:r>
+              <a:rPr sz="1500" b="1" i="0" lang="en-AU" spc="-15">
+                <a:solidFill>
+                  <a:srgbClr val="111111"/>
+                </a:solidFill>
+                <a:latin typeface="Inter"/>
+              </a:rPr>
+              <a:t>ProPharma</a:t>
+            </a:r>
+          </a:p>
+        </p:txBody>
+      </p:sp>
+      <p:cxnSp>
+        <p:nvCxnSpPr>
+          <p:cNvPr id="45" name="Connector 44"/>
+          <p:cNvCxnSpPr/>
+          <p:nvPr/>
+        </p:nvCxnSpPr>
+        <p:spPr>
+          <a:xfrm>
+            <a:off x="8704859" y="5468112"/>
+            <a:ext cx="2288972" cy="0"/>
+          </a:xfrm>
+          <a:prstGeom prst="bentConnector3">
+            <a:avLst/>
+          </a:prstGeom>
+          <a:ln w="12700">
+            <a:solidFill>
+              <a:srgbClr val="E4E4E0"/>
+            </a:solidFill>
+          </a:ln>
+          <a:effectLst/>
+        </p:spPr>
+        <p:style>
+          <a:lnRef idx="2">
+            <a:schemeClr val="accent1"/>
+          </a:lnRef>
+          <a:fillRef idx="0">
+            <a:schemeClr val="accent1"/>
+          </a:fillRef>
+          <a:effectRef idx="1">
+            <a:schemeClr val="accent1"/>
+          </a:effectRef>
+          <a:fontRef idx="minor">
+            <a:schemeClr val="tx1"/>
+          </a:fontRef>
+        </p:style>
+      </p:cxnSp>
+    </p:spTree>
+  </p:cSld>
+  <p:clrMapOvr>
+    <a:masterClrMapping/>
+  </p:clrMapOvr>
+</p:sld>
+</file>
+
+<file path=ppt/slides/slide5.xml><?xml version="1.0" encoding="utf-8"?>
 <p:sld xmlns:a="http://schemas.openxmlformats.org/drawingml/2006/main" xmlns:p="http://schemas.openxmlformats.org/presentationml/2006/main" xmlns:r="http://schemas.openxmlformats.org/officeDocument/2006/relationships">
   <p:cSld>
     <p:bg>
@@ -4412,9 +7243,9 @@
               </a:spcAft>
             </a:pPr>
             <a:r>
-              <a:rPr sz="1050" b="1" i="0" lang="en-AU" spc="147" cap="all">
-                <a:solidFill>
-                  <a:srgbClr val="777777"/>
+              <a:rPr sz="1100" b="1" i="0" lang="en-AU" spc="154" cap="all">
+                <a:solidFill>
+                  <a:srgbClr val="EA493F"/>
                 </a:solidFill>
                 <a:latin typeface="Inter"/>
               </a:rPr>
@@ -4431,50 +7262,7 @@
         </p:nvSpPr>
         <p:spPr>
           <a:xfrm>
-            <a:off x="877824" y="786384"/>
-            <a:ext cx="7315200" cy="320040"/>
-          </a:xfrm>
-          <a:prstGeom prst="rect">
-            <a:avLst/>
-          </a:prstGeom>
-          <a:noFill/>
-        </p:spPr>
-        <p:txBody>
-          <a:bodyPr wrap="square" anchor="t" lIns="0" rIns="0" tIns="0" bIns="0"/>
-          <a:lstStyle/>
-          <a:p>
-            <a:pPr algn="l">
-              <a:lnSpc>
-                <a:spcPct val="100000"/>
-              </a:lnSpc>
-              <a:spcBef>
-                <a:spcPts val="0"/>
-              </a:spcBef>
-              <a:spcAft>
-                <a:spcPts val="0"/>
-              </a:spcAft>
-            </a:pPr>
-            <a:r>
-              <a:rPr sz="1200" b="1" i="0" lang="en-AU" spc="192" cap="all">
-                <a:solidFill>
-                  <a:srgbClr val="EA493F"/>
-                </a:solidFill>
-                <a:latin typeface="Inter"/>
-              </a:rPr>
-              <a:t>WHAT WE DO</a:t>
-            </a:r>
-          </a:p>
-        </p:txBody>
-      </p:sp>
-      <p:sp>
-        <p:nvSpPr>
-          <p:cNvPr id="5" name="TextBox 4"/>
-          <p:cNvSpPr txBox="1"/>
-          <p:nvPr/>
-        </p:nvSpPr>
-        <p:spPr>
-          <a:xfrm>
-            <a:off x="841248" y="1170432"/>
+            <a:off x="841248" y="868680"/>
             <a:ext cx="10058400" cy="1005840"/>
           </a:xfrm>
           <a:prstGeom prst="rect">
@@ -4520,7 +7308,7 @@
       </p:sp>
       <p:cxnSp>
         <p:nvCxnSpPr>
-          <p:cNvPr id="6" name="Connector 5"/>
+          <p:cNvPr id="5" name="Connector 4"/>
           <p:cNvCxnSpPr/>
           <p:nvPr/>
         </p:nvCxnSpPr>
@@ -4556,14 +7344,57 @@
       </p:cxnSp>
       <p:sp>
         <p:nvSpPr>
+          <p:cNvPr id="6" name="TextBox 5"/>
+          <p:cNvSpPr txBox="1"/>
+          <p:nvPr/>
+        </p:nvSpPr>
+        <p:spPr>
+          <a:xfrm>
+            <a:off x="877824" y="2523744"/>
+            <a:ext cx="1005840" cy="822960"/>
+          </a:xfrm>
+          <a:prstGeom prst="rect">
+            <a:avLst/>
+          </a:prstGeom>
+          <a:noFill/>
+        </p:spPr>
+        <p:txBody>
+          <a:bodyPr wrap="square" anchor="t" lIns="0" rIns="0" tIns="0" bIns="0"/>
+          <a:lstStyle/>
+          <a:p>
+            <a:pPr algn="l">
+              <a:lnSpc>
+                <a:spcPct val="100000"/>
+              </a:lnSpc>
+              <a:spcBef>
+                <a:spcPts val="0"/>
+              </a:spcBef>
+              <a:spcAft>
+                <a:spcPts val="0"/>
+              </a:spcAft>
+            </a:pPr>
+            <a:r>
+              <a:rPr sz="3200" b="1" i="0" lang="en-AU" spc="-96">
+                <a:solidFill>
+                  <a:srgbClr val="EA493F"/>
+                </a:solidFill>
+                <a:latin typeface="Inter"/>
+              </a:rPr>
+              <a:t>01</a:t>
+            </a:r>
+          </a:p>
+        </p:txBody>
+      </p:sp>
+      <p:sp>
+        <p:nvSpPr>
           <p:cNvPr id="7" name="TextBox 6"/>
           <p:cNvSpPr txBox="1"/>
           <p:nvPr/>
         </p:nvSpPr>
         <p:spPr>
           <a:xfrm>
-            <a:off x="877824" y="2523744"/>
-            <a:ext cx="1005840" cy="822960"/>
+            <a:off x="2020824" y="2487168"/>
+            <a:ext cx="7040880" cy="777240"/>
           </a:xfrm>
           <a:prstGeom prst="rect">
             <a:avLst/>
@@ -4586,13 +7417,35 @@
               </a:spcAft>
             </a:pPr>
             <a:r>
-              <a:rPr sz="3200" b="1" i="0" lang="en-AU" spc="-96">
-                <a:solidFill>
-                  <a:srgbClr val="EA493F"/>
-                </a:solidFill>
-                <a:latin typeface="Inter"/>
-              </a:rPr>
-              <a:t>01</a:t>
+              <a:rPr sz="2100" b="1" i="0" lang="en-AU" spc="-42">
+                <a:solidFill>
+                  <a:srgbClr val="FFFFFF"/>
+                </a:solidFill>
+                <a:latin typeface="Inter"/>
+              </a:rPr>
+              <a:t>People Systems &amp; Transformation</a:t>
+            </a:r>
+          </a:p>
+          <a:p>
+            <a:pPr algn="l">
+              <a:lnSpc>
+                <a:spcPct val="112000"/>
+              </a:lnSpc>
+              <a:spcBef>
+                <a:spcPts val="400"/>
+              </a:spcBef>
+              <a:spcAft>
+                <a:spcPts val="0"/>
+              </a:spcAft>
+            </a:pPr>
+            <a:r>
+              <a:rPr sz="1200" b="0" i="0" lang="en-AU" spc="0">
+                <a:solidFill>
+                  <a:srgbClr val="CFCFCF"/>
+                </a:solidFill>
+                <a:latin typeface="Inter"/>
+              </a:rPr>
+              <a:t>HCM, Payroll, Time &amp; Attendance and HRIS — implemented and optimised.</a:t>
             </a:r>
           </a:p>
         </p:txBody>
@@ -4605,71 +7458,6 @@
         </p:nvSpPr>
         <p:spPr>
           <a:xfrm>
-            <a:off x="2020824" y="2487168"/>
-            <a:ext cx="7040880" cy="777240"/>
-          </a:xfrm>
-          <a:prstGeom prst="rect">
-            <a:avLst/>
-          </a:prstGeom>
-          <a:noFill/>
-        </p:spPr>
-        <p:txBody>
-          <a:bodyPr wrap="square" anchor="t" lIns="0" rIns="0" tIns="0" bIns="0"/>
-          <a:lstStyle/>
-          <a:p>
-            <a:pPr algn="l">
-              <a:lnSpc>
-                <a:spcPct val="100000"/>
-              </a:lnSpc>
-              <a:spcBef>
-                <a:spcPts val="0"/>
-              </a:spcBef>
-              <a:spcAft>
-                <a:spcPts val="0"/>
-              </a:spcAft>
-            </a:pPr>
-            <a:r>
-              <a:rPr sz="2100" b="1" i="0" lang="en-AU" spc="-42">
-                <a:solidFill>
-                  <a:srgbClr val="FFFFFF"/>
-                </a:solidFill>
-                <a:latin typeface="Inter"/>
-              </a:rPr>
-              <a:t>People Systems &amp; Transformation</a:t>
-            </a:r>
-          </a:p>
-          <a:p>
-            <a:pPr algn="l">
-              <a:lnSpc>
-                <a:spcPct val="112000"/>
-              </a:lnSpc>
-              <a:spcBef>
-                <a:spcPts val="400"/>
-              </a:spcBef>
-              <a:spcAft>
-                <a:spcPts val="0"/>
-              </a:spcAft>
-            </a:pPr>
-            <a:r>
-              <a:rPr sz="1200" b="0" i="0" lang="en-AU" spc="0">
-                <a:solidFill>
-                  <a:srgbClr val="CFCFCF"/>
-                </a:solidFill>
-                <a:latin typeface="Inter"/>
-              </a:rPr>
-              <a:t>HCM, Payroll, Time &amp; Attendance and HRIS — implemented and optimised.</a:t>
-            </a:r>
-          </a:p>
-        </p:txBody>
-      </p:sp>
-      <p:sp>
-        <p:nvSpPr>
-          <p:cNvPr id="9" name="TextBox 8"/>
-          <p:cNvSpPr txBox="1"/>
-          <p:nvPr/>
-        </p:nvSpPr>
-        <p:spPr>
-          <a:xfrm>
             <a:off x="9722815" y="2578608"/>
             <a:ext cx="1591056" cy="457200"/>
           </a:xfrm>
@@ -4707,7 +7495,7 @@
       </p:sp>
       <p:cxnSp>
         <p:nvCxnSpPr>
-          <p:cNvPr id="10" name="Connector 9"/>
+          <p:cNvPr id="9" name="Connector 8"/>
           <p:cNvCxnSpPr/>
           <p:nvPr/>
         </p:nvCxnSpPr>
@@ -4743,14 +7531,57 @@
       </p:cxnSp>
       <p:sp>
         <p:nvSpPr>
+          <p:cNvPr id="10" name="TextBox 9"/>
+          <p:cNvSpPr txBox="1"/>
+          <p:nvPr/>
+        </p:nvSpPr>
+        <p:spPr>
+          <a:xfrm>
+            <a:off x="877824" y="3410712"/>
+            <a:ext cx="1005840" cy="822960"/>
+          </a:xfrm>
+          <a:prstGeom prst="rect">
+            <a:avLst/>
+          </a:prstGeom>
+          <a:noFill/>
+        </p:spPr>
+        <p:txBody>
+          <a:bodyPr wrap="square" anchor="t" lIns="0" rIns="0" tIns="0" bIns="0"/>
+          <a:lstStyle/>
+          <a:p>
+            <a:pPr algn="l">
+              <a:lnSpc>
+                <a:spcPct val="100000"/>
+              </a:lnSpc>
+              <a:spcBef>
+                <a:spcPts val="0"/>
+              </a:spcBef>
+              <a:spcAft>
+                <a:spcPts val="0"/>
+              </a:spcAft>
+            </a:pPr>
+            <a:r>
+              <a:rPr sz="3200" b="1" i="0" lang="en-AU" spc="-96">
+                <a:solidFill>
+                  <a:srgbClr val="EA493F"/>
+                </a:solidFill>
+                <a:latin typeface="Inter"/>
+              </a:rPr>
+              <a:t>02</a:t>
+            </a:r>
+          </a:p>
+        </p:txBody>
+      </p:sp>
+      <p:sp>
+        <p:nvSpPr>
           <p:cNvPr id="11" name="TextBox 10"/>
           <p:cNvSpPr txBox="1"/>
           <p:nvPr/>
         </p:nvSpPr>
         <p:spPr>
           <a:xfrm>
-            <a:off x="877824" y="3410712"/>
-            <a:ext cx="1005840" cy="822960"/>
+            <a:off x="2020824" y="3374136"/>
+            <a:ext cx="7040880" cy="777240"/>
           </a:xfrm>
           <a:prstGeom prst="rect">
             <a:avLst/>
@@ -4773,13 +7604,35 @@
               </a:spcAft>
             </a:pPr>
             <a:r>
-              <a:rPr sz="3200" b="1" i="0" lang="en-AU" spc="-96">
-                <a:solidFill>
-                  <a:srgbClr val="EA493F"/>
-                </a:solidFill>
-                <a:latin typeface="Inter"/>
-              </a:rPr>
-              <a:t>02</a:t>
+              <a:rPr sz="2100" b="1" i="0" lang="en-AU" spc="-42">
+                <a:solidFill>
+                  <a:srgbClr val="FFFFFF"/>
+                </a:solidFill>
+                <a:latin typeface="Inter"/>
+              </a:rPr>
+              <a:t>Data, Analytics &amp; BI</a:t>
+            </a:r>
+          </a:p>
+          <a:p>
+            <a:pPr algn="l">
+              <a:lnSpc>
+                <a:spcPct val="112000"/>
+              </a:lnSpc>
+              <a:spcBef>
+                <a:spcPts val="400"/>
+              </a:spcBef>
+              <a:spcAft>
+                <a:spcPts val="0"/>
+              </a:spcAft>
+            </a:pPr>
+            <a:r>
+              <a:rPr sz="1200" b="0" i="0" lang="en-AU" spc="0">
+                <a:solidFill>
+                  <a:srgbClr val="CFCFCF"/>
+                </a:solidFill>
+                <a:latin typeface="Inter"/>
+              </a:rPr>
+              <a:t>Reporting, dashboards and governed analytics leaders trust.</a:t>
             </a:r>
           </a:p>
         </p:txBody>
@@ -4792,71 +7645,6 @@
         </p:nvSpPr>
         <p:spPr>
           <a:xfrm>
-            <a:off x="2020824" y="3374136"/>
-            <a:ext cx="7040880" cy="777240"/>
-          </a:xfrm>
-          <a:prstGeom prst="rect">
-            <a:avLst/>
-          </a:prstGeom>
-          <a:noFill/>
-        </p:spPr>
-        <p:txBody>
-          <a:bodyPr wrap="square" anchor="t" lIns="0" rIns="0" tIns="0" bIns="0"/>
-          <a:lstStyle/>
-          <a:p>
-            <a:pPr algn="l">
-              <a:lnSpc>
-                <a:spcPct val="100000"/>
-              </a:lnSpc>
-              <a:spcBef>
-                <a:spcPts val="0"/>
-              </a:spcBef>
-              <a:spcAft>
-                <a:spcPts val="0"/>
-              </a:spcAft>
-            </a:pPr>
-            <a:r>
-              <a:rPr sz="2100" b="1" i="0" lang="en-AU" spc="-42">
-                <a:solidFill>
-                  <a:srgbClr val="FFFFFF"/>
-                </a:solidFill>
-                <a:latin typeface="Inter"/>
-              </a:rPr>
-              <a:t>Data, Analytics &amp; BI</a:t>
-            </a:r>
-          </a:p>
-          <a:p>
-            <a:pPr algn="l">
-              <a:lnSpc>
-                <a:spcPct val="112000"/>
-              </a:lnSpc>
-              <a:spcBef>
-                <a:spcPts val="400"/>
-              </a:spcBef>
-              <a:spcAft>
-                <a:spcPts val="0"/>
-              </a:spcAft>
-            </a:pPr>
-            <a:r>
-              <a:rPr sz="1200" b="0" i="0" lang="en-AU" spc="0">
-                <a:solidFill>
-                  <a:srgbClr val="CFCFCF"/>
-                </a:solidFill>
-                <a:latin typeface="Inter"/>
-              </a:rPr>
-              <a:t>Reporting, dashboards and governed analytics leaders trust.</a:t>
-            </a:r>
-          </a:p>
-        </p:txBody>
-      </p:sp>
-      <p:sp>
-        <p:nvSpPr>
-          <p:cNvPr id="13" name="TextBox 12"/>
-          <p:cNvSpPr txBox="1"/>
-          <p:nvPr/>
-        </p:nvSpPr>
-        <p:spPr>
-          <a:xfrm>
             <a:off x="9722815" y="3465576"/>
             <a:ext cx="1591056" cy="457200"/>
           </a:xfrm>
@@ -4894,7 +7682,7 @@
       </p:sp>
       <p:cxnSp>
         <p:nvCxnSpPr>
-          <p:cNvPr id="14" name="Connector 13"/>
+          <p:cNvPr id="13" name="Connector 12"/>
           <p:cNvCxnSpPr/>
           <p:nvPr/>
         </p:nvCxnSpPr>
@@ -4930,14 +7718,57 @@
       </p:cxnSp>
       <p:sp>
         <p:nvSpPr>
+          <p:cNvPr id="14" name="TextBox 13"/>
+          <p:cNvSpPr txBox="1"/>
+          <p:nvPr/>
+        </p:nvSpPr>
+        <p:spPr>
+          <a:xfrm>
+            <a:off x="877824" y="4297680"/>
+            <a:ext cx="1005840" cy="822960"/>
+          </a:xfrm>
+          <a:prstGeom prst="rect">
+            <a:avLst/>
+          </a:prstGeom>
+          <a:noFill/>
+        </p:spPr>
+        <p:txBody>
+          <a:bodyPr wrap="square" anchor="t" lIns="0" rIns="0" tIns="0" bIns="0"/>
+          <a:lstStyle/>
+          <a:p>
+            <a:pPr algn="l">
+              <a:lnSpc>
+                <a:spcPct val="100000"/>
+              </a:lnSpc>
+              <a:spcBef>
+                <a:spcPts val="0"/>
+              </a:spcBef>
+              <a:spcAft>
+                <a:spcPts val="0"/>
+              </a:spcAft>
+            </a:pPr>
+            <a:r>
+              <a:rPr sz="3200" b="1" i="0" lang="en-AU" spc="-96">
+                <a:solidFill>
+                  <a:srgbClr val="EA493F"/>
+                </a:solidFill>
+                <a:latin typeface="Inter"/>
+              </a:rPr>
+              <a:t>03</a:t>
+            </a:r>
+          </a:p>
+        </p:txBody>
+      </p:sp>
+      <p:sp>
+        <p:nvSpPr>
           <p:cNvPr id="15" name="TextBox 14"/>
           <p:cNvSpPr txBox="1"/>
           <p:nvPr/>
         </p:nvSpPr>
         <p:spPr>
           <a:xfrm>
-            <a:off x="877824" y="4297680"/>
-            <a:ext cx="1005840" cy="822960"/>
+            <a:off x="2020824" y="4261104"/>
+            <a:ext cx="7040880" cy="777240"/>
           </a:xfrm>
           <a:prstGeom prst="rect">
             <a:avLst/>
@@ -4960,13 +7791,35 @@
               </a:spcAft>
             </a:pPr>
             <a:r>
-              <a:rPr sz="3200" b="1" i="0" lang="en-AU" spc="-96">
-                <a:solidFill>
-                  <a:srgbClr val="EA493F"/>
-                </a:solidFill>
-                <a:latin typeface="Inter"/>
-              </a:rPr>
-              <a:t>03</a:t>
+              <a:rPr sz="2100" b="1" i="0" lang="en-AU" spc="-42">
+                <a:solidFill>
+                  <a:srgbClr val="FFFFFF"/>
+                </a:solidFill>
+                <a:latin typeface="Inter"/>
+              </a:rPr>
+              <a:t>Process &amp; Automation</a:t>
+            </a:r>
+          </a:p>
+          <a:p>
+            <a:pPr algn="l">
+              <a:lnSpc>
+                <a:spcPct val="112000"/>
+              </a:lnSpc>
+              <a:spcBef>
+                <a:spcPts val="400"/>
+              </a:spcBef>
+              <a:spcAft>
+                <a:spcPts val="0"/>
+              </a:spcAft>
+            </a:pPr>
+            <a:r>
+              <a:rPr sz="1200" b="0" i="0" lang="en-AU" spc="0">
+                <a:solidFill>
+                  <a:srgbClr val="CFCFCF"/>
+                </a:solidFill>
+                <a:latin typeface="Inter"/>
+              </a:rPr>
+              <a:t>Redesign, integrations and automation that remove manual work.</a:t>
             </a:r>
           </a:p>
         </p:txBody>
@@ -4979,71 +7832,6 @@
         </p:nvSpPr>
         <p:spPr>
           <a:xfrm>
-            <a:off x="2020824" y="4261104"/>
-            <a:ext cx="7040880" cy="777240"/>
-          </a:xfrm>
-          <a:prstGeom prst="rect">
-            <a:avLst/>
-          </a:prstGeom>
-          <a:noFill/>
-        </p:spPr>
-        <p:txBody>
-          <a:bodyPr wrap="square" anchor="t" lIns="0" rIns="0" tIns="0" bIns="0"/>
-          <a:lstStyle/>
-          <a:p>
-            <a:pPr algn="l">
-              <a:lnSpc>
-                <a:spcPct val="100000"/>
-              </a:lnSpc>
-              <a:spcBef>
-                <a:spcPts val="0"/>
-              </a:spcBef>
-              <a:spcAft>
-                <a:spcPts val="0"/>
-              </a:spcAft>
-            </a:pPr>
-            <a:r>
-              <a:rPr sz="2100" b="1" i="0" lang="en-AU" spc="-42">
-                <a:solidFill>
-                  <a:srgbClr val="FFFFFF"/>
-                </a:solidFill>
-                <a:latin typeface="Inter"/>
-              </a:rPr>
-              <a:t>Process &amp; Automation</a:t>
-            </a:r>
-          </a:p>
-          <a:p>
-            <a:pPr algn="l">
-              <a:lnSpc>
-                <a:spcPct val="112000"/>
-              </a:lnSpc>
-              <a:spcBef>
-                <a:spcPts val="400"/>
-              </a:spcBef>
-              <a:spcAft>
-                <a:spcPts val="0"/>
-              </a:spcAft>
-            </a:pPr>
-            <a:r>
-              <a:rPr sz="1200" b="0" i="0" lang="en-AU" spc="0">
-                <a:solidFill>
-                  <a:srgbClr val="CFCFCF"/>
-                </a:solidFill>
-                <a:latin typeface="Inter"/>
-              </a:rPr>
-              <a:t>Redesign, integrations and automation that remove manual work.</a:t>
-            </a:r>
-          </a:p>
-        </p:txBody>
-      </p:sp>
-      <p:sp>
-        <p:nvSpPr>
-          <p:cNvPr id="17" name="TextBox 16"/>
-          <p:cNvSpPr txBox="1"/>
-          <p:nvPr/>
-        </p:nvSpPr>
-        <p:spPr>
-          <a:xfrm>
             <a:off x="9722815" y="4352544"/>
             <a:ext cx="1591056" cy="457200"/>
           </a:xfrm>
@@ -5081,7 +7869,7 @@
       </p:sp>
       <p:cxnSp>
         <p:nvCxnSpPr>
-          <p:cNvPr id="18" name="Connector 17"/>
+          <p:cNvPr id="17" name="Connector 16"/>
           <p:cNvCxnSpPr/>
           <p:nvPr/>
         </p:nvCxnSpPr>
@@ -5117,14 +7905,57 @@
       </p:cxnSp>
       <p:sp>
         <p:nvSpPr>
+          <p:cNvPr id="18" name="TextBox 17"/>
+          <p:cNvSpPr txBox="1"/>
+          <p:nvPr/>
+        </p:nvSpPr>
+        <p:spPr>
+          <a:xfrm>
+            <a:off x="877824" y="5184648"/>
+            <a:ext cx="1005840" cy="822960"/>
+          </a:xfrm>
+          <a:prstGeom prst="rect">
+            <a:avLst/>
+          </a:prstGeom>
+          <a:noFill/>
+        </p:spPr>
+        <p:txBody>
+          <a:bodyPr wrap="square" anchor="t" lIns="0" rIns="0" tIns="0" bIns="0"/>
+          <a:lstStyle/>
+          <a:p>
+            <a:pPr algn="l">
+              <a:lnSpc>
+                <a:spcPct val="100000"/>
+              </a:lnSpc>
+              <a:spcBef>
+                <a:spcPts val="0"/>
+              </a:spcBef>
+              <a:spcAft>
+                <a:spcPts val="0"/>
+              </a:spcAft>
+            </a:pPr>
+            <a:r>
+              <a:rPr sz="3200" b="1" i="0" lang="en-AU" spc="-96">
+                <a:solidFill>
+                  <a:srgbClr val="EA493F"/>
+                </a:solidFill>
+                <a:latin typeface="Inter"/>
+              </a:rPr>
+              <a:t>04</a:t>
+            </a:r>
+          </a:p>
+        </p:txBody>
+      </p:sp>
+      <p:sp>
+        <p:nvSpPr>
           <p:cNvPr id="19" name="TextBox 18"/>
           <p:cNvSpPr txBox="1"/>
           <p:nvPr/>
         </p:nvSpPr>
         <p:spPr>
           <a:xfrm>
-            <a:off x="877824" y="5184648"/>
-            <a:ext cx="1005840" cy="822960"/>
+            <a:off x="2020824" y="5148072"/>
+            <a:ext cx="7040880" cy="777240"/>
           </a:xfrm>
           <a:prstGeom prst="rect">
             <a:avLst/>
@@ -5147,13 +7978,35 @@
               </a:spcAft>
             </a:pPr>
             <a:r>
-              <a:rPr sz="3200" b="1" i="0" lang="en-AU" spc="-96">
-                <a:solidFill>
-                  <a:srgbClr val="EA493F"/>
-                </a:solidFill>
-                <a:latin typeface="Inter"/>
-              </a:rPr>
-              <a:t>04</a:t>
+              <a:rPr sz="2100" b="1" i="0" lang="en-AU" spc="-42">
+                <a:solidFill>
+                  <a:srgbClr val="FFFFFF"/>
+                </a:solidFill>
+                <a:latin typeface="Inter"/>
+              </a:rPr>
+              <a:t>Managed Services &amp; Support</a:t>
+            </a:r>
+          </a:p>
+          <a:p>
+            <a:pPr algn="l">
+              <a:lnSpc>
+                <a:spcPct val="112000"/>
+              </a:lnSpc>
+              <a:spcBef>
+                <a:spcPts val="400"/>
+              </a:spcBef>
+              <a:spcAft>
+                <a:spcPts val="0"/>
+              </a:spcAft>
+            </a:pPr>
+            <a:r>
+              <a:rPr sz="1200" b="0" i="0" lang="en-AU" spc="0">
+                <a:solidFill>
+                  <a:srgbClr val="CFCFCF"/>
+                </a:solidFill>
+                <a:latin typeface="Inter"/>
+              </a:rPr>
+              <a:t>Long-term AMS that keeps delivering value after go-live.</a:t>
             </a:r>
           </a:p>
         </p:txBody>
@@ -5166,71 +8019,6 @@
         </p:nvSpPr>
         <p:spPr>
           <a:xfrm>
-            <a:off x="2020824" y="5148072"/>
-            <a:ext cx="7040880" cy="777240"/>
-          </a:xfrm>
-          <a:prstGeom prst="rect">
-            <a:avLst/>
-          </a:prstGeom>
-          <a:noFill/>
-        </p:spPr>
-        <p:txBody>
-          <a:bodyPr wrap="square" anchor="t" lIns="0" rIns="0" tIns="0" bIns="0"/>
-          <a:lstStyle/>
-          <a:p>
-            <a:pPr algn="l">
-              <a:lnSpc>
-                <a:spcPct val="100000"/>
-              </a:lnSpc>
-              <a:spcBef>
-                <a:spcPts val="0"/>
-              </a:spcBef>
-              <a:spcAft>
-                <a:spcPts val="0"/>
-              </a:spcAft>
-            </a:pPr>
-            <a:r>
-              <a:rPr sz="2100" b="1" i="0" lang="en-AU" spc="-42">
-                <a:solidFill>
-                  <a:srgbClr val="FFFFFF"/>
-                </a:solidFill>
-                <a:latin typeface="Inter"/>
-              </a:rPr>
-              <a:t>Managed Services &amp; Support</a:t>
-            </a:r>
-          </a:p>
-          <a:p>
-            <a:pPr algn="l">
-              <a:lnSpc>
-                <a:spcPct val="112000"/>
-              </a:lnSpc>
-              <a:spcBef>
-                <a:spcPts val="400"/>
-              </a:spcBef>
-              <a:spcAft>
-                <a:spcPts val="0"/>
-              </a:spcAft>
-            </a:pPr>
-            <a:r>
-              <a:rPr sz="1200" b="0" i="0" lang="en-AU" spc="0">
-                <a:solidFill>
-                  <a:srgbClr val="CFCFCF"/>
-                </a:solidFill>
-                <a:latin typeface="Inter"/>
-              </a:rPr>
-              <a:t>Long-term AMS that keeps delivering value after go-live.</a:t>
-            </a:r>
-          </a:p>
-        </p:txBody>
-      </p:sp>
-      <p:sp>
-        <p:nvSpPr>
-          <p:cNvPr id="21" name="TextBox 20"/>
-          <p:cNvSpPr txBox="1"/>
-          <p:nvPr/>
-        </p:nvSpPr>
-        <p:spPr>
-          <a:xfrm>
             <a:off x="9722815" y="5239512"/>
             <a:ext cx="1591056" cy="457200"/>
           </a:xfrm>
@@ -5268,7 +8056,7 @@
       </p:sp>
       <p:cxnSp>
         <p:nvCxnSpPr>
-          <p:cNvPr id="22" name="Connector 21"/>
+          <p:cNvPr id="21" name="Connector 20"/>
           <p:cNvCxnSpPr/>
           <p:nvPr/>
         </p:nvCxnSpPr>
@@ -5310,7 +8098,7 @@
 </p:sld>
 </file>
 
-<file path=ppt/slides/slide5.xml><?xml version="1.0" encoding="utf-8"?>
+<file path=ppt/slides/slide6.xml><?xml version="1.0" encoding="utf-8"?>
 <p:sld xmlns:a="http://schemas.openxmlformats.org/drawingml/2006/main" xmlns:p="http://schemas.openxmlformats.org/presentationml/2006/main" xmlns:r="http://schemas.openxmlformats.org/officeDocument/2006/relationships">
   <p:cSld>
     <p:bg>
@@ -5384,9 +8172,9 @@
               </a:spcAft>
             </a:pPr>
             <a:r>
-              <a:rPr sz="1050" b="1" i="0" lang="en-AU" spc="147" cap="all">
-                <a:solidFill>
-                  <a:srgbClr val="AEAEAE"/>
+              <a:rPr sz="1100" b="1" i="0" lang="en-AU" spc="154" cap="all">
+                <a:solidFill>
+                  <a:srgbClr val="EA493F"/>
                 </a:solidFill>
                 <a:latin typeface="Inter"/>
               </a:rPr>
@@ -5403,8 +8191,8 @@
         </p:nvSpPr>
         <p:spPr>
           <a:xfrm>
-            <a:off x="877824" y="841248"/>
-            <a:ext cx="7315200" cy="320040"/>
+            <a:off x="841248" y="914400"/>
+            <a:ext cx="10424160" cy="1005840"/>
           </a:xfrm>
           <a:prstGeom prst="rect">
             <a:avLst/>
@@ -5427,13 +8215,22 @@
               </a:spcAft>
             </a:pPr>
             <a:r>
-              <a:rPr sz="1200" b="1" i="0" lang="en-AU" spc="192" cap="all">
+              <a:rPr sz="3400" b="1" i="0" lang="en-AU" spc="-74">
+                <a:solidFill>
+                  <a:srgbClr val="111111"/>
+                </a:solidFill>
+                <a:latin typeface="Inter"/>
+              </a:rPr>
+              <a:t>People first, </a:t>
+            </a:r>
+            <a:r>
+              <a:rPr sz="3400" b="1" i="0" lang="en-AU" spc="-74">
                 <a:solidFill>
                   <a:srgbClr val="EA493F"/>
                 </a:solidFill>
                 <a:latin typeface="Inter"/>
               </a:rPr>
-              <a:t>HOW WE WORK</a:t>
+              <a:t>start to finish.</a:t>
             </a:r>
           </a:p>
         </p:txBody>
@@ -5446,58 +8243,6 @@
         </p:nvSpPr>
         <p:spPr>
           <a:xfrm>
-            <a:off x="841248" y="1225296"/>
-            <a:ext cx="10424160" cy="1005840"/>
-          </a:xfrm>
-          <a:prstGeom prst="rect">
-            <a:avLst/>
-          </a:prstGeom>
-          <a:noFill/>
-        </p:spPr>
-        <p:txBody>
-          <a:bodyPr wrap="square" anchor="t" lIns="0" rIns="0" tIns="0" bIns="0"/>
-          <a:lstStyle/>
-          <a:p>
-            <a:pPr algn="l">
-              <a:lnSpc>
-                <a:spcPct val="100000"/>
-              </a:lnSpc>
-              <a:spcBef>
-                <a:spcPts val="0"/>
-              </a:spcBef>
-              <a:spcAft>
-                <a:spcPts val="0"/>
-              </a:spcAft>
-            </a:pPr>
-            <a:r>
-              <a:rPr sz="3400" b="1" i="0" lang="en-AU" spc="-74">
-                <a:solidFill>
-                  <a:srgbClr val="111111"/>
-                </a:solidFill>
-                <a:latin typeface="Inter"/>
-              </a:rPr>
-              <a:t>People first, </a:t>
-            </a:r>
-            <a:r>
-              <a:rPr sz="3400" b="1" i="0" lang="en-AU" spc="-74">
-                <a:solidFill>
-                  <a:srgbClr val="EA493F"/>
-                </a:solidFill>
-                <a:latin typeface="Inter"/>
-              </a:rPr>
-              <a:t>start to finish.</a:t>
-            </a:r>
-          </a:p>
-        </p:txBody>
-      </p:sp>
-      <p:sp>
-        <p:nvSpPr>
-          <p:cNvPr id="6" name="TextBox 5"/>
-          <p:cNvSpPr txBox="1"/>
-          <p:nvPr/>
-        </p:nvSpPr>
-        <p:spPr>
-          <a:xfrm>
             <a:off x="877824" y="2971800"/>
             <a:ext cx="2380411" cy="2286000"/>
           </a:xfrm>
@@ -5579,7 +8324,7 @@
       </p:sp>
       <p:cxnSp>
         <p:nvCxnSpPr>
-          <p:cNvPr id="7" name="Connector 6"/>
+          <p:cNvPr id="6" name="Connector 5"/>
           <p:cNvCxnSpPr/>
           <p:nvPr/>
         </p:nvCxnSpPr>
@@ -5615,7 +8360,7 @@
       </p:cxnSp>
       <p:sp>
         <p:nvSpPr>
-          <p:cNvPr id="8" name="TextBox 7"/>
+          <p:cNvPr id="7" name="TextBox 6"/>
           <p:cNvSpPr txBox="1"/>
           <p:nvPr/>
         </p:nvSpPr>
@@ -5702,7 +8447,7 @@
       </p:sp>
       <p:cxnSp>
         <p:nvCxnSpPr>
-          <p:cNvPr id="9" name="Connector 8"/>
+          <p:cNvPr id="8" name="Connector 7"/>
           <p:cNvCxnSpPr/>
           <p:nvPr/>
         </p:nvCxnSpPr>
@@ -5738,7 +8483,7 @@
       </p:cxnSp>
       <p:sp>
         <p:nvSpPr>
-          <p:cNvPr id="10" name="TextBox 9"/>
+          <p:cNvPr id="9" name="TextBox 8"/>
           <p:cNvSpPr txBox="1"/>
           <p:nvPr/>
         </p:nvSpPr>
@@ -5825,7 +8570,7 @@
       </p:sp>
       <p:cxnSp>
         <p:nvCxnSpPr>
-          <p:cNvPr id="11" name="Connector 10"/>
+          <p:cNvPr id="10" name="Connector 9"/>
           <p:cNvCxnSpPr/>
           <p:nvPr/>
         </p:nvCxnSpPr>
@@ -5861,7 +8606,7 @@
       </p:cxnSp>
       <p:sp>
         <p:nvSpPr>
-          <p:cNvPr id="12" name="TextBox 11"/>
+          <p:cNvPr id="11" name="TextBox 10"/>
           <p:cNvSpPr txBox="1"/>
           <p:nvPr/>
         </p:nvSpPr>
@@ -5954,7 +8699,7 @@
 </p:sld>
 </file>
 
-<file path=ppt/slides/slide6.xml><?xml version="1.0" encoding="utf-8"?>
+<file path=ppt/slides/slide7.xml><?xml version="1.0" encoding="utf-8"?>
 <p:sld xmlns:a="http://schemas.openxmlformats.org/drawingml/2006/main" xmlns:p="http://schemas.openxmlformats.org/presentationml/2006/main" xmlns:r="http://schemas.openxmlformats.org/officeDocument/2006/relationships">
   <p:cSld>
     <p:bg>
@@ -6028,9 +8773,9 @@
               </a:spcAft>
             </a:pPr>
             <a:r>
-              <a:rPr sz="1050" b="1" i="0" lang="en-AU" spc="147" cap="all">
-                <a:solidFill>
-                  <a:srgbClr val="777777"/>
+              <a:rPr sz="1100" b="1" i="0" lang="en-AU" spc="154" cap="all">
+                <a:solidFill>
+                  <a:srgbClr val="EA493F"/>
                 </a:solidFill>
                 <a:latin typeface="Inter"/>
               </a:rPr>
@@ -6047,8 +8792,8 @@
         </p:nvSpPr>
         <p:spPr>
           <a:xfrm>
-            <a:off x="877824" y="1051560"/>
-            <a:ext cx="5029200" cy="320040"/>
+            <a:off x="841248" y="1097280"/>
+            <a:ext cx="4937760" cy="1737360"/>
           </a:xfrm>
           <a:prstGeom prst="rect">
             <a:avLst/>
@@ -6071,13 +8816,22 @@
               </a:spcAft>
             </a:pPr>
             <a:r>
-              <a:rPr sz="1200" b="1" i="0" lang="en-AU" spc="192" cap="all">
+              <a:rPr sz="3600" b="1" i="0" lang="en-AU" spc="-79">
+                <a:solidFill>
+                  <a:srgbClr val="FFFFFF"/>
+                </a:solidFill>
+                <a:latin typeface="Inter"/>
+              </a:rPr>
+              <a:t>Decisions on </a:t>
+            </a:r>
+            <a:r>
+              <a:rPr sz="3600" b="1" i="0" lang="en-AU" spc="-79">
                 <a:solidFill>
                   <a:srgbClr val="EA493F"/>
                 </a:solidFill>
                 <a:latin typeface="Inter"/>
               </a:rPr>
-              <a:t>DATA &amp; AI</a:t>
+              <a:t>current data.</a:t>
             </a:r>
           </a:p>
         </p:txBody>
@@ -6090,58 +8844,6 @@
         </p:nvSpPr>
         <p:spPr>
           <a:xfrm>
-            <a:off x="841248" y="1463040"/>
-            <a:ext cx="4937760" cy="1737360"/>
-          </a:xfrm>
-          <a:prstGeom prst="rect">
-            <a:avLst/>
-          </a:prstGeom>
-          <a:noFill/>
-        </p:spPr>
-        <p:txBody>
-          <a:bodyPr wrap="square" anchor="t" lIns="0" rIns="0" tIns="0" bIns="0"/>
-          <a:lstStyle/>
-          <a:p>
-            <a:pPr algn="l">
-              <a:lnSpc>
-                <a:spcPct val="100000"/>
-              </a:lnSpc>
-              <a:spcBef>
-                <a:spcPts val="0"/>
-              </a:spcBef>
-              <a:spcAft>
-                <a:spcPts val="0"/>
-              </a:spcAft>
-            </a:pPr>
-            <a:r>
-              <a:rPr sz="3600" b="1" i="0" lang="en-AU" spc="-79">
-                <a:solidFill>
-                  <a:srgbClr val="FFFFFF"/>
-                </a:solidFill>
-                <a:latin typeface="Inter"/>
-              </a:rPr>
-              <a:t>Decisions on </a:t>
-            </a:r>
-            <a:r>
-              <a:rPr sz="3600" b="1" i="0" lang="en-AU" spc="-79">
-                <a:solidFill>
-                  <a:srgbClr val="EA493F"/>
-                </a:solidFill>
-                <a:latin typeface="Inter"/>
-              </a:rPr>
-              <a:t>current data.</a:t>
-            </a:r>
-          </a:p>
-        </p:txBody>
-      </p:sp>
-      <p:sp>
-        <p:nvSpPr>
-          <p:cNvPr id="6" name="TextBox 5"/>
-          <p:cNvSpPr txBox="1"/>
-          <p:nvPr/>
-        </p:nvSpPr>
-        <p:spPr>
-          <a:xfrm>
             <a:off x="877824" y="3611880"/>
             <a:ext cx="4572000" cy="2011680"/>
           </a:xfrm>
@@ -6179,7 +8881,7 @@
       </p:sp>
       <p:cxnSp>
         <p:nvCxnSpPr>
-          <p:cNvPr id="7" name="Connector 6"/>
+          <p:cNvPr id="6" name="Connector 5"/>
           <p:cNvCxnSpPr/>
           <p:nvPr/>
         </p:nvCxnSpPr>
@@ -6215,14 +8917,57 @@
       </p:cxnSp>
       <p:sp>
         <p:nvSpPr>
+          <p:cNvPr id="7" name="TextBox 6"/>
+          <p:cNvSpPr txBox="1"/>
+          <p:nvPr/>
+        </p:nvSpPr>
+        <p:spPr>
+          <a:xfrm>
+            <a:off x="6355080" y="1417320"/>
+            <a:ext cx="4958791" cy="292608"/>
+          </a:xfrm>
+          <a:prstGeom prst="rect">
+            <a:avLst/>
+          </a:prstGeom>
+          <a:noFill/>
+        </p:spPr>
+        <p:txBody>
+          <a:bodyPr wrap="square" anchor="t" lIns="0" rIns="0" tIns="0" bIns="0"/>
+          <a:lstStyle/>
+          <a:p>
+            <a:pPr algn="l">
+              <a:lnSpc>
+                <a:spcPct val="100000"/>
+              </a:lnSpc>
+              <a:spcBef>
+                <a:spcPts val="0"/>
+              </a:spcBef>
+              <a:spcAft>
+                <a:spcPts val="0"/>
+              </a:spcAft>
+            </a:pPr>
+            <a:r>
+              <a:rPr sz="1050" b="1" i="0" lang="en-AU" spc="147" cap="all">
+                <a:solidFill>
+                  <a:srgbClr val="EA493F"/>
+                </a:solidFill>
+                <a:latin typeface="Inter"/>
+              </a:rPr>
+              <a:t>REPORT</a:t>
+            </a:r>
+          </a:p>
+        </p:txBody>
+      </p:sp>
+      <p:sp>
+        <p:nvSpPr>
           <p:cNvPr id="8" name="TextBox 7"/>
           <p:cNvSpPr txBox="1"/>
           <p:nvPr/>
         </p:nvSpPr>
         <p:spPr>
           <a:xfrm>
-            <a:off x="6355080" y="1380744"/>
-            <a:ext cx="1417320" cy="731520"/>
+            <a:off x="6355080" y="1728216"/>
+            <a:ext cx="4958791" cy="457200"/>
           </a:xfrm>
           <a:prstGeom prst="rect">
             <a:avLst/>
@@ -6235,60 +8980,17 @@
           <a:p>
             <a:pPr algn="l">
               <a:lnSpc>
-                <a:spcPct val="105000"/>
-              </a:lnSpc>
-              <a:spcBef>
-                <a:spcPts val="0"/>
-              </a:spcBef>
-              <a:spcAft>
-                <a:spcPts val="0"/>
-              </a:spcAft>
-            </a:pPr>
-            <a:r>
-              <a:rPr sz="1050" b="1" i="0" lang="en-AU" spc="126" cap="all">
-                <a:solidFill>
-                  <a:srgbClr val="EA493F"/>
-                </a:solidFill>
-                <a:latin typeface="Inter"/>
-              </a:rPr>
-              <a:t>REPORT</a:t>
-            </a:r>
-          </a:p>
-        </p:txBody>
-      </p:sp>
-      <p:sp>
-        <p:nvSpPr>
-          <p:cNvPr id="9" name="TextBox 8"/>
-          <p:cNvSpPr txBox="1"/>
-          <p:nvPr/>
-        </p:nvSpPr>
-        <p:spPr>
-          <a:xfrm>
-            <a:off x="7863840" y="1344168"/>
-            <a:ext cx="3450031" cy="822960"/>
-          </a:xfrm>
-          <a:prstGeom prst="rect">
-            <a:avLst/>
-          </a:prstGeom>
-          <a:noFill/>
-        </p:spPr>
-        <p:txBody>
-          <a:bodyPr wrap="square" anchor="ctr" lIns="0" rIns="0" tIns="0" bIns="0"/>
-          <a:lstStyle/>
-          <a:p>
-            <a:pPr algn="l">
-              <a:lnSpc>
-                <a:spcPct val="118000"/>
-              </a:lnSpc>
-              <a:spcBef>
-                <a:spcPts val="0"/>
-              </a:spcBef>
-              <a:spcAft>
-                <a:spcPts val="0"/>
-              </a:spcAft>
-            </a:pPr>
-            <a:r>
-              <a:rPr sz="1300" b="1" i="0" lang="en-AU" spc="0">
+                <a:spcPct val="110000"/>
+              </a:lnSpc>
+              <a:spcBef>
+                <a:spcPts val="0"/>
+              </a:spcBef>
+              <a:spcAft>
+                <a:spcPts val="0"/>
+              </a:spcAft>
+            </a:pPr>
+            <a:r>
+              <a:rPr sz="1400" b="1" i="0" lang="en-AU" spc="-7">
                 <a:solidFill>
                   <a:srgbClr val="FFFFFF"/>
                 </a:solidFill>
@@ -6301,13 +9003,13 @@
       </p:sp>
       <p:cxnSp>
         <p:nvCxnSpPr>
-          <p:cNvPr id="10" name="Connector 9"/>
+          <p:cNvPr id="9" name="Connector 8"/>
           <p:cNvCxnSpPr/>
           <p:nvPr/>
         </p:nvCxnSpPr>
         <p:spPr>
           <a:xfrm>
-            <a:off x="6355080" y="2203704"/>
+            <a:off x="6355080" y="2331720"/>
             <a:ext cx="4958791" cy="0"/>
           </a:xfrm>
           <a:prstGeom prst="bentConnector3">
@@ -6337,14 +9039,57 @@
       </p:cxnSp>
       <p:sp>
         <p:nvSpPr>
+          <p:cNvPr id="10" name="TextBox 9"/>
+          <p:cNvSpPr txBox="1"/>
+          <p:nvPr/>
+        </p:nvSpPr>
+        <p:spPr>
+          <a:xfrm>
+            <a:off x="6355080" y="2514600"/>
+            <a:ext cx="4958791" cy="292608"/>
+          </a:xfrm>
+          <a:prstGeom prst="rect">
+            <a:avLst/>
+          </a:prstGeom>
+          <a:noFill/>
+        </p:spPr>
+        <p:txBody>
+          <a:bodyPr wrap="square" anchor="t" lIns="0" rIns="0" tIns="0" bIns="0"/>
+          <a:lstStyle/>
+          <a:p>
+            <a:pPr algn="l">
+              <a:lnSpc>
+                <a:spcPct val="100000"/>
+              </a:lnSpc>
+              <a:spcBef>
+                <a:spcPts val="0"/>
+              </a:spcBef>
+              <a:spcAft>
+                <a:spcPts val="0"/>
+              </a:spcAft>
+            </a:pPr>
+            <a:r>
+              <a:rPr sz="1050" b="1" i="0" lang="en-AU" spc="147" cap="all">
+                <a:solidFill>
+                  <a:srgbClr val="EA493F"/>
+                </a:solidFill>
+                <a:latin typeface="Inter"/>
+              </a:rPr>
+              <a:t>ANALYSE</a:t>
+            </a:r>
+          </a:p>
+        </p:txBody>
+      </p:sp>
+      <p:sp>
+        <p:nvSpPr>
           <p:cNvPr id="11" name="TextBox 10"/>
           <p:cNvSpPr txBox="1"/>
           <p:nvPr/>
         </p:nvSpPr>
         <p:spPr>
           <a:xfrm>
-            <a:off x="6355080" y="2350008"/>
-            <a:ext cx="1417320" cy="731520"/>
+            <a:off x="6355080" y="2825496"/>
+            <a:ext cx="4958791" cy="457200"/>
           </a:xfrm>
           <a:prstGeom prst="rect">
             <a:avLst/>
@@ -6357,60 +9102,17 @@
           <a:p>
             <a:pPr algn="l">
               <a:lnSpc>
-                <a:spcPct val="105000"/>
-              </a:lnSpc>
-              <a:spcBef>
-                <a:spcPts val="0"/>
-              </a:spcBef>
-              <a:spcAft>
-                <a:spcPts val="0"/>
-              </a:spcAft>
-            </a:pPr>
-            <a:r>
-              <a:rPr sz="1050" b="1" i="0" lang="en-AU" spc="126" cap="all">
-                <a:solidFill>
-                  <a:srgbClr val="EA493F"/>
-                </a:solidFill>
-                <a:latin typeface="Inter"/>
-              </a:rPr>
-              <a:t>ANALYSE</a:t>
-            </a:r>
-          </a:p>
-        </p:txBody>
-      </p:sp>
-      <p:sp>
-        <p:nvSpPr>
-          <p:cNvPr id="12" name="TextBox 11"/>
-          <p:cNvSpPr txBox="1"/>
-          <p:nvPr/>
-        </p:nvSpPr>
-        <p:spPr>
-          <a:xfrm>
-            <a:off x="7863840" y="2313432"/>
-            <a:ext cx="3450031" cy="822960"/>
-          </a:xfrm>
-          <a:prstGeom prst="rect">
-            <a:avLst/>
-          </a:prstGeom>
-          <a:noFill/>
-        </p:spPr>
-        <p:txBody>
-          <a:bodyPr wrap="square" anchor="ctr" lIns="0" rIns="0" tIns="0" bIns="0"/>
-          <a:lstStyle/>
-          <a:p>
-            <a:pPr algn="l">
-              <a:lnSpc>
-                <a:spcPct val="118000"/>
-              </a:lnSpc>
-              <a:spcBef>
-                <a:spcPts val="0"/>
-              </a:spcBef>
-              <a:spcAft>
-                <a:spcPts val="0"/>
-              </a:spcAft>
-            </a:pPr>
-            <a:r>
-              <a:rPr sz="1300" b="1" i="0" lang="en-AU" spc="0">
+                <a:spcPct val="110000"/>
+              </a:lnSpc>
+              <a:spcBef>
+                <a:spcPts val="0"/>
+              </a:spcBef>
+              <a:spcAft>
+                <a:spcPts val="0"/>
+              </a:spcAft>
+            </a:pPr>
+            <a:r>
+              <a:rPr sz="1400" b="1" i="0" lang="en-AU" spc="-7">
                 <a:solidFill>
                   <a:srgbClr val="FFFFFF"/>
                 </a:solidFill>
@@ -6423,13 +9125,13 @@
       </p:sp>
       <p:cxnSp>
         <p:nvCxnSpPr>
-          <p:cNvPr id="13" name="Connector 12"/>
+          <p:cNvPr id="12" name="Connector 11"/>
           <p:cNvCxnSpPr/>
           <p:nvPr/>
         </p:nvCxnSpPr>
         <p:spPr>
           <a:xfrm>
-            <a:off x="6355080" y="3172968"/>
+            <a:off x="6355080" y="3429000"/>
             <a:ext cx="4958791" cy="0"/>
           </a:xfrm>
           <a:prstGeom prst="bentConnector3">
@@ -6459,14 +9161,57 @@
       </p:cxnSp>
       <p:sp>
         <p:nvSpPr>
+          <p:cNvPr id="13" name="TextBox 12"/>
+          <p:cNvSpPr txBox="1"/>
+          <p:nvPr/>
+        </p:nvSpPr>
+        <p:spPr>
+          <a:xfrm>
+            <a:off x="6355080" y="3611880"/>
+            <a:ext cx="4958791" cy="292608"/>
+          </a:xfrm>
+          <a:prstGeom prst="rect">
+            <a:avLst/>
+          </a:prstGeom>
+          <a:noFill/>
+        </p:spPr>
+        <p:txBody>
+          <a:bodyPr wrap="square" anchor="t" lIns="0" rIns="0" tIns="0" bIns="0"/>
+          <a:lstStyle/>
+          <a:p>
+            <a:pPr algn="l">
+              <a:lnSpc>
+                <a:spcPct val="100000"/>
+              </a:lnSpc>
+              <a:spcBef>
+                <a:spcPts val="0"/>
+              </a:spcBef>
+              <a:spcAft>
+                <a:spcPts val="0"/>
+              </a:spcAft>
+            </a:pPr>
+            <a:r>
+              <a:rPr sz="1050" b="1" i="0" lang="en-AU" spc="147" cap="all">
+                <a:solidFill>
+                  <a:srgbClr val="EA493F"/>
+                </a:solidFill>
+                <a:latin typeface="Inter"/>
+              </a:rPr>
+              <a:t>AUTOMATE</a:t>
+            </a:r>
+          </a:p>
+        </p:txBody>
+      </p:sp>
+      <p:sp>
+        <p:nvSpPr>
           <p:cNvPr id="14" name="TextBox 13"/>
           <p:cNvSpPr txBox="1"/>
           <p:nvPr/>
         </p:nvSpPr>
         <p:spPr>
           <a:xfrm>
-            <a:off x="6355080" y="3319272"/>
-            <a:ext cx="1417320" cy="731520"/>
+            <a:off x="6355080" y="3922776"/>
+            <a:ext cx="4958791" cy="457200"/>
           </a:xfrm>
           <a:prstGeom prst="rect">
             <a:avLst/>
@@ -6479,60 +9224,17 @@
           <a:p>
             <a:pPr algn="l">
               <a:lnSpc>
-                <a:spcPct val="105000"/>
-              </a:lnSpc>
-              <a:spcBef>
-                <a:spcPts val="0"/>
-              </a:spcBef>
-              <a:spcAft>
-                <a:spcPts val="0"/>
-              </a:spcAft>
-            </a:pPr>
-            <a:r>
-              <a:rPr sz="1050" b="1" i="0" lang="en-AU" spc="126" cap="all">
-                <a:solidFill>
-                  <a:srgbClr val="EA493F"/>
-                </a:solidFill>
-                <a:latin typeface="Inter"/>
-              </a:rPr>
-              <a:t>AUTOMATE</a:t>
-            </a:r>
-          </a:p>
-        </p:txBody>
-      </p:sp>
-      <p:sp>
-        <p:nvSpPr>
-          <p:cNvPr id="15" name="TextBox 14"/>
-          <p:cNvSpPr txBox="1"/>
-          <p:nvPr/>
-        </p:nvSpPr>
-        <p:spPr>
-          <a:xfrm>
-            <a:off x="7863840" y="3282696"/>
-            <a:ext cx="3450031" cy="822960"/>
-          </a:xfrm>
-          <a:prstGeom prst="rect">
-            <a:avLst/>
-          </a:prstGeom>
-          <a:noFill/>
-        </p:spPr>
-        <p:txBody>
-          <a:bodyPr wrap="square" anchor="ctr" lIns="0" rIns="0" tIns="0" bIns="0"/>
-          <a:lstStyle/>
-          <a:p>
-            <a:pPr algn="l">
-              <a:lnSpc>
-                <a:spcPct val="118000"/>
-              </a:lnSpc>
-              <a:spcBef>
-                <a:spcPts val="0"/>
-              </a:spcBef>
-              <a:spcAft>
-                <a:spcPts val="0"/>
-              </a:spcAft>
-            </a:pPr>
-            <a:r>
-              <a:rPr sz="1300" b="1" i="0" lang="en-AU" spc="0">
+                <a:spcPct val="110000"/>
+              </a:lnSpc>
+              <a:spcBef>
+                <a:spcPts val="0"/>
+              </a:spcBef>
+              <a:spcAft>
+                <a:spcPts val="0"/>
+              </a:spcAft>
+            </a:pPr>
+            <a:r>
+              <a:rPr sz="1400" b="1" i="0" lang="en-AU" spc="-7">
                 <a:solidFill>
                   <a:srgbClr val="FFFFFF"/>
                 </a:solidFill>
@@ -6545,13 +9247,13 @@
       </p:sp>
       <p:cxnSp>
         <p:nvCxnSpPr>
-          <p:cNvPr id="16" name="Connector 15"/>
+          <p:cNvPr id="15" name="Connector 14"/>
           <p:cNvCxnSpPr/>
           <p:nvPr/>
         </p:nvCxnSpPr>
         <p:spPr>
           <a:xfrm>
-            <a:off x="6355080" y="4142232"/>
+            <a:off x="6355080" y="4526280"/>
             <a:ext cx="4958791" cy="0"/>
           </a:xfrm>
           <a:prstGeom prst="bentConnector3">
@@ -6581,14 +9283,57 @@
       </p:cxnSp>
       <p:sp>
         <p:nvSpPr>
+          <p:cNvPr id="16" name="TextBox 15"/>
+          <p:cNvSpPr txBox="1"/>
+          <p:nvPr/>
+        </p:nvSpPr>
+        <p:spPr>
+          <a:xfrm>
+            <a:off x="6355080" y="4709159"/>
+            <a:ext cx="4958791" cy="292608"/>
+          </a:xfrm>
+          <a:prstGeom prst="rect">
+            <a:avLst/>
+          </a:prstGeom>
+          <a:noFill/>
+        </p:spPr>
+        <p:txBody>
+          <a:bodyPr wrap="square" anchor="t" lIns="0" rIns="0" tIns="0" bIns="0"/>
+          <a:lstStyle/>
+          <a:p>
+            <a:pPr algn="l">
+              <a:lnSpc>
+                <a:spcPct val="100000"/>
+              </a:lnSpc>
+              <a:spcBef>
+                <a:spcPts val="0"/>
+              </a:spcBef>
+              <a:spcAft>
+                <a:spcPts val="0"/>
+              </a:spcAft>
+            </a:pPr>
+            <a:r>
+              <a:rPr sz="1050" b="1" i="0" lang="en-AU" spc="147" cap="all">
+                <a:solidFill>
+                  <a:srgbClr val="EA493F"/>
+                </a:solidFill>
+                <a:latin typeface="Inter"/>
+              </a:rPr>
+              <a:t>ASSURE</a:t>
+            </a:r>
+          </a:p>
+        </p:txBody>
+      </p:sp>
+      <p:sp>
+        <p:nvSpPr>
           <p:cNvPr id="17" name="TextBox 16"/>
           <p:cNvSpPr txBox="1"/>
           <p:nvPr/>
         </p:nvSpPr>
         <p:spPr>
           <a:xfrm>
-            <a:off x="6355080" y="4288536"/>
-            <a:ext cx="1417320" cy="731520"/>
+            <a:off x="6355080" y="5020055"/>
+            <a:ext cx="4958791" cy="457200"/>
           </a:xfrm>
           <a:prstGeom prst="rect">
             <a:avLst/>
@@ -6601,60 +9346,17 @@
           <a:p>
             <a:pPr algn="l">
               <a:lnSpc>
-                <a:spcPct val="105000"/>
-              </a:lnSpc>
-              <a:spcBef>
-                <a:spcPts val="0"/>
-              </a:spcBef>
-              <a:spcAft>
-                <a:spcPts val="0"/>
-              </a:spcAft>
-            </a:pPr>
-            <a:r>
-              <a:rPr sz="1050" b="1" i="0" lang="en-AU" spc="126" cap="all">
-                <a:solidFill>
-                  <a:srgbClr val="EA493F"/>
-                </a:solidFill>
-                <a:latin typeface="Inter"/>
-              </a:rPr>
-              <a:t>ASSURE</a:t>
-            </a:r>
-          </a:p>
-        </p:txBody>
-      </p:sp>
-      <p:sp>
-        <p:nvSpPr>
-          <p:cNvPr id="18" name="TextBox 17"/>
-          <p:cNvSpPr txBox="1"/>
-          <p:nvPr/>
-        </p:nvSpPr>
-        <p:spPr>
-          <a:xfrm>
-            <a:off x="7863840" y="4251960"/>
-            <a:ext cx="3450031" cy="822960"/>
-          </a:xfrm>
-          <a:prstGeom prst="rect">
-            <a:avLst/>
-          </a:prstGeom>
-          <a:noFill/>
-        </p:spPr>
-        <p:txBody>
-          <a:bodyPr wrap="square" anchor="ctr" lIns="0" rIns="0" tIns="0" bIns="0"/>
-          <a:lstStyle/>
-          <a:p>
-            <a:pPr algn="l">
-              <a:lnSpc>
-                <a:spcPct val="118000"/>
-              </a:lnSpc>
-              <a:spcBef>
-                <a:spcPts val="0"/>
-              </a:spcBef>
-              <a:spcAft>
-                <a:spcPts val="0"/>
-              </a:spcAft>
-            </a:pPr>
-            <a:r>
-              <a:rPr sz="1300" b="1" i="0" lang="en-AU" spc="0">
+                <a:spcPct val="110000"/>
+              </a:lnSpc>
+              <a:spcBef>
+                <a:spcPts val="0"/>
+              </a:spcBef>
+              <a:spcAft>
+                <a:spcPts val="0"/>
+              </a:spcAft>
+            </a:pPr>
+            <a:r>
+              <a:rPr sz="1400" b="1" i="0" lang="en-AU" spc="-7">
                 <a:solidFill>
                   <a:srgbClr val="FFFFFF"/>
                 </a:solidFill>
@@ -6667,13 +9369,13 @@
       </p:sp>
       <p:cxnSp>
         <p:nvCxnSpPr>
-          <p:cNvPr id="19" name="Connector 18"/>
+          <p:cNvPr id="18" name="Connector 17"/>
           <p:cNvCxnSpPr/>
           <p:nvPr/>
         </p:nvCxnSpPr>
         <p:spPr>
           <a:xfrm>
-            <a:off x="6355080" y="5111496"/>
+            <a:off x="6355080" y="5623559"/>
             <a:ext cx="4958791" cy="0"/>
           </a:xfrm>
           <a:prstGeom prst="bentConnector3">
@@ -6709,7 +9411,7 @@
 </p:sld>
 </file>
 
-<file path=ppt/slides/slide7.xml><?xml version="1.0" encoding="utf-8"?>
+<file path=ppt/slides/slide8.xml><?xml version="1.0" encoding="utf-8"?>
 <p:sld xmlns:a="http://schemas.openxmlformats.org/drawingml/2006/main" xmlns:p="http://schemas.openxmlformats.org/presentationml/2006/main" xmlns:r="http://schemas.openxmlformats.org/officeDocument/2006/relationships">
   <p:cSld>
     <p:bg>
@@ -6783,9 +9485,9 @@
               </a:spcAft>
             </a:pPr>
             <a:r>
-              <a:rPr sz="1050" b="1" i="0" lang="en-AU" spc="147" cap="all">
-                <a:solidFill>
-                  <a:srgbClr val="AEAEAE"/>
+              <a:rPr sz="1100" b="1" i="0" lang="en-AU" spc="154" cap="all">
+                <a:solidFill>
+                  <a:srgbClr val="EA493F"/>
                 </a:solidFill>
                 <a:latin typeface="Inter"/>
               </a:rPr>
@@ -6802,8 +9504,8 @@
         </p:nvSpPr>
         <p:spPr>
           <a:xfrm>
-            <a:off x="877824" y="841248"/>
-            <a:ext cx="10058400" cy="320040"/>
+            <a:off x="841248" y="914400"/>
+            <a:ext cx="10436047" cy="1097280"/>
           </a:xfrm>
           <a:prstGeom prst="rect">
             <a:avLst/>
@@ -6826,13 +9528,22 @@
               </a:spcAft>
             </a:pPr>
             <a:r>
-              <a:rPr sz="1200" b="1" i="0" lang="en-AU" spc="192" cap="all">
+              <a:rPr sz="3400" b="1" i="0" lang="en-AU" spc="-74">
+                <a:solidFill>
+                  <a:srgbClr val="111111"/>
+                </a:solidFill>
+                <a:latin typeface="Inter"/>
+              </a:rPr>
+              <a:t>Proven Workday </a:t>
+            </a:r>
+            <a:r>
+              <a:rPr sz="3400" b="1" i="0" lang="en-AU" spc="-74">
                 <a:solidFill>
                   <a:srgbClr val="EA493F"/>
                 </a:solidFill>
                 <a:latin typeface="Inter"/>
               </a:rPr>
-              <a:t>OUTCOMES</a:t>
+              <a:t>outcomes.</a:t>
             </a:r>
           </a:p>
         </p:txBody>
@@ -6845,8 +9556,8 @@
         </p:nvSpPr>
         <p:spPr>
           <a:xfrm>
-            <a:off x="841248" y="1207008"/>
-            <a:ext cx="10436047" cy="1097280"/>
+            <a:off x="877824" y="1938528"/>
+            <a:ext cx="9875520" cy="822960"/>
           </a:xfrm>
           <a:prstGeom prst="rect">
             <a:avLst/>
@@ -6859,32 +9570,23 @@
           <a:p>
             <a:pPr algn="l">
               <a:lnSpc>
-                <a:spcPct val="100000"/>
-              </a:lnSpc>
-              <a:spcBef>
-                <a:spcPts val="0"/>
-              </a:spcBef>
-              <a:spcAft>
-                <a:spcPts val="0"/>
-              </a:spcAft>
-            </a:pPr>
-            <a:r>
-              <a:rPr sz="3400" b="1" i="0" lang="en-AU" spc="-74">
-                <a:solidFill>
-                  <a:srgbClr val="111111"/>
-                </a:solidFill>
-                <a:latin typeface="Inter"/>
-              </a:rPr>
-              <a:t>Proven Workday </a:t>
-            </a:r>
-            <a:r>
-              <a:rPr sz="3400" b="1" i="0" lang="en-AU" spc="-74">
-                <a:solidFill>
-                  <a:srgbClr val="EA493F"/>
-                </a:solidFill>
-                <a:latin typeface="Inter"/>
-              </a:rPr>
-              <a:t>outcomes.</a:t>
+                <a:spcPct val="130000"/>
+              </a:lnSpc>
+              <a:spcBef>
+                <a:spcPts val="0"/>
+              </a:spcBef>
+              <a:spcAft>
+                <a:spcPts val="0"/>
+              </a:spcAft>
+            </a:pPr>
+            <a:r>
+              <a:rPr sz="1300" b="0" i="0" lang="en-AU" spc="0">
+                <a:solidFill>
+                  <a:srgbClr val="323232"/>
+                </a:solidFill>
+                <a:latin typeface="Inter"/>
+              </a:rPr>
+              <a:t>Long-term partnerships with some of Australia's most demanding operations.</a:t>
             </a:r>
           </a:p>
         </p:txBody>
@@ -6897,8 +9599,8 @@
         </p:nvSpPr>
         <p:spPr>
           <a:xfrm>
-            <a:off x="877824" y="1938528"/>
-            <a:ext cx="9875520" cy="822960"/>
+            <a:off x="877824" y="2697480"/>
+            <a:ext cx="3250082" cy="457200"/>
           </a:xfrm>
           <a:prstGeom prst="rect">
             <a:avLst/>
@@ -6911,23 +9613,23 @@
           <a:p>
             <a:pPr algn="l">
               <a:lnSpc>
-                <a:spcPct val="130000"/>
-              </a:lnSpc>
-              <a:spcBef>
-                <a:spcPts val="0"/>
-              </a:spcBef>
-              <a:spcAft>
-                <a:spcPts val="0"/>
-              </a:spcAft>
-            </a:pPr>
-            <a:r>
-              <a:rPr sz="1300" b="0" i="0" lang="en-AU" spc="0">
-                <a:solidFill>
-                  <a:srgbClr val="323232"/>
-                </a:solidFill>
-                <a:latin typeface="Inter"/>
-              </a:rPr>
-              <a:t>Long-term partnerships with some of Australia's most demanding operations.</a:t>
+                <a:spcPct val="100000"/>
+              </a:lnSpc>
+              <a:spcBef>
+                <a:spcPts val="0"/>
+              </a:spcBef>
+              <a:spcAft>
+                <a:spcPts val="0"/>
+              </a:spcAft>
+            </a:pPr>
+            <a:r>
+              <a:rPr sz="1200" b="1" i="0" lang="en-AU" spc="72" cap="all">
+                <a:solidFill>
+                  <a:srgbClr val="EA493F"/>
+                </a:solidFill>
+                <a:latin typeface="Inter"/>
+              </a:rPr>
+              <a:t>QANTAS</a:t>
             </a:r>
           </a:p>
         </p:txBody>
@@ -6940,49 +9642,6 @@
         </p:nvSpPr>
         <p:spPr>
           <a:xfrm>
-            <a:off x="877824" y="2697480"/>
-            <a:ext cx="3250082" cy="457200"/>
-          </a:xfrm>
-          <a:prstGeom prst="rect">
-            <a:avLst/>
-          </a:prstGeom>
-          <a:noFill/>
-        </p:spPr>
-        <p:txBody>
-          <a:bodyPr wrap="square" anchor="t" lIns="0" rIns="0" tIns="0" bIns="0"/>
-          <a:lstStyle/>
-          <a:p>
-            <a:pPr algn="l">
-              <a:lnSpc>
-                <a:spcPct val="100000"/>
-              </a:lnSpc>
-              <a:spcBef>
-                <a:spcPts val="0"/>
-              </a:spcBef>
-              <a:spcAft>
-                <a:spcPts val="0"/>
-              </a:spcAft>
-            </a:pPr>
-            <a:r>
-              <a:rPr sz="1200" b="1" i="0" lang="en-AU" spc="72" cap="all">
-                <a:solidFill>
-                  <a:srgbClr val="EA493F"/>
-                </a:solidFill>
-                <a:latin typeface="Inter"/>
-              </a:rPr>
-              <a:t>QANTAS</a:t>
-            </a:r>
-          </a:p>
-        </p:txBody>
-      </p:sp>
-      <p:sp>
-        <p:nvSpPr>
-          <p:cNvPr id="8" name="TextBox 7"/>
-          <p:cNvSpPr txBox="1"/>
-          <p:nvPr/>
-        </p:nvSpPr>
-        <p:spPr>
-          <a:xfrm>
             <a:off x="877824" y="3200400"/>
             <a:ext cx="3222650" cy="3108960"/>
           </a:xfrm>
@@ -7020,7 +9679,7 @@
       </p:sp>
       <p:cxnSp>
         <p:nvCxnSpPr>
-          <p:cNvPr id="9" name="Connector 8"/>
+          <p:cNvPr id="8" name="Connector 7"/>
           <p:cNvCxnSpPr/>
           <p:nvPr/>
         </p:nvCxnSpPr>
@@ -7056,55 +9715,55 @@
       </p:cxnSp>
       <p:sp>
         <p:nvSpPr>
+          <p:cNvPr id="9" name="TextBox 8"/>
+          <p:cNvSpPr txBox="1"/>
+          <p:nvPr/>
+        </p:nvSpPr>
+        <p:spPr>
+          <a:xfrm>
+            <a:off x="4649114" y="2697480"/>
+            <a:ext cx="2957474" cy="457200"/>
+          </a:xfrm>
+          <a:prstGeom prst="rect">
+            <a:avLst/>
+          </a:prstGeom>
+          <a:noFill/>
+        </p:spPr>
+        <p:txBody>
+          <a:bodyPr wrap="square" anchor="t" lIns="0" rIns="0" tIns="0" bIns="0"/>
+          <a:lstStyle/>
+          <a:p>
+            <a:pPr algn="l">
+              <a:lnSpc>
+                <a:spcPct val="100000"/>
+              </a:lnSpc>
+              <a:spcBef>
+                <a:spcPts val="0"/>
+              </a:spcBef>
+              <a:spcAft>
+                <a:spcPts val="0"/>
+              </a:spcAft>
+            </a:pPr>
+            <a:r>
+              <a:rPr sz="1200" b="1" i="0" lang="en-AU" spc="72" cap="all">
+                <a:solidFill>
+                  <a:srgbClr val="EA493F"/>
+                </a:solidFill>
+                <a:latin typeface="Inter"/>
+              </a:rPr>
+              <a:t>GUZMAN Y GOMEZ</a:t>
+            </a:r>
+          </a:p>
+        </p:txBody>
+      </p:sp>
+      <p:sp>
+        <p:nvSpPr>
           <p:cNvPr id="10" name="TextBox 9"/>
           <p:cNvSpPr txBox="1"/>
           <p:nvPr/>
         </p:nvSpPr>
         <p:spPr>
           <a:xfrm>
-            <a:off x="4649114" y="2697480"/>
-            <a:ext cx="2957474" cy="457200"/>
-          </a:xfrm>
-          <a:prstGeom prst="rect">
-            <a:avLst/>
-          </a:prstGeom>
-          <a:noFill/>
-        </p:spPr>
-        <p:txBody>
-          <a:bodyPr wrap="square" anchor="t" lIns="0" rIns="0" tIns="0" bIns="0"/>
-          <a:lstStyle/>
-          <a:p>
-            <a:pPr algn="l">
-              <a:lnSpc>
-                <a:spcPct val="100000"/>
-              </a:lnSpc>
-              <a:spcBef>
-                <a:spcPts val="0"/>
-              </a:spcBef>
-              <a:spcAft>
-                <a:spcPts val="0"/>
-              </a:spcAft>
-            </a:pPr>
-            <a:r>
-              <a:rPr sz="1200" b="1" i="0" lang="en-AU" spc="72" cap="all">
-                <a:solidFill>
-                  <a:srgbClr val="EA493F"/>
-                </a:solidFill>
-                <a:latin typeface="Inter"/>
-              </a:rPr>
-              <a:t>GUZMAN Y GOMEZ</a:t>
-            </a:r>
-          </a:p>
-        </p:txBody>
-      </p:sp>
-      <p:sp>
-        <p:nvSpPr>
-          <p:cNvPr id="11" name="TextBox 10"/>
-          <p:cNvSpPr txBox="1"/>
-          <p:nvPr/>
-        </p:nvSpPr>
-        <p:spPr>
-          <a:xfrm>
             <a:off x="4649114" y="3200400"/>
             <a:ext cx="2930042" cy="3108960"/>
           </a:xfrm>
@@ -7142,7 +9801,7 @@
       </p:sp>
       <p:cxnSp>
         <p:nvCxnSpPr>
-          <p:cNvPr id="12" name="Connector 11"/>
+          <p:cNvPr id="11" name="Connector 10"/>
           <p:cNvCxnSpPr/>
           <p:nvPr/>
         </p:nvCxnSpPr>
@@ -7178,7 +9837,7 @@
       </p:cxnSp>
       <p:sp>
         <p:nvSpPr>
-          <p:cNvPr id="13" name="TextBox 12"/>
+          <p:cNvPr id="12" name="TextBox 11"/>
           <p:cNvSpPr txBox="1"/>
           <p:nvPr/>
         </p:nvSpPr>
@@ -7221,7 +9880,7 @@
       </p:sp>
       <p:sp>
         <p:nvSpPr>
-          <p:cNvPr id="14" name="TextBox 13"/>
+          <p:cNvPr id="13" name="TextBox 12"/>
           <p:cNvSpPr txBox="1"/>
           <p:nvPr/>
         </p:nvSpPr>
@@ -7270,7 +9929,7 @@
 </p:sld>
 </file>
 
-<file path=ppt/slides/slide8.xml><?xml version="1.0" encoding="utf-8"?>
+<file path=ppt/slides/slide9.xml><?xml version="1.0" encoding="utf-8"?>
 <p:sld xmlns:a="http://schemas.openxmlformats.org/drawingml/2006/main" xmlns:p="http://schemas.openxmlformats.org/presentationml/2006/main" xmlns:r="http://schemas.openxmlformats.org/officeDocument/2006/relationships">
   <p:cSld>
     <p:bg>
@@ -7344,9 +10003,9 @@
               </a:spcAft>
             </a:pPr>
             <a:r>
-              <a:rPr sz="1050" b="1" i="0" lang="en-AU" spc="147" cap="all">
-                <a:solidFill>
-                  <a:srgbClr val="777777"/>
+              <a:rPr sz="1100" b="1" i="0" lang="en-AU" spc="154" cap="all">
+                <a:solidFill>
+                  <a:srgbClr val="EA493F"/>
                 </a:solidFill>
                 <a:latin typeface="Inter"/>
               </a:rPr>
@@ -7363,8 +10022,8 @@
         </p:nvSpPr>
         <p:spPr>
           <a:xfrm>
-            <a:off x="877824" y="841248"/>
-            <a:ext cx="7315200" cy="320040"/>
+            <a:off x="841248" y="914400"/>
+            <a:ext cx="10058400" cy="1005840"/>
           </a:xfrm>
           <a:prstGeom prst="rect">
             <a:avLst/>
@@ -7387,13 +10046,22 @@
               </a:spcAft>
             </a:pPr>
             <a:r>
-              <a:rPr sz="1200" b="1" i="0" lang="en-AU" spc="192" cap="all">
+              <a:rPr sz="3400" b="1" i="0" lang="en-AU" spc="-74">
+                <a:solidFill>
+                  <a:srgbClr val="FFFFFF"/>
+                </a:solidFill>
+                <a:latin typeface="Inter"/>
+              </a:rPr>
+              <a:t>A partner, </a:t>
+            </a:r>
+            <a:r>
+              <a:rPr sz="3400" b="1" i="0" lang="en-AU" spc="-74">
                 <a:solidFill>
                   <a:srgbClr val="EA493F"/>
                 </a:solidFill>
                 <a:latin typeface="Inter"/>
               </a:rPr>
-              <a:t>WHY MIVADA</a:t>
+              <a:t>not a vendor.</a:t>
             </a:r>
           </a:p>
         </p:txBody>
@@ -7406,58 +10074,6 @@
         </p:nvSpPr>
         <p:spPr>
           <a:xfrm>
-            <a:off x="841248" y="1225296"/>
-            <a:ext cx="10058400" cy="1005840"/>
-          </a:xfrm>
-          <a:prstGeom prst="rect">
-            <a:avLst/>
-          </a:prstGeom>
-          <a:noFill/>
-        </p:spPr>
-        <p:txBody>
-          <a:bodyPr wrap="square" anchor="t" lIns="0" rIns="0" tIns="0" bIns="0"/>
-          <a:lstStyle/>
-          <a:p>
-            <a:pPr algn="l">
-              <a:lnSpc>
-                <a:spcPct val="100000"/>
-              </a:lnSpc>
-              <a:spcBef>
-                <a:spcPts val="0"/>
-              </a:spcBef>
-              <a:spcAft>
-                <a:spcPts val="0"/>
-              </a:spcAft>
-            </a:pPr>
-            <a:r>
-              <a:rPr sz="3400" b="1" i="0" lang="en-AU" spc="-74">
-                <a:solidFill>
-                  <a:srgbClr val="FFFFFF"/>
-                </a:solidFill>
-                <a:latin typeface="Inter"/>
-              </a:rPr>
-              <a:t>A partner, </a:t>
-            </a:r>
-            <a:r>
-              <a:rPr sz="3400" b="1" i="0" lang="en-AU" spc="-74">
-                <a:solidFill>
-                  <a:srgbClr val="EA493F"/>
-                </a:solidFill>
-                <a:latin typeface="Inter"/>
-              </a:rPr>
-              <a:t>not a vendor.</a:t>
-            </a:r>
-          </a:p>
-        </p:txBody>
-      </p:sp>
-      <p:sp>
-        <p:nvSpPr>
-          <p:cNvPr id="6" name="TextBox 5"/>
-          <p:cNvSpPr txBox="1"/>
-          <p:nvPr/>
-        </p:nvSpPr>
-        <p:spPr>
-          <a:xfrm>
             <a:off x="877824" y="2971800"/>
             <a:ext cx="3204362" cy="2377440"/>
           </a:xfrm>
@@ -7539,7 +10155,7 @@
       </p:sp>
       <p:cxnSp>
         <p:nvCxnSpPr>
-          <p:cNvPr id="7" name="Connector 6"/>
+          <p:cNvPr id="6" name="Connector 5"/>
           <p:cNvCxnSpPr/>
           <p:nvPr/>
         </p:nvCxnSpPr>
@@ -7575,7 +10191,7 @@
       </p:cxnSp>
       <p:sp>
         <p:nvSpPr>
-          <p:cNvPr id="8" name="TextBox 7"/>
+          <p:cNvPr id="7" name="TextBox 6"/>
           <p:cNvSpPr txBox="1"/>
           <p:nvPr/>
         </p:nvSpPr>
@@ -7662,7 +10278,7 @@
       </p:sp>
       <p:cxnSp>
         <p:nvCxnSpPr>
-          <p:cNvPr id="9" name="Connector 8"/>
+          <p:cNvPr id="8" name="Connector 7"/>
           <p:cNvCxnSpPr/>
           <p:nvPr/>
         </p:nvCxnSpPr>
@@ -7698,7 +10314,7 @@
       </p:cxnSp>
       <p:sp>
         <p:nvSpPr>
-          <p:cNvPr id="10" name="TextBox 9"/>
+          <p:cNvPr id="9" name="TextBox 8"/>
           <p:cNvSpPr txBox="1"/>
           <p:nvPr/>
         </p:nvSpPr>
@@ -7779,1154 +10395,6 @@
                 <a:latin typeface="Inter"/>
               </a:rPr>
               <a:t>From go-live into managed services — we grow with you.</a:t>
-            </a:r>
-          </a:p>
-        </p:txBody>
-      </p:sp>
-    </p:spTree>
-  </p:cSld>
-  <p:clrMapOvr>
-    <a:masterClrMapping/>
-  </p:clrMapOvr>
-</p:sld>
-</file>
-
-<file path=ppt/slides/slide9.xml><?xml version="1.0" encoding="utf-8"?>
-<p:sld xmlns:a="http://schemas.openxmlformats.org/drawingml/2006/main" xmlns:p="http://schemas.openxmlformats.org/presentationml/2006/main" xmlns:r="http://schemas.openxmlformats.org/officeDocument/2006/relationships">
-  <p:cSld>
-    <p:bg>
-      <p:bgPr>
-        <a:solidFill>
-          <a:srgbClr val="FAFAFA"/>
-        </a:solidFill>
-        <a:effectLst/>
-      </p:bgPr>
-    </p:bg>
-    <p:spTree>
-      <p:nvGrpSpPr>
-        <p:cNvPr id="1" name=""/>
-        <p:cNvGrpSpPr/>
-        <p:nvPr/>
-      </p:nvGrpSpPr>
-      <p:grpSpPr/>
-      <p:pic>
-        <p:nvPicPr>
-          <p:cNvPr id="2" name="Picture 1" descr="Mivada_Icon_Melon_RGB_L.png"/>
-          <p:cNvPicPr>
-            <a:picLocks noChangeAspect="1"/>
-          </p:cNvPicPr>
-          <p:nvPr/>
-        </p:nvPicPr>
-        <p:blipFill>
-          <a:blip r:embed="rId2"/>
-          <a:stretch>
-            <a:fillRect/>
-          </a:stretch>
-        </p:blipFill>
-        <p:spPr>
-          <a:xfrm>
-            <a:off x="877824" y="457200"/>
-            <a:ext cx="402032" cy="237744"/>
-          </a:xfrm>
-          <a:prstGeom prst="rect">
-            <a:avLst/>
-          </a:prstGeom>
-        </p:spPr>
-      </p:pic>
-      <p:sp>
-        <p:nvSpPr>
-          <p:cNvPr id="3" name="TextBox 2"/>
-          <p:cNvSpPr txBox="1"/>
-          <p:nvPr/>
-        </p:nvSpPr>
-        <p:spPr>
-          <a:xfrm>
-            <a:off x="8259775" y="420624"/>
-            <a:ext cx="3200400" cy="320040"/>
-          </a:xfrm>
-          <a:prstGeom prst="rect">
-            <a:avLst/>
-          </a:prstGeom>
-          <a:noFill/>
-        </p:spPr>
-        <p:txBody>
-          <a:bodyPr wrap="square" anchor="t" lIns="0" rIns="0" tIns="0" bIns="0"/>
-          <a:lstStyle/>
-          <a:p>
-            <a:pPr algn="r">
-              <a:lnSpc>
-                <a:spcPct val="100000"/>
-              </a:lnSpc>
-              <a:spcBef>
-                <a:spcPts val="0"/>
-              </a:spcBef>
-              <a:spcAft>
-                <a:spcPts val="0"/>
-              </a:spcAft>
-            </a:pPr>
-            <a:r>
-              <a:rPr sz="1050" b="1" i="0" lang="en-AU" spc="147" cap="all">
-                <a:solidFill>
-                  <a:srgbClr val="AEAEAE"/>
-                </a:solidFill>
-                <a:latin typeface="Inter"/>
-              </a:rPr>
-              <a:t>08 · CAPABILITY</a:t>
-            </a:r>
-          </a:p>
-        </p:txBody>
-      </p:sp>
-      <p:sp>
-        <p:nvSpPr>
-          <p:cNvPr id="4" name="TextBox 3"/>
-          <p:cNvSpPr txBox="1"/>
-          <p:nvPr/>
-        </p:nvSpPr>
-        <p:spPr>
-          <a:xfrm>
-            <a:off x="877824" y="841248"/>
-            <a:ext cx="10058400" cy="320040"/>
-          </a:xfrm>
-          <a:prstGeom prst="rect">
-            <a:avLst/>
-          </a:prstGeom>
-          <a:noFill/>
-        </p:spPr>
-        <p:txBody>
-          <a:bodyPr wrap="square" anchor="t" lIns="0" rIns="0" tIns="0" bIns="0"/>
-          <a:lstStyle/>
-          <a:p>
-            <a:pPr algn="l">
-              <a:lnSpc>
-                <a:spcPct val="100000"/>
-              </a:lnSpc>
-              <a:spcBef>
-                <a:spcPts val="0"/>
-              </a:spcBef>
-              <a:spcAft>
-                <a:spcPts val="0"/>
-              </a:spcAft>
-            </a:pPr>
-            <a:r>
-              <a:rPr sz="1200" b="1" i="0" lang="en-AU" spc="192" cap="all">
-                <a:solidFill>
-                  <a:srgbClr val="EA493F"/>
-                </a:solidFill>
-                <a:latin typeface="Inter"/>
-              </a:rPr>
-              <a:t>CAPABILITY</a:t>
-            </a:r>
-          </a:p>
-        </p:txBody>
-      </p:sp>
-      <p:sp>
-        <p:nvSpPr>
-          <p:cNvPr id="5" name="TextBox 4"/>
-          <p:cNvSpPr txBox="1"/>
-          <p:nvPr/>
-        </p:nvSpPr>
-        <p:spPr>
-          <a:xfrm>
-            <a:off x="841248" y="1207008"/>
-            <a:ext cx="10436047" cy="1097280"/>
-          </a:xfrm>
-          <a:prstGeom prst="rect">
-            <a:avLst/>
-          </a:prstGeom>
-          <a:noFill/>
-        </p:spPr>
-        <p:txBody>
-          <a:bodyPr wrap="square" anchor="t" lIns="0" rIns="0" tIns="0" bIns="0"/>
-          <a:lstStyle/>
-          <a:p>
-            <a:pPr algn="l">
-              <a:lnSpc>
-                <a:spcPct val="100000"/>
-              </a:lnSpc>
-              <a:spcBef>
-                <a:spcPts val="0"/>
-              </a:spcBef>
-              <a:spcAft>
-                <a:spcPts val="0"/>
-              </a:spcAft>
-            </a:pPr>
-            <a:r>
-              <a:rPr sz="3400" b="1" i="0" lang="en-AU" spc="-74">
-                <a:solidFill>
-                  <a:srgbClr val="111111"/>
-                </a:solidFill>
-                <a:latin typeface="Inter"/>
-              </a:rPr>
-              <a:t>Proven in </a:t>
-            </a:r>
-            <a:r>
-              <a:rPr sz="3400" b="1" i="0" lang="en-AU" spc="-74">
-                <a:solidFill>
-                  <a:srgbClr val="EA493F"/>
-                </a:solidFill>
-                <a:latin typeface="Inter"/>
-              </a:rPr>
-              <a:t>Workday.</a:t>
-            </a:r>
-          </a:p>
-        </p:txBody>
-      </p:sp>
-      <p:sp>
-        <p:nvSpPr>
-          <p:cNvPr id="6" name="TextBox 5"/>
-          <p:cNvSpPr txBox="1"/>
-          <p:nvPr/>
-        </p:nvSpPr>
-        <p:spPr>
-          <a:xfrm>
-            <a:off x="877824" y="1993392"/>
-            <a:ext cx="9875520" cy="822960"/>
-          </a:xfrm>
-          <a:prstGeom prst="rect">
-            <a:avLst/>
-          </a:prstGeom>
-          <a:noFill/>
-        </p:spPr>
-        <p:txBody>
-          <a:bodyPr wrap="square" anchor="t" lIns="0" rIns="0" tIns="0" bIns="0"/>
-          <a:lstStyle/>
-          <a:p>
-            <a:pPr algn="l">
-              <a:lnSpc>
-                <a:spcPct val="130000"/>
-              </a:lnSpc>
-              <a:spcBef>
-                <a:spcPts val="0"/>
-              </a:spcBef>
-              <a:spcAft>
-                <a:spcPts val="0"/>
-              </a:spcAft>
-            </a:pPr>
-            <a:r>
-              <a:rPr sz="1400" b="0" i="0" lang="en-AU" spc="0">
-                <a:solidFill>
-                  <a:srgbClr val="323232"/>
-                </a:solidFill>
-                <a:latin typeface="Inter"/>
-              </a:rPr>
-              <a:t>A decade of Workday delivery — consultants average 3+ years on the platform.</a:t>
-            </a:r>
-          </a:p>
-        </p:txBody>
-      </p:sp>
-      <p:cxnSp>
-        <p:nvCxnSpPr>
-          <p:cNvPr id="7" name="Connector 6"/>
-          <p:cNvCxnSpPr/>
-          <p:nvPr/>
-        </p:nvCxnSpPr>
-        <p:spPr>
-          <a:xfrm>
-            <a:off x="877824" y="3081527"/>
-            <a:ext cx="10436047" cy="0"/>
-          </a:xfrm>
-          <a:prstGeom prst="bentConnector3">
-            <a:avLst/>
-          </a:prstGeom>
-          <a:ln w="12700">
-            <a:solidFill>
-              <a:srgbClr val="E4E4E0"/>
-            </a:solidFill>
-          </a:ln>
-          <a:effectLst/>
-        </p:spPr>
-        <p:style>
-          <a:lnRef idx="2">
-            <a:schemeClr val="accent1"/>
-          </a:lnRef>
-          <a:fillRef idx="0">
-            <a:schemeClr val="accent1"/>
-          </a:fillRef>
-          <a:effectRef idx="1">
-            <a:schemeClr val="accent1"/>
-          </a:effectRef>
-          <a:fontRef idx="minor">
-            <a:schemeClr val="tx1"/>
-          </a:fontRef>
-        </p:style>
-      </p:cxnSp>
-      <p:sp>
-        <p:nvSpPr>
-          <p:cNvPr id="8" name="TextBox 7"/>
-          <p:cNvSpPr txBox="1"/>
-          <p:nvPr/>
-        </p:nvSpPr>
-        <p:spPr>
-          <a:xfrm>
-            <a:off x="877824" y="3246120"/>
-            <a:ext cx="2444419" cy="1051560"/>
-          </a:xfrm>
-          <a:prstGeom prst="rect">
-            <a:avLst/>
-          </a:prstGeom>
-          <a:noFill/>
-        </p:spPr>
-        <p:txBody>
-          <a:bodyPr wrap="square" anchor="b" lIns="0" rIns="0" tIns="0" bIns="0"/>
-          <a:lstStyle/>
-          <a:p>
-            <a:pPr algn="l">
-              <a:lnSpc>
-                <a:spcPct val="92000"/>
-              </a:lnSpc>
-              <a:spcBef>
-                <a:spcPts val="0"/>
-              </a:spcBef>
-              <a:spcAft>
-                <a:spcPts val="0"/>
-              </a:spcAft>
-            </a:pPr>
-            <a:r>
-              <a:rPr sz="5800" b="1" i="0" lang="en-AU" spc="-203">
-                <a:solidFill>
-                  <a:srgbClr val="111111"/>
-                </a:solidFill>
-                <a:latin typeface="Inter"/>
-              </a:rPr>
-              <a:t>3</a:t>
-            </a:r>
-            <a:r>
-              <a:rPr sz="5800" b="1" i="0" lang="en-AU" spc="-203">
-                <a:solidFill>
-                  <a:srgbClr val="EA493F"/>
-                </a:solidFill>
-                <a:latin typeface="Inter"/>
-              </a:rPr>
-              <a:t>+</a:t>
-            </a:r>
-          </a:p>
-        </p:txBody>
-      </p:sp>
-      <p:sp>
-        <p:nvSpPr>
-          <p:cNvPr id="9" name="TextBox 8"/>
-          <p:cNvSpPr txBox="1"/>
-          <p:nvPr/>
-        </p:nvSpPr>
-        <p:spPr>
-          <a:xfrm>
-            <a:off x="877824" y="4379976"/>
-            <a:ext cx="2380411" cy="640080"/>
-          </a:xfrm>
-          <a:prstGeom prst="rect">
-            <a:avLst/>
-          </a:prstGeom>
-          <a:noFill/>
-        </p:spPr>
-        <p:txBody>
-          <a:bodyPr wrap="square" anchor="t" lIns="0" rIns="0" tIns="0" bIns="0"/>
-          <a:lstStyle/>
-          <a:p>
-            <a:pPr algn="l">
-              <a:lnSpc>
-                <a:spcPct val="115000"/>
-              </a:lnSpc>
-              <a:spcBef>
-                <a:spcPts val="0"/>
-              </a:spcBef>
-              <a:spcAft>
-                <a:spcPts val="0"/>
-              </a:spcAft>
-            </a:pPr>
-            <a:r>
-              <a:rPr sz="1050" b="1" i="0" lang="en-AU" spc="126" cap="all">
-                <a:solidFill>
-                  <a:srgbClr val="AEAEAE"/>
-                </a:solidFill>
-                <a:latin typeface="Inter"/>
-              </a:rPr>
-              <a:t>CERTIFICATIONS / CONSULTANT</a:t>
-            </a:r>
-          </a:p>
-        </p:txBody>
-      </p:sp>
-      <p:cxnSp>
-        <p:nvCxnSpPr>
-          <p:cNvPr id="10" name="Connector 9"/>
-          <p:cNvCxnSpPr/>
-          <p:nvPr/>
-        </p:nvCxnSpPr>
-        <p:spPr>
-          <a:xfrm>
-            <a:off x="3486835" y="3291839"/>
-            <a:ext cx="0" cy="1554481"/>
-          </a:xfrm>
-          <a:prstGeom prst="bentConnector3">
-            <a:avLst/>
-          </a:prstGeom>
-          <a:ln w="12700">
-            <a:solidFill>
-              <a:srgbClr val="E4E4E0"/>
-            </a:solidFill>
-          </a:ln>
-          <a:effectLst/>
-        </p:spPr>
-        <p:style>
-          <a:lnRef idx="2">
-            <a:schemeClr val="accent1"/>
-          </a:lnRef>
-          <a:fillRef idx="0">
-            <a:schemeClr val="accent1"/>
-          </a:fillRef>
-          <a:effectRef idx="1">
-            <a:schemeClr val="accent1"/>
-          </a:effectRef>
-          <a:fontRef idx="minor">
-            <a:schemeClr val="tx1"/>
-          </a:fontRef>
-        </p:style>
-      </p:cxnSp>
-      <p:sp>
-        <p:nvSpPr>
-          <p:cNvPr id="11" name="TextBox 10"/>
-          <p:cNvSpPr txBox="1"/>
-          <p:nvPr/>
-        </p:nvSpPr>
-        <p:spPr>
-          <a:xfrm>
-            <a:off x="3797731" y="3246120"/>
-            <a:ext cx="2133523" cy="1051560"/>
-          </a:xfrm>
-          <a:prstGeom prst="rect">
-            <a:avLst/>
-          </a:prstGeom>
-          <a:noFill/>
-        </p:spPr>
-        <p:txBody>
-          <a:bodyPr wrap="square" anchor="b" lIns="0" rIns="0" tIns="0" bIns="0"/>
-          <a:lstStyle/>
-          <a:p>
-            <a:pPr algn="l">
-              <a:lnSpc>
-                <a:spcPct val="92000"/>
-              </a:lnSpc>
-              <a:spcBef>
-                <a:spcPts val="0"/>
-              </a:spcBef>
-              <a:spcAft>
-                <a:spcPts val="0"/>
-              </a:spcAft>
-            </a:pPr>
-            <a:r>
-              <a:rPr sz="5800" b="1" i="0" lang="en-AU" spc="-203">
-                <a:solidFill>
-                  <a:srgbClr val="111111"/>
-                </a:solidFill>
-                <a:latin typeface="Inter"/>
-              </a:rPr>
-              <a:t>2000</a:t>
-            </a:r>
-            <a:r>
-              <a:rPr sz="5800" b="1" i="0" lang="en-AU" spc="-203">
-                <a:solidFill>
-                  <a:srgbClr val="EA493F"/>
-                </a:solidFill>
-                <a:latin typeface="Inter"/>
-              </a:rPr>
-              <a:t>+</a:t>
-            </a:r>
-          </a:p>
-        </p:txBody>
-      </p:sp>
-      <p:sp>
-        <p:nvSpPr>
-          <p:cNvPr id="12" name="TextBox 11"/>
-          <p:cNvSpPr txBox="1"/>
-          <p:nvPr/>
-        </p:nvSpPr>
-        <p:spPr>
-          <a:xfrm>
-            <a:off x="3797731" y="4379976"/>
-            <a:ext cx="2069515" cy="640080"/>
-          </a:xfrm>
-          <a:prstGeom prst="rect">
-            <a:avLst/>
-          </a:prstGeom>
-          <a:noFill/>
-        </p:spPr>
-        <p:txBody>
-          <a:bodyPr wrap="square" anchor="t" lIns="0" rIns="0" tIns="0" bIns="0"/>
-          <a:lstStyle/>
-          <a:p>
-            <a:pPr algn="l">
-              <a:lnSpc>
-                <a:spcPct val="115000"/>
-              </a:lnSpc>
-              <a:spcBef>
-                <a:spcPts val="0"/>
-              </a:spcBef>
-              <a:spcAft>
-                <a:spcPts val="0"/>
-              </a:spcAft>
-            </a:pPr>
-            <a:r>
-              <a:rPr sz="1050" b="1" i="0" lang="en-AU" spc="126" cap="all">
-                <a:solidFill>
-                  <a:srgbClr val="AEAEAE"/>
-                </a:solidFill>
-                <a:latin typeface="Inter"/>
-              </a:rPr>
-              <a:t>WORKDAY INTEGRATIONS</a:t>
-            </a:r>
-          </a:p>
-        </p:txBody>
-      </p:sp>
-      <p:cxnSp>
-        <p:nvCxnSpPr>
-          <p:cNvPr id="13" name="Connector 12"/>
-          <p:cNvCxnSpPr/>
-          <p:nvPr/>
-        </p:nvCxnSpPr>
-        <p:spPr>
-          <a:xfrm>
-            <a:off x="6095847" y="3291839"/>
-            <a:ext cx="0" cy="1554481"/>
-          </a:xfrm>
-          <a:prstGeom prst="bentConnector3">
-            <a:avLst/>
-          </a:prstGeom>
-          <a:ln w="12700">
-            <a:solidFill>
-              <a:srgbClr val="E4E4E0"/>
-            </a:solidFill>
-          </a:ln>
-          <a:effectLst/>
-        </p:spPr>
-        <p:style>
-          <a:lnRef idx="2">
-            <a:schemeClr val="accent1"/>
-          </a:lnRef>
-          <a:fillRef idx="0">
-            <a:schemeClr val="accent1"/>
-          </a:fillRef>
-          <a:effectRef idx="1">
-            <a:schemeClr val="accent1"/>
-          </a:effectRef>
-          <a:fontRef idx="minor">
-            <a:schemeClr val="tx1"/>
-          </a:fontRef>
-        </p:style>
-      </p:cxnSp>
-      <p:sp>
-        <p:nvSpPr>
-          <p:cNvPr id="14" name="TextBox 13"/>
-          <p:cNvSpPr txBox="1"/>
-          <p:nvPr/>
-        </p:nvSpPr>
-        <p:spPr>
-          <a:xfrm>
-            <a:off x="6406743" y="3246120"/>
-            <a:ext cx="2133523" cy="1051560"/>
-          </a:xfrm>
-          <a:prstGeom prst="rect">
-            <a:avLst/>
-          </a:prstGeom>
-          <a:noFill/>
-        </p:spPr>
-        <p:txBody>
-          <a:bodyPr wrap="square" anchor="b" lIns="0" rIns="0" tIns="0" bIns="0"/>
-          <a:lstStyle/>
-          <a:p>
-            <a:pPr algn="l">
-              <a:lnSpc>
-                <a:spcPct val="92000"/>
-              </a:lnSpc>
-              <a:spcBef>
-                <a:spcPts val="0"/>
-              </a:spcBef>
-              <a:spcAft>
-                <a:spcPts val="0"/>
-              </a:spcAft>
-            </a:pPr>
-            <a:r>
-              <a:rPr sz="5800" b="1" i="0" lang="en-AU" spc="-203">
-                <a:solidFill>
-                  <a:srgbClr val="111111"/>
-                </a:solidFill>
-                <a:latin typeface="Inter"/>
-              </a:rPr>
-              <a:t>3000</a:t>
-            </a:r>
-            <a:r>
-              <a:rPr sz="5800" b="1" i="0" lang="en-AU" spc="-203">
-                <a:solidFill>
-                  <a:srgbClr val="EA493F"/>
-                </a:solidFill>
-                <a:latin typeface="Inter"/>
-              </a:rPr>
-              <a:t>+</a:t>
-            </a:r>
-          </a:p>
-        </p:txBody>
-      </p:sp>
-      <p:sp>
-        <p:nvSpPr>
-          <p:cNvPr id="15" name="TextBox 14"/>
-          <p:cNvSpPr txBox="1"/>
-          <p:nvPr/>
-        </p:nvSpPr>
-        <p:spPr>
-          <a:xfrm>
-            <a:off x="6406743" y="4379976"/>
-            <a:ext cx="2069515" cy="640080"/>
-          </a:xfrm>
-          <a:prstGeom prst="rect">
-            <a:avLst/>
-          </a:prstGeom>
-          <a:noFill/>
-        </p:spPr>
-        <p:txBody>
-          <a:bodyPr wrap="square" anchor="t" lIns="0" rIns="0" tIns="0" bIns="0"/>
-          <a:lstStyle/>
-          <a:p>
-            <a:pPr algn="l">
-              <a:lnSpc>
-                <a:spcPct val="115000"/>
-              </a:lnSpc>
-              <a:spcBef>
-                <a:spcPts val="0"/>
-              </a:spcBef>
-              <a:spcAft>
-                <a:spcPts val="0"/>
-              </a:spcAft>
-            </a:pPr>
-            <a:r>
-              <a:rPr sz="1050" b="1" i="0" lang="en-AU" spc="126" cap="all">
-                <a:solidFill>
-                  <a:srgbClr val="AEAEAE"/>
-                </a:solidFill>
-                <a:latin typeface="Inter"/>
-              </a:rPr>
-              <a:t>CUSTOM REPORTS</a:t>
-            </a:r>
-          </a:p>
-        </p:txBody>
-      </p:sp>
-      <p:cxnSp>
-        <p:nvCxnSpPr>
-          <p:cNvPr id="16" name="Connector 15"/>
-          <p:cNvCxnSpPr/>
-          <p:nvPr/>
-        </p:nvCxnSpPr>
-        <p:spPr>
-          <a:xfrm>
-            <a:off x="8704859" y="3291839"/>
-            <a:ext cx="0" cy="1554481"/>
-          </a:xfrm>
-          <a:prstGeom prst="bentConnector3">
-            <a:avLst/>
-          </a:prstGeom>
-          <a:ln w="12700">
-            <a:solidFill>
-              <a:srgbClr val="E4E4E0"/>
-            </a:solidFill>
-          </a:ln>
-          <a:effectLst/>
-        </p:spPr>
-        <p:style>
-          <a:lnRef idx="2">
-            <a:schemeClr val="accent1"/>
-          </a:lnRef>
-          <a:fillRef idx="0">
-            <a:schemeClr val="accent1"/>
-          </a:fillRef>
-          <a:effectRef idx="1">
-            <a:schemeClr val="accent1"/>
-          </a:effectRef>
-          <a:fontRef idx="minor">
-            <a:schemeClr val="tx1"/>
-          </a:fontRef>
-        </p:style>
-      </p:cxnSp>
-      <p:sp>
-        <p:nvSpPr>
-          <p:cNvPr id="17" name="TextBox 16"/>
-          <p:cNvSpPr txBox="1"/>
-          <p:nvPr/>
-        </p:nvSpPr>
-        <p:spPr>
-          <a:xfrm>
-            <a:off x="9015755" y="3246120"/>
-            <a:ext cx="2133523" cy="1051560"/>
-          </a:xfrm>
-          <a:prstGeom prst="rect">
-            <a:avLst/>
-          </a:prstGeom>
-          <a:noFill/>
-        </p:spPr>
-        <p:txBody>
-          <a:bodyPr wrap="square" anchor="b" lIns="0" rIns="0" tIns="0" bIns="0"/>
-          <a:lstStyle/>
-          <a:p>
-            <a:pPr algn="l">
-              <a:lnSpc>
-                <a:spcPct val="92000"/>
-              </a:lnSpc>
-              <a:spcBef>
-                <a:spcPts val="0"/>
-              </a:spcBef>
-              <a:spcAft>
-                <a:spcPts val="0"/>
-              </a:spcAft>
-            </a:pPr>
-            <a:r>
-              <a:rPr sz="5800" b="1" i="0" lang="en-AU" spc="-203">
-                <a:solidFill>
-                  <a:srgbClr val="111111"/>
-                </a:solidFill>
-                <a:latin typeface="Inter"/>
-              </a:rPr>
-              <a:t>30</a:t>
-            </a:r>
-            <a:r>
-              <a:rPr sz="5800" b="1" i="0" lang="en-AU" spc="-203">
-                <a:solidFill>
-                  <a:srgbClr val="EA493F"/>
-                </a:solidFill>
-                <a:latin typeface="Inter"/>
-              </a:rPr>
-              <a:t>+</a:t>
-            </a:r>
-          </a:p>
-        </p:txBody>
-      </p:sp>
-      <p:sp>
-        <p:nvSpPr>
-          <p:cNvPr id="18" name="TextBox 17"/>
-          <p:cNvSpPr txBox="1"/>
-          <p:nvPr/>
-        </p:nvSpPr>
-        <p:spPr>
-          <a:xfrm>
-            <a:off x="9015755" y="4379976"/>
-            <a:ext cx="2069515" cy="640080"/>
-          </a:xfrm>
-          <a:prstGeom prst="rect">
-            <a:avLst/>
-          </a:prstGeom>
-          <a:noFill/>
-        </p:spPr>
-        <p:txBody>
-          <a:bodyPr wrap="square" anchor="t" lIns="0" rIns="0" tIns="0" bIns="0"/>
-          <a:lstStyle/>
-          <a:p>
-            <a:pPr algn="l">
-              <a:lnSpc>
-                <a:spcPct val="115000"/>
-              </a:lnSpc>
-              <a:spcBef>
-                <a:spcPts val="0"/>
-              </a:spcBef>
-              <a:spcAft>
-                <a:spcPts val="0"/>
-              </a:spcAft>
-            </a:pPr>
-            <a:r>
-              <a:rPr sz="1050" b="1" i="0" lang="en-AU" spc="126" cap="all">
-                <a:solidFill>
-                  <a:srgbClr val="AEAEAE"/>
-                </a:solidFill>
-                <a:latin typeface="Inter"/>
-              </a:rPr>
-              <a:t>IMPLEMENTATIONS &amp; SUPPORT</a:t>
-            </a:r>
-          </a:p>
-        </p:txBody>
-      </p:sp>
-      <p:cxnSp>
-        <p:nvCxnSpPr>
-          <p:cNvPr id="19" name="Connector 18"/>
-          <p:cNvCxnSpPr/>
-          <p:nvPr/>
-        </p:nvCxnSpPr>
-        <p:spPr>
-          <a:xfrm>
-            <a:off x="877824" y="4910328"/>
-            <a:ext cx="10436047" cy="0"/>
-          </a:xfrm>
-          <a:prstGeom prst="bentConnector3">
-            <a:avLst/>
-          </a:prstGeom>
-          <a:ln w="12700">
-            <a:solidFill>
-              <a:srgbClr val="E4E4E0"/>
-            </a:solidFill>
-          </a:ln>
-          <a:effectLst/>
-        </p:spPr>
-        <p:style>
-          <a:lnRef idx="2">
-            <a:schemeClr val="accent1"/>
-          </a:lnRef>
-          <a:fillRef idx="0">
-            <a:schemeClr val="accent1"/>
-          </a:fillRef>
-          <a:effectRef idx="1">
-            <a:schemeClr val="accent1"/>
-          </a:effectRef>
-          <a:fontRef idx="minor">
-            <a:schemeClr val="tx1"/>
-          </a:fontRef>
-        </p:style>
-      </p:cxnSp>
-      <p:sp>
-        <p:nvSpPr>
-          <p:cNvPr id="20" name="TextBox 19"/>
-          <p:cNvSpPr txBox="1"/>
-          <p:nvPr/>
-        </p:nvSpPr>
-        <p:spPr>
-          <a:xfrm>
-            <a:off x="877824" y="5074920"/>
-            <a:ext cx="3314090" cy="1051560"/>
-          </a:xfrm>
-          <a:prstGeom prst="rect">
-            <a:avLst/>
-          </a:prstGeom>
-          <a:noFill/>
-        </p:spPr>
-        <p:txBody>
-          <a:bodyPr wrap="square" anchor="b" lIns="0" rIns="0" tIns="0" bIns="0"/>
-          <a:lstStyle/>
-          <a:p>
-            <a:pPr algn="l">
-              <a:lnSpc>
-                <a:spcPct val="92000"/>
-              </a:lnSpc>
-              <a:spcBef>
-                <a:spcPts val="0"/>
-              </a:spcBef>
-              <a:spcAft>
-                <a:spcPts val="0"/>
-              </a:spcAft>
-            </a:pPr>
-            <a:r>
-              <a:rPr sz="5800" b="1" i="0" lang="en-AU" spc="-203">
-                <a:solidFill>
-                  <a:srgbClr val="111111"/>
-                </a:solidFill>
-                <a:latin typeface="Inter"/>
-              </a:rPr>
-              <a:t>200</a:t>
-            </a:r>
-            <a:r>
-              <a:rPr sz="5800" b="1" i="0" lang="en-AU" spc="-203">
-                <a:solidFill>
-                  <a:srgbClr val="EA493F"/>
-                </a:solidFill>
-                <a:latin typeface="Inter"/>
-              </a:rPr>
-              <a:t>+</a:t>
-            </a:r>
-          </a:p>
-        </p:txBody>
-      </p:sp>
-      <p:sp>
-        <p:nvSpPr>
-          <p:cNvPr id="21" name="TextBox 20"/>
-          <p:cNvSpPr txBox="1"/>
-          <p:nvPr/>
-        </p:nvSpPr>
-        <p:spPr>
-          <a:xfrm>
-            <a:off x="877824" y="6208776"/>
-            <a:ext cx="3250082" cy="640080"/>
-          </a:xfrm>
-          <a:prstGeom prst="rect">
-            <a:avLst/>
-          </a:prstGeom>
-          <a:noFill/>
-        </p:spPr>
-        <p:txBody>
-          <a:bodyPr wrap="square" anchor="t" lIns="0" rIns="0" tIns="0" bIns="0"/>
-          <a:lstStyle/>
-          <a:p>
-            <a:pPr algn="l">
-              <a:lnSpc>
-                <a:spcPct val="115000"/>
-              </a:lnSpc>
-              <a:spcBef>
-                <a:spcPts val="0"/>
-              </a:spcBef>
-              <a:spcAft>
-                <a:spcPts val="0"/>
-              </a:spcAft>
-            </a:pPr>
-            <a:r>
-              <a:rPr sz="1050" b="1" i="0" lang="en-AU" spc="126" cap="all">
-                <a:solidFill>
-                  <a:srgbClr val="AEAEAE"/>
-                </a:solidFill>
-                <a:latin typeface="Inter"/>
-              </a:rPr>
-              <a:t>EMPLOYEES · AU, US &amp; INDIA</a:t>
-            </a:r>
-          </a:p>
-        </p:txBody>
-      </p:sp>
-      <p:cxnSp>
-        <p:nvCxnSpPr>
-          <p:cNvPr id="22" name="Connector 21"/>
-          <p:cNvCxnSpPr/>
-          <p:nvPr/>
-        </p:nvCxnSpPr>
-        <p:spPr>
-          <a:xfrm>
-            <a:off x="4356506" y="5120640"/>
-            <a:ext cx="0" cy="1554480"/>
-          </a:xfrm>
-          <a:prstGeom prst="bentConnector3">
-            <a:avLst/>
-          </a:prstGeom>
-          <a:ln w="12700">
-            <a:solidFill>
-              <a:srgbClr val="E4E4E0"/>
-            </a:solidFill>
-          </a:ln>
-          <a:effectLst/>
-        </p:spPr>
-        <p:style>
-          <a:lnRef idx="2">
-            <a:schemeClr val="accent1"/>
-          </a:lnRef>
-          <a:fillRef idx="0">
-            <a:schemeClr val="accent1"/>
-          </a:fillRef>
-          <a:effectRef idx="1">
-            <a:schemeClr val="accent1"/>
-          </a:effectRef>
-          <a:fontRef idx="minor">
-            <a:schemeClr val="tx1"/>
-          </a:fontRef>
-        </p:style>
-      </p:cxnSp>
-      <p:sp>
-        <p:nvSpPr>
-          <p:cNvPr id="23" name="TextBox 22"/>
-          <p:cNvSpPr txBox="1"/>
-          <p:nvPr/>
-        </p:nvSpPr>
-        <p:spPr>
-          <a:xfrm>
-            <a:off x="4667402" y="5074920"/>
-            <a:ext cx="3003194" cy="1051560"/>
-          </a:xfrm>
-          <a:prstGeom prst="rect">
-            <a:avLst/>
-          </a:prstGeom>
-          <a:noFill/>
-        </p:spPr>
-        <p:txBody>
-          <a:bodyPr wrap="square" anchor="b" lIns="0" rIns="0" tIns="0" bIns="0"/>
-          <a:lstStyle/>
-          <a:p>
-            <a:pPr algn="l">
-              <a:lnSpc>
-                <a:spcPct val="92000"/>
-              </a:lnSpc>
-              <a:spcBef>
-                <a:spcPts val="0"/>
-              </a:spcBef>
-              <a:spcAft>
-                <a:spcPts val="0"/>
-              </a:spcAft>
-            </a:pPr>
-            <a:r>
-              <a:rPr sz="5800" b="1" i="0" lang="en-AU" spc="-203">
-                <a:solidFill>
-                  <a:srgbClr val="111111"/>
-                </a:solidFill>
-                <a:latin typeface="Inter"/>
-              </a:rPr>
-              <a:t>100</a:t>
-            </a:r>
-            <a:r>
-              <a:rPr sz="5800" b="1" i="0" lang="en-AU" spc="-203">
-                <a:solidFill>
-                  <a:srgbClr val="EA493F"/>
-                </a:solidFill>
-                <a:latin typeface="Inter"/>
-              </a:rPr>
-              <a:t>+</a:t>
-            </a:r>
-          </a:p>
-        </p:txBody>
-      </p:sp>
-      <p:sp>
-        <p:nvSpPr>
-          <p:cNvPr id="24" name="TextBox 23"/>
-          <p:cNvSpPr txBox="1"/>
-          <p:nvPr/>
-        </p:nvSpPr>
-        <p:spPr>
-          <a:xfrm>
-            <a:off x="4667402" y="6208776"/>
-            <a:ext cx="2939186" cy="640080"/>
-          </a:xfrm>
-          <a:prstGeom prst="rect">
-            <a:avLst/>
-          </a:prstGeom>
-          <a:noFill/>
-        </p:spPr>
-        <p:txBody>
-          <a:bodyPr wrap="square" anchor="t" lIns="0" rIns="0" tIns="0" bIns="0"/>
-          <a:lstStyle/>
-          <a:p>
-            <a:pPr algn="l">
-              <a:lnSpc>
-                <a:spcPct val="115000"/>
-              </a:lnSpc>
-              <a:spcBef>
-                <a:spcPts val="0"/>
-              </a:spcBef>
-              <a:spcAft>
-                <a:spcPts val="0"/>
-              </a:spcAft>
-            </a:pPr>
-            <a:r>
-              <a:rPr sz="1050" b="1" i="0" lang="en-AU" spc="126" cap="all">
-                <a:solidFill>
-                  <a:srgbClr val="AEAEAE"/>
-                </a:solidFill>
-                <a:latin typeface="Inter"/>
-              </a:rPr>
-              <a:t>PEOPLE-SYSTEMS CLIENTS</a:t>
-            </a:r>
-          </a:p>
-        </p:txBody>
-      </p:sp>
-      <p:cxnSp>
-        <p:nvCxnSpPr>
-          <p:cNvPr id="25" name="Connector 24"/>
-          <p:cNvCxnSpPr/>
-          <p:nvPr/>
-        </p:nvCxnSpPr>
-        <p:spPr>
-          <a:xfrm>
-            <a:off x="7835188" y="5120640"/>
-            <a:ext cx="0" cy="1554480"/>
-          </a:xfrm>
-          <a:prstGeom prst="bentConnector3">
-            <a:avLst/>
-          </a:prstGeom>
-          <a:ln w="12700">
-            <a:solidFill>
-              <a:srgbClr val="E4E4E0"/>
-            </a:solidFill>
-          </a:ln>
-          <a:effectLst/>
-        </p:spPr>
-        <p:style>
-          <a:lnRef idx="2">
-            <a:schemeClr val="accent1"/>
-          </a:lnRef>
-          <a:fillRef idx="0">
-            <a:schemeClr val="accent1"/>
-          </a:fillRef>
-          <a:effectRef idx="1">
-            <a:schemeClr val="accent1"/>
-          </a:effectRef>
-          <a:fontRef idx="minor">
-            <a:schemeClr val="tx1"/>
-          </a:fontRef>
-        </p:style>
-      </p:cxnSp>
-      <p:sp>
-        <p:nvSpPr>
-          <p:cNvPr id="26" name="TextBox 25"/>
-          <p:cNvSpPr txBox="1"/>
-          <p:nvPr/>
-        </p:nvSpPr>
-        <p:spPr>
-          <a:xfrm>
-            <a:off x="8146084" y="5074920"/>
-            <a:ext cx="3003194" cy="1051560"/>
-          </a:xfrm>
-          <a:prstGeom prst="rect">
-            <a:avLst/>
-          </a:prstGeom>
-          <a:noFill/>
-        </p:spPr>
-        <p:txBody>
-          <a:bodyPr wrap="square" anchor="b" lIns="0" rIns="0" tIns="0" bIns="0"/>
-          <a:lstStyle/>
-          <a:p>
-            <a:pPr algn="l">
-              <a:lnSpc>
-                <a:spcPct val="92000"/>
-              </a:lnSpc>
-              <a:spcBef>
-                <a:spcPts val="0"/>
-              </a:spcBef>
-              <a:spcAft>
-                <a:spcPts val="0"/>
-              </a:spcAft>
-            </a:pPr>
-            <a:r>
-              <a:rPr sz="5800" b="1" i="0" lang="en-AU" spc="-203">
-                <a:solidFill>
-                  <a:srgbClr val="111111"/>
-                </a:solidFill>
-                <a:latin typeface="Inter"/>
-              </a:rPr>
-              <a:t>10</a:t>
-            </a:r>
-            <a:r>
-              <a:rPr sz="5800" b="1" i="0" lang="en-AU" spc="-203">
-                <a:solidFill>
-                  <a:srgbClr val="EA493F"/>
-                </a:solidFill>
-                <a:latin typeface="Inter"/>
-              </a:rPr>
-              <a:t>+</a:t>
-            </a:r>
-          </a:p>
-        </p:txBody>
-      </p:sp>
-      <p:sp>
-        <p:nvSpPr>
-          <p:cNvPr id="27" name="TextBox 26"/>
-          <p:cNvSpPr txBox="1"/>
-          <p:nvPr/>
-        </p:nvSpPr>
-        <p:spPr>
-          <a:xfrm>
-            <a:off x="8146084" y="6208776"/>
-            <a:ext cx="2939186" cy="640080"/>
-          </a:xfrm>
-          <a:prstGeom prst="rect">
-            <a:avLst/>
-          </a:prstGeom>
-          <a:noFill/>
-        </p:spPr>
-        <p:txBody>
-          <a:bodyPr wrap="square" anchor="t" lIns="0" rIns="0" tIns="0" bIns="0"/>
-          <a:lstStyle/>
-          <a:p>
-            <a:pPr algn="l">
-              <a:lnSpc>
-                <a:spcPct val="115000"/>
-              </a:lnSpc>
-              <a:spcBef>
-                <a:spcPts val="0"/>
-              </a:spcBef>
-              <a:spcAft>
-                <a:spcPts val="0"/>
-              </a:spcAft>
-            </a:pPr>
-            <a:r>
-              <a:rPr sz="1050" b="1" i="0" lang="en-AU" spc="126" cap="all">
-                <a:solidFill>
-                  <a:srgbClr val="AEAEAE"/>
-                </a:solidFill>
-                <a:latin typeface="Inter"/>
-              </a:rPr>
-              <a:t>YEARS DELIVERING WORKDAY</a:t>
             </a:r>
           </a:p>
         </p:txBody>

--- a/design-system/samples/Mivada_Company_Overview.pptx
+++ b/design-system/samples/Mivada_Company_Overview.pptx
@@ -4909,7 +4909,7 @@
                 </a:solidFill>
                 <a:latin typeface="Inter"/>
               </a:rPr>
-              <a:t>02 · WHO WE ARE</a:t>
+              <a:t>WHO WE ARE</a:t>
             </a:r>
           </a:p>
         </p:txBody>
@@ -7249,7 +7249,7 @@
                 </a:solidFill>
                 <a:latin typeface="Inter"/>
               </a:rPr>
-              <a:t>03 · WHAT WE DO</a:t>
+              <a:t>WHAT WE DO</a:t>
             </a:r>
           </a:p>
         </p:txBody>
@@ -8178,7 +8178,7 @@
                 </a:solidFill>
                 <a:latin typeface="Inter"/>
               </a:rPr>
-              <a:t>04 · HOW WE WORK</a:t>
+              <a:t>HOW WE WORK</a:t>
             </a:r>
           </a:p>
         </p:txBody>
@@ -8779,7 +8779,7 @@
                 </a:solidFill>
                 <a:latin typeface="Inter"/>
               </a:rPr>
-              <a:t>05 · DATA &amp; AI</a:t>
+              <a:t>DATA &amp; AI</a:t>
             </a:r>
           </a:p>
         </p:txBody>
@@ -10009,7 +10009,7 @@
                 </a:solidFill>
                 <a:latin typeface="Inter"/>
               </a:rPr>
-              <a:t>07 · WHY MIVADA</a:t>
+              <a:t>WHY MIVADA</a:t>
             </a:r>
           </a:p>
         </p:txBody>
